--- a/Semana 5/20250915_07_Retrospectiva del Sprint.pptx
+++ b/Semana 5/20250915_07_Retrospectiva del Sprint.pptx
@@ -6,17 +6,22 @@
     <p:sldMasterId id="2147483684" r:id="rId6"/>
     <p:sldMasterId id="2147483708" r:id="rId7"/>
     <p:sldMasterId id="2147483720" r:id="rId8"/>
-    <p:sldMasterId id="2147483780" r:id="rId9"/>
+    <p:sldMasterId id="2147483762" r:id="rId9"/>
   </p:sldMasterIdLst>
   <p:notesMasterIdLst>
-    <p:notesMasterId r:id="rId15"/>
+    <p:notesMasterId r:id="rId20"/>
   </p:notesMasterIdLst>
   <p:sldIdLst>
     <p:sldId id="266" r:id="rId10"/>
-    <p:sldId id="272" r:id="rId11"/>
-    <p:sldId id="273" r:id="rId12"/>
-    <p:sldId id="274" r:id="rId13"/>
-    <p:sldId id="275" r:id="rId14"/>
+    <p:sldId id="271" r:id="rId11"/>
+    <p:sldId id="272" r:id="rId12"/>
+    <p:sldId id="273" r:id="rId13"/>
+    <p:sldId id="274" r:id="rId14"/>
+    <p:sldId id="275" r:id="rId15"/>
+    <p:sldId id="276" r:id="rId16"/>
+    <p:sldId id="277" r:id="rId17"/>
+    <p:sldId id="278" r:id="rId18"/>
+    <p:sldId id="279" r:id="rId19"/>
   </p:sldIdLst>
   <p:sldSz cx="9144000" cy="6858000" type="screen4x3"/>
   <p:notesSz cx="6858000" cy="9144000"/>
@@ -216,7 +221,7 @@
           <a:p>
             <a:fld id="{59D22397-19D0-43F4-884F-DD192CCA8686}" type="datetimeFigureOut">
               <a:rPr lang="es-PA" smtClean="0"/>
-              <a:t>09/30/2025</a:t>
+              <a:t>10/06/2025</a:t>
             </a:fld>
             <a:endParaRPr lang="es-PA"/>
           </a:p>
@@ -280,35 +285,35 @@
           <a:p>
             <a:pPr lvl="0"/>
             <a:r>
-              <a:rPr lang="en-US"/>
+              <a:rPr lang="en-US" smtClean="0"/>
               <a:t>Click to edit Master text styles</a:t>
             </a:r>
           </a:p>
           <a:p>
             <a:pPr lvl="1"/>
             <a:r>
-              <a:rPr lang="en-US"/>
+              <a:rPr lang="en-US" smtClean="0"/>
               <a:t>Second level</a:t>
             </a:r>
           </a:p>
           <a:p>
             <a:pPr lvl="2"/>
             <a:r>
-              <a:rPr lang="en-US"/>
+              <a:rPr lang="en-US" smtClean="0"/>
               <a:t>Third level</a:t>
             </a:r>
           </a:p>
           <a:p>
             <a:pPr lvl="3"/>
             <a:r>
-              <a:rPr lang="en-US"/>
+              <a:rPr lang="en-US" smtClean="0"/>
               <a:t>Fourth level</a:t>
             </a:r>
           </a:p>
           <a:p>
             <a:pPr lvl="4"/>
             <a:r>
-              <a:rPr lang="en-US"/>
+              <a:rPr lang="en-US" smtClean="0"/>
               <a:t>Fifth level</a:t>
             </a:r>
             <a:endParaRPr lang="es-PA"/>
@@ -613,7 +618,7 @@
           </a:lstStyle>
           <a:p>
             <a:r>
-              <a:rPr lang="es-ES"/>
+              <a:rPr lang="es-ES" smtClean="0"/>
               <a:t>Haga clic para modificar el estilo de título del patrón</a:t>
             </a:r>
             <a:endParaRPr lang="en-US" dirty="0"/>
@@ -681,7 +686,7 @@
           </a:lstStyle>
           <a:p>
             <a:r>
-              <a:rPr lang="es-ES"/>
+              <a:rPr lang="es-ES" smtClean="0"/>
               <a:t>Haga clic para modificar el estilo de subtítulo del patrón</a:t>
             </a:r>
             <a:endParaRPr lang="en-US" dirty="0"/>
@@ -718,7 +723,7 @@
                 </a:solidFill>
               </a:rPr>
               <a:pPr/>
-              <a:t>09/30/2025</a:t>
+              <a:t>10/06/2025</a:t>
             </a:fld>
             <a:endParaRPr lang="es-PA">
               <a:solidFill>
@@ -853,7 +858,7 @@
           <a:lstStyle/>
           <a:p>
             <a:r>
-              <a:rPr lang="es-ES"/>
+              <a:rPr lang="es-ES" smtClean="0"/>
               <a:t>Haga clic para modificar el estilo de título del patrón</a:t>
             </a:r>
             <a:endParaRPr lang="en-US" dirty="0"/>
@@ -885,35 +890,35 @@
           <a:p>
             <a:pPr lvl="0"/>
             <a:r>
-              <a:rPr lang="es-ES"/>
+              <a:rPr lang="es-ES" smtClean="0"/>
               <a:t>Haga clic para modificar el estilo de texto del patrón</a:t>
             </a:r>
           </a:p>
           <a:p>
             <a:pPr lvl="1"/>
             <a:r>
-              <a:rPr lang="es-ES"/>
+              <a:rPr lang="es-ES" smtClean="0"/>
               <a:t>Segundo nivel</a:t>
             </a:r>
           </a:p>
           <a:p>
             <a:pPr lvl="2"/>
             <a:r>
-              <a:rPr lang="es-ES"/>
+              <a:rPr lang="es-ES" smtClean="0"/>
               <a:t>Tercer nivel</a:t>
             </a:r>
           </a:p>
           <a:p>
             <a:pPr lvl="3"/>
             <a:r>
-              <a:rPr lang="es-ES"/>
+              <a:rPr lang="es-ES" smtClean="0"/>
               <a:t>Cuarto nivel</a:t>
             </a:r>
           </a:p>
           <a:p>
             <a:pPr lvl="4"/>
             <a:r>
-              <a:rPr lang="es-ES"/>
+              <a:rPr lang="es-ES" smtClean="0"/>
               <a:t>Quinto nivel</a:t>
             </a:r>
             <a:endParaRPr lang="en-US" dirty="0"/>
@@ -950,7 +955,7 @@
                 </a:solidFill>
               </a:rPr>
               <a:pPr/>
-              <a:t>09/30/2025</a:t>
+              <a:t>10/06/2025</a:t>
             </a:fld>
             <a:endParaRPr lang="es-PA">
               <a:solidFill>
@@ -1085,7 +1090,7 @@
           <a:lstStyle/>
           <a:p>
             <a:r>
-              <a:rPr lang="es-ES"/>
+              <a:rPr lang="es-ES" smtClean="0"/>
               <a:t>Haga clic para modificar el estilo de título del patrón</a:t>
             </a:r>
             <a:endParaRPr lang="en-US" dirty="0"/>
@@ -1117,35 +1122,35 @@
           <a:p>
             <a:pPr lvl="0"/>
             <a:r>
-              <a:rPr lang="es-ES"/>
+              <a:rPr lang="es-ES" smtClean="0"/>
               <a:t>Haga clic para modificar el estilo de texto del patrón</a:t>
             </a:r>
           </a:p>
           <a:p>
             <a:pPr lvl="1"/>
             <a:r>
-              <a:rPr lang="es-ES"/>
+              <a:rPr lang="es-ES" smtClean="0"/>
               <a:t>Segundo nivel</a:t>
             </a:r>
           </a:p>
           <a:p>
             <a:pPr lvl="2"/>
             <a:r>
-              <a:rPr lang="es-ES"/>
+              <a:rPr lang="es-ES" smtClean="0"/>
               <a:t>Tercer nivel</a:t>
             </a:r>
           </a:p>
           <a:p>
             <a:pPr lvl="3"/>
             <a:r>
-              <a:rPr lang="es-ES"/>
+              <a:rPr lang="es-ES" smtClean="0"/>
               <a:t>Cuarto nivel</a:t>
             </a:r>
           </a:p>
           <a:p>
             <a:pPr lvl="4"/>
             <a:r>
-              <a:rPr lang="es-ES"/>
+              <a:rPr lang="es-ES" smtClean="0"/>
               <a:t>Quinto nivel</a:t>
             </a:r>
             <a:endParaRPr lang="en-US" dirty="0"/>
@@ -1182,7 +1187,7 @@
                 </a:solidFill>
               </a:rPr>
               <a:pPr/>
-              <a:t>09/30/2025</a:t>
+              <a:t>10/06/2025</a:t>
             </a:fld>
             <a:endParaRPr lang="es-PA">
               <a:solidFill>
@@ -1321,7 +1326,7 @@
           </a:lstStyle>
           <a:p>
             <a:r>
-              <a:rPr lang="es-ES"/>
+              <a:rPr lang="es-ES" smtClean="0"/>
               <a:t>Haga clic para modificar el estilo de título del patrón</a:t>
             </a:r>
             <a:endParaRPr lang="es-PA"/>
@@ -1389,7 +1394,7 @@
           </a:lstStyle>
           <a:p>
             <a:r>
-              <a:rPr lang="es-ES"/>
+              <a:rPr lang="es-ES" smtClean="0"/>
               <a:t>Haga clic para modificar el estilo de subtítulo del patrón</a:t>
             </a:r>
             <a:endParaRPr lang="es-PA"/>
@@ -1426,7 +1431,7 @@
                 </a:solidFill>
               </a:rPr>
               <a:pPr/>
-              <a:t>09/30/2025</a:t>
+              <a:t>10/06/2025</a:t>
             </a:fld>
             <a:endParaRPr lang="es-PA">
               <a:solidFill>
@@ -1561,7 +1566,7 @@
           <a:lstStyle/>
           <a:p>
             <a:r>
-              <a:rPr lang="es-ES"/>
+              <a:rPr lang="es-ES" smtClean="0"/>
               <a:t>Haga clic para modificar el estilo de título del patrón</a:t>
             </a:r>
             <a:endParaRPr lang="es-PA"/>
@@ -1593,35 +1598,35 @@
           <a:p>
             <a:pPr lvl="0"/>
             <a:r>
-              <a:rPr lang="es-ES"/>
+              <a:rPr lang="es-ES" smtClean="0"/>
               <a:t>Haga clic para modificar el estilo de texto del patrón</a:t>
             </a:r>
           </a:p>
           <a:p>
             <a:pPr lvl="1"/>
             <a:r>
-              <a:rPr lang="es-ES"/>
+              <a:rPr lang="es-ES" smtClean="0"/>
               <a:t>Segundo nivel</a:t>
             </a:r>
           </a:p>
           <a:p>
             <a:pPr lvl="2"/>
             <a:r>
-              <a:rPr lang="es-ES"/>
+              <a:rPr lang="es-ES" smtClean="0"/>
               <a:t>Tercer nivel</a:t>
             </a:r>
           </a:p>
           <a:p>
             <a:pPr lvl="3"/>
             <a:r>
-              <a:rPr lang="es-ES"/>
+              <a:rPr lang="es-ES" smtClean="0"/>
               <a:t>Cuarto nivel</a:t>
             </a:r>
           </a:p>
           <a:p>
             <a:pPr lvl="4"/>
             <a:r>
-              <a:rPr lang="es-ES"/>
+              <a:rPr lang="es-ES" smtClean="0"/>
               <a:t>Quinto nivel</a:t>
             </a:r>
             <a:endParaRPr lang="es-PA"/>
@@ -1658,7 +1663,7 @@
                 </a:solidFill>
               </a:rPr>
               <a:pPr/>
-              <a:t>09/30/2025</a:t>
+              <a:t>10/06/2025</a:t>
             </a:fld>
             <a:endParaRPr lang="es-PA">
               <a:solidFill>
@@ -1797,7 +1802,7 @@
           </a:lstStyle>
           <a:p>
             <a:r>
-              <a:rPr lang="es-ES"/>
+              <a:rPr lang="es-ES" smtClean="0"/>
               <a:t>Haga clic para modificar el estilo de título del patrón</a:t>
             </a:r>
             <a:endParaRPr lang="es-PA"/>
@@ -1920,7 +1925,7 @@
           <a:p>
             <a:pPr lvl="0"/>
             <a:r>
-              <a:rPr lang="es-ES"/>
+              <a:rPr lang="es-ES" smtClean="0"/>
               <a:t>Haga clic para modificar el estilo de texto del patrón</a:t>
             </a:r>
           </a:p>
@@ -1956,7 +1961,7 @@
                 </a:solidFill>
               </a:rPr>
               <a:pPr/>
-              <a:t>09/30/2025</a:t>
+              <a:t>10/06/2025</a:t>
             </a:fld>
             <a:endParaRPr lang="es-PA">
               <a:solidFill>
@@ -2091,7 +2096,7 @@
           <a:lstStyle/>
           <a:p>
             <a:r>
-              <a:rPr lang="es-ES"/>
+              <a:rPr lang="es-ES" smtClean="0"/>
               <a:t>Haga clic para modificar el estilo de título del patrón</a:t>
             </a:r>
             <a:endParaRPr lang="es-PA"/>
@@ -2123,35 +2128,35 @@
           <a:p>
             <a:pPr lvl="0"/>
             <a:r>
-              <a:rPr lang="es-ES"/>
+              <a:rPr lang="es-ES" smtClean="0"/>
               <a:t>Haga clic para modificar el estilo de texto del patrón</a:t>
             </a:r>
           </a:p>
           <a:p>
             <a:pPr lvl="1"/>
             <a:r>
-              <a:rPr lang="es-ES"/>
+              <a:rPr lang="es-ES" smtClean="0"/>
               <a:t>Segundo nivel</a:t>
             </a:r>
           </a:p>
           <a:p>
             <a:pPr lvl="2"/>
             <a:r>
-              <a:rPr lang="es-ES"/>
+              <a:rPr lang="es-ES" smtClean="0"/>
               <a:t>Tercer nivel</a:t>
             </a:r>
           </a:p>
           <a:p>
             <a:pPr lvl="3"/>
             <a:r>
-              <a:rPr lang="es-ES"/>
+              <a:rPr lang="es-ES" smtClean="0"/>
               <a:t>Cuarto nivel</a:t>
             </a:r>
           </a:p>
           <a:p>
             <a:pPr lvl="4"/>
             <a:r>
-              <a:rPr lang="es-ES"/>
+              <a:rPr lang="es-ES" smtClean="0"/>
               <a:t>Quinto nivel</a:t>
             </a:r>
             <a:endParaRPr lang="es-PA"/>
@@ -2183,35 +2188,35 @@
           <a:p>
             <a:pPr lvl="0"/>
             <a:r>
-              <a:rPr lang="es-ES"/>
+              <a:rPr lang="es-ES" smtClean="0"/>
               <a:t>Haga clic para modificar el estilo de texto del patrón</a:t>
             </a:r>
           </a:p>
           <a:p>
             <a:pPr lvl="1"/>
             <a:r>
-              <a:rPr lang="es-ES"/>
+              <a:rPr lang="es-ES" smtClean="0"/>
               <a:t>Segundo nivel</a:t>
             </a:r>
           </a:p>
           <a:p>
             <a:pPr lvl="2"/>
             <a:r>
-              <a:rPr lang="es-ES"/>
+              <a:rPr lang="es-ES" smtClean="0"/>
               <a:t>Tercer nivel</a:t>
             </a:r>
           </a:p>
           <a:p>
             <a:pPr lvl="3"/>
             <a:r>
-              <a:rPr lang="es-ES"/>
+              <a:rPr lang="es-ES" smtClean="0"/>
               <a:t>Cuarto nivel</a:t>
             </a:r>
           </a:p>
           <a:p>
             <a:pPr lvl="4"/>
             <a:r>
-              <a:rPr lang="es-ES"/>
+              <a:rPr lang="es-ES" smtClean="0"/>
               <a:t>Quinto nivel</a:t>
             </a:r>
             <a:endParaRPr lang="es-PA"/>
@@ -2248,7 +2253,7 @@
                 </a:solidFill>
               </a:rPr>
               <a:pPr/>
-              <a:t>09/30/2025</a:t>
+              <a:t>10/06/2025</a:t>
             </a:fld>
             <a:endParaRPr lang="es-PA">
               <a:solidFill>
@@ -2383,7 +2388,7 @@
           <a:lstStyle/>
           <a:p>
             <a:r>
-              <a:rPr lang="es-ES"/>
+              <a:rPr lang="es-ES" smtClean="0"/>
               <a:t>Haga clic para modificar el estilo de título del patrón</a:t>
             </a:r>
             <a:endParaRPr lang="es-PA"/>
@@ -2452,7 +2457,7 @@
           <a:p>
             <a:pPr lvl="0"/>
             <a:r>
-              <a:rPr lang="es-ES"/>
+              <a:rPr lang="es-ES" smtClean="0"/>
               <a:t>Haga clic para modificar el estilo de texto del patrón</a:t>
             </a:r>
           </a:p>
@@ -2483,35 +2488,35 @@
           <a:p>
             <a:pPr lvl="0"/>
             <a:r>
-              <a:rPr lang="es-ES"/>
+              <a:rPr lang="es-ES" smtClean="0"/>
               <a:t>Haga clic para modificar el estilo de texto del patrón</a:t>
             </a:r>
           </a:p>
           <a:p>
             <a:pPr lvl="1"/>
             <a:r>
-              <a:rPr lang="es-ES"/>
+              <a:rPr lang="es-ES" smtClean="0"/>
               <a:t>Segundo nivel</a:t>
             </a:r>
           </a:p>
           <a:p>
             <a:pPr lvl="2"/>
             <a:r>
-              <a:rPr lang="es-ES"/>
+              <a:rPr lang="es-ES" smtClean="0"/>
               <a:t>Tercer nivel</a:t>
             </a:r>
           </a:p>
           <a:p>
             <a:pPr lvl="3"/>
             <a:r>
-              <a:rPr lang="es-ES"/>
+              <a:rPr lang="es-ES" smtClean="0"/>
               <a:t>Cuarto nivel</a:t>
             </a:r>
           </a:p>
           <a:p>
             <a:pPr lvl="4"/>
             <a:r>
-              <a:rPr lang="es-ES"/>
+              <a:rPr lang="es-ES" smtClean="0"/>
               <a:t>Quinto nivel</a:t>
             </a:r>
             <a:endParaRPr lang="es-PA"/>
@@ -2580,7 +2585,7 @@
           <a:p>
             <a:pPr lvl="0"/>
             <a:r>
-              <a:rPr lang="es-ES"/>
+              <a:rPr lang="es-ES" smtClean="0"/>
               <a:t>Haga clic para modificar el estilo de texto del patrón</a:t>
             </a:r>
           </a:p>
@@ -2611,35 +2616,35 @@
           <a:p>
             <a:pPr lvl="0"/>
             <a:r>
-              <a:rPr lang="es-ES"/>
+              <a:rPr lang="es-ES" smtClean="0"/>
               <a:t>Haga clic para modificar el estilo de texto del patrón</a:t>
             </a:r>
           </a:p>
           <a:p>
             <a:pPr lvl="1"/>
             <a:r>
-              <a:rPr lang="es-ES"/>
+              <a:rPr lang="es-ES" smtClean="0"/>
               <a:t>Segundo nivel</a:t>
             </a:r>
           </a:p>
           <a:p>
             <a:pPr lvl="2"/>
             <a:r>
-              <a:rPr lang="es-ES"/>
+              <a:rPr lang="es-ES" smtClean="0"/>
               <a:t>Tercer nivel</a:t>
             </a:r>
           </a:p>
           <a:p>
             <a:pPr lvl="3"/>
             <a:r>
-              <a:rPr lang="es-ES"/>
+              <a:rPr lang="es-ES" smtClean="0"/>
               <a:t>Cuarto nivel</a:t>
             </a:r>
           </a:p>
           <a:p>
             <a:pPr lvl="4"/>
             <a:r>
-              <a:rPr lang="es-ES"/>
+              <a:rPr lang="es-ES" smtClean="0"/>
               <a:t>Quinto nivel</a:t>
             </a:r>
             <a:endParaRPr lang="es-PA"/>
@@ -2676,7 +2681,7 @@
                 </a:solidFill>
               </a:rPr>
               <a:pPr/>
-              <a:t>09/30/2025</a:t>
+              <a:t>10/06/2025</a:t>
             </a:fld>
             <a:endParaRPr lang="es-PA">
               <a:solidFill>
@@ -2811,7 +2816,7 @@
           <a:lstStyle/>
           <a:p>
             <a:r>
-              <a:rPr lang="es-ES"/>
+              <a:rPr lang="es-ES" smtClean="0"/>
               <a:t>Haga clic para modificar el estilo de título del patrón</a:t>
             </a:r>
             <a:endParaRPr lang="es-PA"/>
@@ -2848,7 +2853,7 @@
                 </a:solidFill>
               </a:rPr>
               <a:pPr/>
-              <a:t>09/30/2025</a:t>
+              <a:t>10/06/2025</a:t>
             </a:fld>
             <a:endParaRPr lang="es-PA">
               <a:solidFill>
@@ -2989,7 +2994,7 @@
                 </a:solidFill>
               </a:rPr>
               <a:pPr/>
-              <a:t>09/30/2025</a:t>
+              <a:t>10/06/2025</a:t>
             </a:fld>
             <a:endParaRPr lang="es-PA">
               <a:solidFill>
@@ -3128,7 +3133,7 @@
           </a:lstStyle>
           <a:p>
             <a:r>
-              <a:rPr lang="es-ES"/>
+              <a:rPr lang="es-ES" smtClean="0"/>
               <a:t>Haga clic para modificar el estilo de título del patrón</a:t>
             </a:r>
             <a:endParaRPr lang="es-PA"/>
@@ -3188,35 +3193,35 @@
           <a:p>
             <a:pPr lvl="0"/>
             <a:r>
-              <a:rPr lang="es-ES"/>
+              <a:rPr lang="es-ES" smtClean="0"/>
               <a:t>Haga clic para modificar el estilo de texto del patrón</a:t>
             </a:r>
           </a:p>
           <a:p>
             <a:pPr lvl="1"/>
             <a:r>
-              <a:rPr lang="es-ES"/>
+              <a:rPr lang="es-ES" smtClean="0"/>
               <a:t>Segundo nivel</a:t>
             </a:r>
           </a:p>
           <a:p>
             <a:pPr lvl="2"/>
             <a:r>
-              <a:rPr lang="es-ES"/>
+              <a:rPr lang="es-ES" smtClean="0"/>
               <a:t>Tercer nivel</a:t>
             </a:r>
           </a:p>
           <a:p>
             <a:pPr lvl="3"/>
             <a:r>
-              <a:rPr lang="es-ES"/>
+              <a:rPr lang="es-ES" smtClean="0"/>
               <a:t>Cuarto nivel</a:t>
             </a:r>
           </a:p>
           <a:p>
             <a:pPr lvl="4"/>
             <a:r>
-              <a:rPr lang="es-ES"/>
+              <a:rPr lang="es-ES" smtClean="0"/>
               <a:t>Quinto nivel</a:t>
             </a:r>
             <a:endParaRPr lang="es-PA"/>
@@ -3285,7 +3290,7 @@
           <a:p>
             <a:pPr lvl="0"/>
             <a:r>
-              <a:rPr lang="es-ES"/>
+              <a:rPr lang="es-ES" smtClean="0"/>
               <a:t>Haga clic para modificar el estilo de texto del patrón</a:t>
             </a:r>
           </a:p>
@@ -3321,7 +3326,7 @@
                 </a:solidFill>
               </a:rPr>
               <a:pPr/>
-              <a:t>09/30/2025</a:t>
+              <a:t>10/06/2025</a:t>
             </a:fld>
             <a:endParaRPr lang="es-PA">
               <a:solidFill>
@@ -3456,7 +3461,7 @@
           <a:lstStyle/>
           <a:p>
             <a:r>
-              <a:rPr lang="es-ES"/>
+              <a:rPr lang="es-ES" smtClean="0"/>
               <a:t>Haga clic para modificar el estilo de título del patrón</a:t>
             </a:r>
             <a:endParaRPr lang="en-US" dirty="0"/>
@@ -3488,35 +3493,35 @@
           <a:p>
             <a:pPr lvl="0"/>
             <a:r>
-              <a:rPr lang="es-ES"/>
+              <a:rPr lang="es-ES" smtClean="0"/>
               <a:t>Haga clic para modificar el estilo de texto del patrón</a:t>
             </a:r>
           </a:p>
           <a:p>
             <a:pPr lvl="1"/>
             <a:r>
-              <a:rPr lang="es-ES"/>
+              <a:rPr lang="es-ES" smtClean="0"/>
               <a:t>Segundo nivel</a:t>
             </a:r>
           </a:p>
           <a:p>
             <a:pPr lvl="2"/>
             <a:r>
-              <a:rPr lang="es-ES"/>
+              <a:rPr lang="es-ES" smtClean="0"/>
               <a:t>Tercer nivel</a:t>
             </a:r>
           </a:p>
           <a:p>
             <a:pPr lvl="3"/>
             <a:r>
-              <a:rPr lang="es-ES"/>
+              <a:rPr lang="es-ES" smtClean="0"/>
               <a:t>Cuarto nivel</a:t>
             </a:r>
           </a:p>
           <a:p>
             <a:pPr lvl="4"/>
             <a:r>
-              <a:rPr lang="es-ES"/>
+              <a:rPr lang="es-ES" smtClean="0"/>
               <a:t>Quinto nivel</a:t>
             </a:r>
             <a:endParaRPr lang="en-US" dirty="0"/>
@@ -3553,7 +3558,7 @@
                 </a:solidFill>
               </a:rPr>
               <a:pPr/>
-              <a:t>09/30/2025</a:t>
+              <a:t>10/06/2025</a:t>
             </a:fld>
             <a:endParaRPr lang="es-PA">
               <a:solidFill>
@@ -3692,7 +3697,7 @@
           </a:lstStyle>
           <a:p>
             <a:r>
-              <a:rPr lang="es-ES"/>
+              <a:rPr lang="es-ES" smtClean="0"/>
               <a:t>Haga clic para modificar el estilo de título del patrón</a:t>
             </a:r>
             <a:endParaRPr lang="es-PA"/>
@@ -3825,7 +3830,7 @@
           <a:p>
             <a:pPr lvl="0"/>
             <a:r>
-              <a:rPr lang="es-ES"/>
+              <a:rPr lang="es-ES" smtClean="0"/>
               <a:t>Haga clic para modificar el estilo de texto del patrón</a:t>
             </a:r>
           </a:p>
@@ -3861,7 +3866,7 @@
                 </a:solidFill>
               </a:rPr>
               <a:pPr/>
-              <a:t>09/30/2025</a:t>
+              <a:t>10/06/2025</a:t>
             </a:fld>
             <a:endParaRPr lang="es-PA">
               <a:solidFill>
@@ -3996,7 +4001,7 @@
           <a:lstStyle/>
           <a:p>
             <a:r>
-              <a:rPr lang="es-ES"/>
+              <a:rPr lang="es-ES" smtClean="0"/>
               <a:t>Haga clic para modificar el estilo de título del patrón</a:t>
             </a:r>
             <a:endParaRPr lang="es-PA"/>
@@ -4028,35 +4033,35 @@
           <a:p>
             <a:pPr lvl="0"/>
             <a:r>
-              <a:rPr lang="es-ES"/>
+              <a:rPr lang="es-ES" smtClean="0"/>
               <a:t>Haga clic para modificar el estilo de texto del patrón</a:t>
             </a:r>
           </a:p>
           <a:p>
             <a:pPr lvl="1"/>
             <a:r>
-              <a:rPr lang="es-ES"/>
+              <a:rPr lang="es-ES" smtClean="0"/>
               <a:t>Segundo nivel</a:t>
             </a:r>
           </a:p>
           <a:p>
             <a:pPr lvl="2"/>
             <a:r>
-              <a:rPr lang="es-ES"/>
+              <a:rPr lang="es-ES" smtClean="0"/>
               <a:t>Tercer nivel</a:t>
             </a:r>
           </a:p>
           <a:p>
             <a:pPr lvl="3"/>
             <a:r>
-              <a:rPr lang="es-ES"/>
+              <a:rPr lang="es-ES" smtClean="0"/>
               <a:t>Cuarto nivel</a:t>
             </a:r>
           </a:p>
           <a:p>
             <a:pPr lvl="4"/>
             <a:r>
-              <a:rPr lang="es-ES"/>
+              <a:rPr lang="es-ES" smtClean="0"/>
               <a:t>Quinto nivel</a:t>
             </a:r>
             <a:endParaRPr lang="es-PA"/>
@@ -4093,7 +4098,7 @@
                 </a:solidFill>
               </a:rPr>
               <a:pPr/>
-              <a:t>09/30/2025</a:t>
+              <a:t>10/06/2025</a:t>
             </a:fld>
             <a:endParaRPr lang="es-PA">
               <a:solidFill>
@@ -4228,7 +4233,7 @@
           <a:lstStyle/>
           <a:p>
             <a:r>
-              <a:rPr lang="es-ES"/>
+              <a:rPr lang="es-ES" smtClean="0"/>
               <a:t>Haga clic para modificar el estilo de título del patrón</a:t>
             </a:r>
             <a:endParaRPr lang="es-PA"/>
@@ -4260,35 +4265,35 @@
           <a:p>
             <a:pPr lvl="0"/>
             <a:r>
-              <a:rPr lang="es-ES"/>
+              <a:rPr lang="es-ES" smtClean="0"/>
               <a:t>Haga clic para modificar el estilo de texto del patrón</a:t>
             </a:r>
           </a:p>
           <a:p>
             <a:pPr lvl="1"/>
             <a:r>
-              <a:rPr lang="es-ES"/>
+              <a:rPr lang="es-ES" smtClean="0"/>
               <a:t>Segundo nivel</a:t>
             </a:r>
           </a:p>
           <a:p>
             <a:pPr lvl="2"/>
             <a:r>
-              <a:rPr lang="es-ES"/>
+              <a:rPr lang="es-ES" smtClean="0"/>
               <a:t>Tercer nivel</a:t>
             </a:r>
           </a:p>
           <a:p>
             <a:pPr lvl="3"/>
             <a:r>
-              <a:rPr lang="es-ES"/>
+              <a:rPr lang="es-ES" smtClean="0"/>
               <a:t>Cuarto nivel</a:t>
             </a:r>
           </a:p>
           <a:p>
             <a:pPr lvl="4"/>
             <a:r>
-              <a:rPr lang="es-ES"/>
+              <a:rPr lang="es-ES" smtClean="0"/>
               <a:t>Quinto nivel</a:t>
             </a:r>
             <a:endParaRPr lang="es-PA"/>
@@ -4325,7 +4330,7 @@
                 </a:solidFill>
               </a:rPr>
               <a:pPr/>
-              <a:t>09/30/2025</a:t>
+              <a:t>10/06/2025</a:t>
             </a:fld>
             <a:endParaRPr lang="es-PA">
               <a:solidFill>
@@ -4464,7 +4469,7 @@
           </a:lstStyle>
           <a:p>
             <a:r>
-              <a:rPr lang="es-ES"/>
+              <a:rPr lang="es-ES" smtClean="0"/>
               <a:t>Haga clic para modificar el estilo de título del patrón</a:t>
             </a:r>
             <a:endParaRPr lang="en-US" dirty="0"/>
@@ -4532,7 +4537,7 @@
           </a:lstStyle>
           <a:p>
             <a:r>
-              <a:rPr lang="es-ES"/>
+              <a:rPr lang="es-ES" smtClean="0"/>
               <a:t>Haga clic para modificar el estilo de subtítulo del patrón</a:t>
             </a:r>
             <a:endParaRPr lang="en-US" dirty="0"/>
@@ -4569,7 +4574,7 @@
                 </a:solidFill>
               </a:rPr>
               <a:pPr/>
-              <a:t>09/30/2025</a:t>
+              <a:t>10/06/2025</a:t>
             </a:fld>
             <a:endParaRPr lang="es-PA">
               <a:solidFill>
@@ -4704,7 +4709,7 @@
           <a:lstStyle/>
           <a:p>
             <a:r>
-              <a:rPr lang="es-ES"/>
+              <a:rPr lang="es-ES" smtClean="0"/>
               <a:t>Haga clic para modificar el estilo de título del patrón</a:t>
             </a:r>
             <a:endParaRPr lang="en-US" dirty="0"/>
@@ -4736,35 +4741,35 @@
           <a:p>
             <a:pPr lvl="0"/>
             <a:r>
-              <a:rPr lang="es-ES"/>
+              <a:rPr lang="es-ES" smtClean="0"/>
               <a:t>Haga clic para modificar el estilo de texto del patrón</a:t>
             </a:r>
           </a:p>
           <a:p>
             <a:pPr lvl="1"/>
             <a:r>
-              <a:rPr lang="es-ES"/>
+              <a:rPr lang="es-ES" smtClean="0"/>
               <a:t>Segundo nivel</a:t>
             </a:r>
           </a:p>
           <a:p>
             <a:pPr lvl="2"/>
             <a:r>
-              <a:rPr lang="es-ES"/>
+              <a:rPr lang="es-ES" smtClean="0"/>
               <a:t>Tercer nivel</a:t>
             </a:r>
           </a:p>
           <a:p>
             <a:pPr lvl="3"/>
             <a:r>
-              <a:rPr lang="es-ES"/>
+              <a:rPr lang="es-ES" smtClean="0"/>
               <a:t>Cuarto nivel</a:t>
             </a:r>
           </a:p>
           <a:p>
             <a:pPr lvl="4"/>
             <a:r>
-              <a:rPr lang="es-ES"/>
+              <a:rPr lang="es-ES" smtClean="0"/>
               <a:t>Quinto nivel</a:t>
             </a:r>
             <a:endParaRPr lang="en-US" dirty="0"/>
@@ -4801,7 +4806,7 @@
                 </a:solidFill>
               </a:rPr>
               <a:pPr/>
-              <a:t>09/30/2025</a:t>
+              <a:t>10/06/2025</a:t>
             </a:fld>
             <a:endParaRPr lang="es-PA">
               <a:solidFill>
@@ -4940,7 +4945,7 @@
           </a:lstStyle>
           <a:p>
             <a:r>
-              <a:rPr lang="es-ES"/>
+              <a:rPr lang="es-ES" smtClean="0"/>
               <a:t>Haga clic para modificar el estilo de título del patrón</a:t>
             </a:r>
             <a:endParaRPr lang="en-US" dirty="0"/>
@@ -5061,7 +5066,7 @@
           <a:p>
             <a:pPr lvl="0"/>
             <a:r>
-              <a:rPr lang="es-ES"/>
+              <a:rPr lang="es-ES" smtClean="0"/>
               <a:t>Haga clic para modificar el estilo de texto del patrón</a:t>
             </a:r>
           </a:p>
@@ -5097,7 +5102,7 @@
                 </a:solidFill>
               </a:rPr>
               <a:pPr/>
-              <a:t>09/30/2025</a:t>
+              <a:t>10/06/2025</a:t>
             </a:fld>
             <a:endParaRPr lang="es-PA">
               <a:solidFill>
@@ -5232,7 +5237,7 @@
           <a:lstStyle/>
           <a:p>
             <a:r>
-              <a:rPr lang="es-ES"/>
+              <a:rPr lang="es-ES" smtClean="0"/>
               <a:t>Haga clic para modificar el estilo de título del patrón</a:t>
             </a:r>
             <a:endParaRPr lang="en-US" dirty="0"/>
@@ -5264,35 +5269,35 @@
           <a:p>
             <a:pPr lvl="0"/>
             <a:r>
-              <a:rPr lang="es-ES"/>
+              <a:rPr lang="es-ES" smtClean="0"/>
               <a:t>Haga clic para modificar el estilo de texto del patrón</a:t>
             </a:r>
           </a:p>
           <a:p>
             <a:pPr lvl="1"/>
             <a:r>
-              <a:rPr lang="es-ES"/>
+              <a:rPr lang="es-ES" smtClean="0"/>
               <a:t>Segundo nivel</a:t>
             </a:r>
           </a:p>
           <a:p>
             <a:pPr lvl="2"/>
             <a:r>
-              <a:rPr lang="es-ES"/>
+              <a:rPr lang="es-ES" smtClean="0"/>
               <a:t>Tercer nivel</a:t>
             </a:r>
           </a:p>
           <a:p>
             <a:pPr lvl="3"/>
             <a:r>
-              <a:rPr lang="es-ES"/>
+              <a:rPr lang="es-ES" smtClean="0"/>
               <a:t>Cuarto nivel</a:t>
             </a:r>
           </a:p>
           <a:p>
             <a:pPr lvl="4"/>
             <a:r>
-              <a:rPr lang="es-ES"/>
+              <a:rPr lang="es-ES" smtClean="0"/>
               <a:t>Quinto nivel</a:t>
             </a:r>
             <a:endParaRPr lang="en-US" dirty="0"/>
@@ -5324,35 +5329,35 @@
           <a:p>
             <a:pPr lvl="0"/>
             <a:r>
-              <a:rPr lang="es-ES"/>
+              <a:rPr lang="es-ES" smtClean="0"/>
               <a:t>Haga clic para modificar el estilo de texto del patrón</a:t>
             </a:r>
           </a:p>
           <a:p>
             <a:pPr lvl="1"/>
             <a:r>
-              <a:rPr lang="es-ES"/>
+              <a:rPr lang="es-ES" smtClean="0"/>
               <a:t>Segundo nivel</a:t>
             </a:r>
           </a:p>
           <a:p>
             <a:pPr lvl="2"/>
             <a:r>
-              <a:rPr lang="es-ES"/>
+              <a:rPr lang="es-ES" smtClean="0"/>
               <a:t>Tercer nivel</a:t>
             </a:r>
           </a:p>
           <a:p>
             <a:pPr lvl="3"/>
             <a:r>
-              <a:rPr lang="es-ES"/>
+              <a:rPr lang="es-ES" smtClean="0"/>
               <a:t>Cuarto nivel</a:t>
             </a:r>
           </a:p>
           <a:p>
             <a:pPr lvl="4"/>
             <a:r>
-              <a:rPr lang="es-ES"/>
+              <a:rPr lang="es-ES" smtClean="0"/>
               <a:t>Quinto nivel</a:t>
             </a:r>
             <a:endParaRPr lang="en-US" dirty="0"/>
@@ -5389,7 +5394,7 @@
                 </a:solidFill>
               </a:rPr>
               <a:pPr/>
-              <a:t>09/30/2025</a:t>
+              <a:t>10/06/2025</a:t>
             </a:fld>
             <a:endParaRPr lang="es-PA">
               <a:solidFill>
@@ -5524,7 +5529,7 @@
           <a:lstStyle/>
           <a:p>
             <a:r>
-              <a:rPr lang="es-ES"/>
+              <a:rPr lang="es-ES" smtClean="0"/>
               <a:t>Haga clic para modificar el estilo de título del patrón</a:t>
             </a:r>
             <a:endParaRPr lang="en-US" dirty="0"/>
@@ -5593,7 +5598,7 @@
           <a:p>
             <a:pPr lvl="0"/>
             <a:r>
-              <a:rPr lang="es-ES"/>
+              <a:rPr lang="es-ES" smtClean="0"/>
               <a:t>Haga clic para modificar el estilo de texto del patrón</a:t>
             </a:r>
           </a:p>
@@ -5624,35 +5629,35 @@
           <a:p>
             <a:pPr lvl="0"/>
             <a:r>
-              <a:rPr lang="es-ES"/>
+              <a:rPr lang="es-ES" smtClean="0"/>
               <a:t>Haga clic para modificar el estilo de texto del patrón</a:t>
             </a:r>
           </a:p>
           <a:p>
             <a:pPr lvl="1"/>
             <a:r>
-              <a:rPr lang="es-ES"/>
+              <a:rPr lang="es-ES" smtClean="0"/>
               <a:t>Segundo nivel</a:t>
             </a:r>
           </a:p>
           <a:p>
             <a:pPr lvl="2"/>
             <a:r>
-              <a:rPr lang="es-ES"/>
+              <a:rPr lang="es-ES" smtClean="0"/>
               <a:t>Tercer nivel</a:t>
             </a:r>
           </a:p>
           <a:p>
             <a:pPr lvl="3"/>
             <a:r>
-              <a:rPr lang="es-ES"/>
+              <a:rPr lang="es-ES" smtClean="0"/>
               <a:t>Cuarto nivel</a:t>
             </a:r>
           </a:p>
           <a:p>
             <a:pPr lvl="4"/>
             <a:r>
-              <a:rPr lang="es-ES"/>
+              <a:rPr lang="es-ES" smtClean="0"/>
               <a:t>Quinto nivel</a:t>
             </a:r>
             <a:endParaRPr lang="en-US" dirty="0"/>
@@ -5721,7 +5726,7 @@
           <a:p>
             <a:pPr lvl="0"/>
             <a:r>
-              <a:rPr lang="es-ES"/>
+              <a:rPr lang="es-ES" smtClean="0"/>
               <a:t>Haga clic para modificar el estilo de texto del patrón</a:t>
             </a:r>
           </a:p>
@@ -5752,35 +5757,35 @@
           <a:p>
             <a:pPr lvl="0"/>
             <a:r>
-              <a:rPr lang="es-ES"/>
+              <a:rPr lang="es-ES" smtClean="0"/>
               <a:t>Haga clic para modificar el estilo de texto del patrón</a:t>
             </a:r>
           </a:p>
           <a:p>
             <a:pPr lvl="1"/>
             <a:r>
-              <a:rPr lang="es-ES"/>
+              <a:rPr lang="es-ES" smtClean="0"/>
               <a:t>Segundo nivel</a:t>
             </a:r>
           </a:p>
           <a:p>
             <a:pPr lvl="2"/>
             <a:r>
-              <a:rPr lang="es-ES"/>
+              <a:rPr lang="es-ES" smtClean="0"/>
               <a:t>Tercer nivel</a:t>
             </a:r>
           </a:p>
           <a:p>
             <a:pPr lvl="3"/>
             <a:r>
-              <a:rPr lang="es-ES"/>
+              <a:rPr lang="es-ES" smtClean="0"/>
               <a:t>Cuarto nivel</a:t>
             </a:r>
           </a:p>
           <a:p>
             <a:pPr lvl="4"/>
             <a:r>
-              <a:rPr lang="es-ES"/>
+              <a:rPr lang="es-ES" smtClean="0"/>
               <a:t>Quinto nivel</a:t>
             </a:r>
             <a:endParaRPr lang="en-US" dirty="0"/>
@@ -5817,7 +5822,7 @@
                 </a:solidFill>
               </a:rPr>
               <a:pPr/>
-              <a:t>09/30/2025</a:t>
+              <a:t>10/06/2025</a:t>
             </a:fld>
             <a:endParaRPr lang="es-PA">
               <a:solidFill>
@@ -5952,7 +5957,7 @@
           <a:lstStyle/>
           <a:p>
             <a:r>
-              <a:rPr lang="es-ES"/>
+              <a:rPr lang="es-ES" smtClean="0"/>
               <a:t>Haga clic para modificar el estilo de título del patrón</a:t>
             </a:r>
             <a:endParaRPr lang="en-US" dirty="0"/>
@@ -5989,7 +5994,7 @@
                 </a:solidFill>
               </a:rPr>
               <a:pPr/>
-              <a:t>09/30/2025</a:t>
+              <a:t>10/06/2025</a:t>
             </a:fld>
             <a:endParaRPr lang="es-PA">
               <a:solidFill>
@@ -6130,7 +6135,7 @@
                 </a:solidFill>
               </a:rPr>
               <a:pPr/>
-              <a:t>09/30/2025</a:t>
+              <a:t>10/06/2025</a:t>
             </a:fld>
             <a:endParaRPr lang="es-PA">
               <a:solidFill>
@@ -6269,7 +6274,7 @@
           </a:lstStyle>
           <a:p>
             <a:r>
-              <a:rPr lang="es-ES"/>
+              <a:rPr lang="es-ES" smtClean="0"/>
               <a:t>Haga clic para modificar el estilo de título del patrón</a:t>
             </a:r>
             <a:endParaRPr lang="en-US" dirty="0"/>
@@ -6390,7 +6395,7 @@
           <a:p>
             <a:pPr lvl="0"/>
             <a:r>
-              <a:rPr lang="es-ES"/>
+              <a:rPr lang="es-ES" smtClean="0"/>
               <a:t>Haga clic para modificar el estilo de texto del patrón</a:t>
             </a:r>
           </a:p>
@@ -6426,7 +6431,7 @@
                 </a:solidFill>
               </a:rPr>
               <a:pPr/>
-              <a:t>09/30/2025</a:t>
+              <a:t>10/06/2025</a:t>
             </a:fld>
             <a:endParaRPr lang="es-PA">
               <a:solidFill>
@@ -6565,7 +6570,7 @@
           </a:lstStyle>
           <a:p>
             <a:r>
-              <a:rPr lang="es-ES"/>
+              <a:rPr lang="es-ES" smtClean="0"/>
               <a:t>Haga clic para modificar el estilo de título del patrón</a:t>
             </a:r>
             <a:endParaRPr lang="en-US" dirty="0"/>
@@ -6625,35 +6630,35 @@
           <a:p>
             <a:pPr lvl="0"/>
             <a:r>
-              <a:rPr lang="es-ES"/>
+              <a:rPr lang="es-ES" smtClean="0"/>
               <a:t>Haga clic para modificar el estilo de texto del patrón</a:t>
             </a:r>
           </a:p>
           <a:p>
             <a:pPr lvl="1"/>
             <a:r>
-              <a:rPr lang="es-ES"/>
+              <a:rPr lang="es-ES" smtClean="0"/>
               <a:t>Segundo nivel</a:t>
             </a:r>
           </a:p>
           <a:p>
             <a:pPr lvl="2"/>
             <a:r>
-              <a:rPr lang="es-ES"/>
+              <a:rPr lang="es-ES" smtClean="0"/>
               <a:t>Tercer nivel</a:t>
             </a:r>
           </a:p>
           <a:p>
             <a:pPr lvl="3"/>
             <a:r>
-              <a:rPr lang="es-ES"/>
+              <a:rPr lang="es-ES" smtClean="0"/>
               <a:t>Cuarto nivel</a:t>
             </a:r>
           </a:p>
           <a:p>
             <a:pPr lvl="4"/>
             <a:r>
-              <a:rPr lang="es-ES"/>
+              <a:rPr lang="es-ES" smtClean="0"/>
               <a:t>Quinto nivel</a:t>
             </a:r>
             <a:endParaRPr lang="en-US" dirty="0"/>
@@ -6722,7 +6727,7 @@
           <a:p>
             <a:pPr lvl="0"/>
             <a:r>
-              <a:rPr lang="es-ES"/>
+              <a:rPr lang="es-ES" smtClean="0"/>
               <a:t>Haga clic para modificar el estilo de texto del patrón</a:t>
             </a:r>
           </a:p>
@@ -6758,7 +6763,7 @@
                 </a:solidFill>
               </a:rPr>
               <a:pPr/>
-              <a:t>09/30/2025</a:t>
+              <a:t>10/06/2025</a:t>
             </a:fld>
             <a:endParaRPr lang="es-PA">
               <a:solidFill>
@@ -6897,7 +6902,7 @@
           </a:lstStyle>
           <a:p>
             <a:r>
-              <a:rPr lang="es-ES"/>
+              <a:rPr lang="es-ES" smtClean="0"/>
               <a:t>Haga clic para modificar el estilo de título del patrón</a:t>
             </a:r>
             <a:endParaRPr lang="en-US" dirty="0"/>
@@ -6965,7 +6970,7 @@
           </a:lstStyle>
           <a:p>
             <a:r>
-              <a:rPr lang="es-ES"/>
+              <a:rPr lang="es-ES" smtClean="0"/>
               <a:t>Haga clic en el icono para agregar una imagen</a:t>
             </a:r>
             <a:endParaRPr lang="en-US" dirty="0"/>
@@ -7034,7 +7039,7 @@
           <a:p>
             <a:pPr lvl="0"/>
             <a:r>
-              <a:rPr lang="es-ES"/>
+              <a:rPr lang="es-ES" smtClean="0"/>
               <a:t>Haga clic para modificar el estilo de texto del patrón</a:t>
             </a:r>
           </a:p>
@@ -7070,7 +7075,7 @@
                 </a:solidFill>
               </a:rPr>
               <a:pPr/>
-              <a:t>09/30/2025</a:t>
+              <a:t>10/06/2025</a:t>
             </a:fld>
             <a:endParaRPr lang="es-PA">
               <a:solidFill>
@@ -7205,7 +7210,7 @@
           <a:lstStyle/>
           <a:p>
             <a:r>
-              <a:rPr lang="es-ES"/>
+              <a:rPr lang="es-ES" smtClean="0"/>
               <a:t>Haga clic para modificar el estilo de título del patrón</a:t>
             </a:r>
             <a:endParaRPr lang="en-US" dirty="0"/>
@@ -7237,35 +7242,35 @@
           <a:p>
             <a:pPr lvl="0"/>
             <a:r>
-              <a:rPr lang="es-ES"/>
+              <a:rPr lang="es-ES" smtClean="0"/>
               <a:t>Haga clic para modificar el estilo de texto del patrón</a:t>
             </a:r>
           </a:p>
           <a:p>
             <a:pPr lvl="1"/>
             <a:r>
-              <a:rPr lang="es-ES"/>
+              <a:rPr lang="es-ES" smtClean="0"/>
               <a:t>Segundo nivel</a:t>
             </a:r>
           </a:p>
           <a:p>
             <a:pPr lvl="2"/>
             <a:r>
-              <a:rPr lang="es-ES"/>
+              <a:rPr lang="es-ES" smtClean="0"/>
               <a:t>Tercer nivel</a:t>
             </a:r>
           </a:p>
           <a:p>
             <a:pPr lvl="3"/>
             <a:r>
-              <a:rPr lang="es-ES"/>
+              <a:rPr lang="es-ES" smtClean="0"/>
               <a:t>Cuarto nivel</a:t>
             </a:r>
           </a:p>
           <a:p>
             <a:pPr lvl="4"/>
             <a:r>
-              <a:rPr lang="es-ES"/>
+              <a:rPr lang="es-ES" smtClean="0"/>
               <a:t>Quinto nivel</a:t>
             </a:r>
             <a:endParaRPr lang="en-US" dirty="0"/>
@@ -7302,7 +7307,7 @@
                 </a:solidFill>
               </a:rPr>
               <a:pPr/>
-              <a:t>09/30/2025</a:t>
+              <a:t>10/06/2025</a:t>
             </a:fld>
             <a:endParaRPr lang="es-PA">
               <a:solidFill>
@@ -7437,7 +7442,7 @@
           <a:lstStyle/>
           <a:p>
             <a:r>
-              <a:rPr lang="es-ES"/>
+              <a:rPr lang="es-ES" smtClean="0"/>
               <a:t>Haga clic para modificar el estilo de título del patrón</a:t>
             </a:r>
             <a:endParaRPr lang="en-US" dirty="0"/>
@@ -7469,35 +7474,35 @@
           <a:p>
             <a:pPr lvl="0"/>
             <a:r>
-              <a:rPr lang="es-ES"/>
+              <a:rPr lang="es-ES" smtClean="0"/>
               <a:t>Haga clic para modificar el estilo de texto del patrón</a:t>
             </a:r>
           </a:p>
           <a:p>
             <a:pPr lvl="1"/>
             <a:r>
-              <a:rPr lang="es-ES"/>
+              <a:rPr lang="es-ES" smtClean="0"/>
               <a:t>Segundo nivel</a:t>
             </a:r>
           </a:p>
           <a:p>
             <a:pPr lvl="2"/>
             <a:r>
-              <a:rPr lang="es-ES"/>
+              <a:rPr lang="es-ES" smtClean="0"/>
               <a:t>Tercer nivel</a:t>
             </a:r>
           </a:p>
           <a:p>
             <a:pPr lvl="3"/>
             <a:r>
-              <a:rPr lang="es-ES"/>
+              <a:rPr lang="es-ES" smtClean="0"/>
               <a:t>Cuarto nivel</a:t>
             </a:r>
           </a:p>
           <a:p>
             <a:pPr lvl="4"/>
             <a:r>
-              <a:rPr lang="es-ES"/>
+              <a:rPr lang="es-ES" smtClean="0"/>
               <a:t>Quinto nivel</a:t>
             </a:r>
             <a:endParaRPr lang="en-US" dirty="0"/>
@@ -7534,7 +7539,7 @@
                 </a:solidFill>
               </a:rPr>
               <a:pPr/>
-              <a:t>09/30/2025</a:t>
+              <a:t>10/06/2025</a:t>
             </a:fld>
             <a:endParaRPr lang="es-PA">
               <a:solidFill>
@@ -7673,7 +7678,7 @@
           </a:lstStyle>
           <a:p>
             <a:r>
-              <a:rPr lang="es-ES"/>
+              <a:rPr lang="es-ES" smtClean="0"/>
               <a:t>Haga clic para modificar el estilo de título del patrón</a:t>
             </a:r>
             <a:endParaRPr lang="es-PA"/>
@@ -7741,7 +7746,7 @@
           </a:lstStyle>
           <a:p>
             <a:r>
-              <a:rPr lang="es-ES"/>
+              <a:rPr lang="es-ES" smtClean="0"/>
               <a:t>Haga clic para modificar el estilo de subtítulo del patrón</a:t>
             </a:r>
             <a:endParaRPr lang="es-PA"/>
@@ -7778,7 +7783,7 @@
                 </a:solidFill>
               </a:rPr>
               <a:pPr/>
-              <a:t>09/30/2025</a:t>
+              <a:t>10/06/2025</a:t>
             </a:fld>
             <a:endParaRPr lang="es-PA">
               <a:solidFill>
@@ -7913,7 +7918,7 @@
           <a:lstStyle/>
           <a:p>
             <a:r>
-              <a:rPr lang="es-ES"/>
+              <a:rPr lang="es-ES" smtClean="0"/>
               <a:t>Haga clic para modificar el estilo de título del patrón</a:t>
             </a:r>
             <a:endParaRPr lang="es-PA"/>
@@ -7945,35 +7950,35 @@
           <a:p>
             <a:pPr lvl="0"/>
             <a:r>
-              <a:rPr lang="es-ES"/>
+              <a:rPr lang="es-ES" smtClean="0"/>
               <a:t>Haga clic para modificar el estilo de texto del patrón</a:t>
             </a:r>
           </a:p>
           <a:p>
             <a:pPr lvl="1"/>
             <a:r>
-              <a:rPr lang="es-ES"/>
+              <a:rPr lang="es-ES" smtClean="0"/>
               <a:t>Segundo nivel</a:t>
             </a:r>
           </a:p>
           <a:p>
             <a:pPr lvl="2"/>
             <a:r>
-              <a:rPr lang="es-ES"/>
+              <a:rPr lang="es-ES" smtClean="0"/>
               <a:t>Tercer nivel</a:t>
             </a:r>
           </a:p>
           <a:p>
             <a:pPr lvl="3"/>
             <a:r>
-              <a:rPr lang="es-ES"/>
+              <a:rPr lang="es-ES" smtClean="0"/>
               <a:t>Cuarto nivel</a:t>
             </a:r>
           </a:p>
           <a:p>
             <a:pPr lvl="4"/>
             <a:r>
-              <a:rPr lang="es-ES"/>
+              <a:rPr lang="es-ES" smtClean="0"/>
               <a:t>Quinto nivel</a:t>
             </a:r>
             <a:endParaRPr lang="es-PA"/>
@@ -8010,7 +8015,7 @@
                 </a:solidFill>
               </a:rPr>
               <a:pPr/>
-              <a:t>09/30/2025</a:t>
+              <a:t>10/06/2025</a:t>
             </a:fld>
             <a:endParaRPr lang="es-PA">
               <a:solidFill>
@@ -8149,7 +8154,7 @@
           </a:lstStyle>
           <a:p>
             <a:r>
-              <a:rPr lang="es-ES"/>
+              <a:rPr lang="es-ES" smtClean="0"/>
               <a:t>Haga clic para modificar el estilo de título del patrón</a:t>
             </a:r>
             <a:endParaRPr lang="es-PA"/>
@@ -8272,7 +8277,7 @@
           <a:p>
             <a:pPr lvl="0"/>
             <a:r>
-              <a:rPr lang="es-ES"/>
+              <a:rPr lang="es-ES" smtClean="0"/>
               <a:t>Haga clic para modificar el estilo de texto del patrón</a:t>
             </a:r>
           </a:p>
@@ -8308,7 +8313,7 @@
                 </a:solidFill>
               </a:rPr>
               <a:pPr/>
-              <a:t>09/30/2025</a:t>
+              <a:t>10/06/2025</a:t>
             </a:fld>
             <a:endParaRPr lang="es-PA">
               <a:solidFill>
@@ -8443,7 +8448,7 @@
           <a:lstStyle/>
           <a:p>
             <a:r>
-              <a:rPr lang="es-ES"/>
+              <a:rPr lang="es-ES" smtClean="0"/>
               <a:t>Haga clic para modificar el estilo de título del patrón</a:t>
             </a:r>
             <a:endParaRPr lang="es-PA"/>
@@ -8475,35 +8480,35 @@
           <a:p>
             <a:pPr lvl="0"/>
             <a:r>
-              <a:rPr lang="es-ES"/>
+              <a:rPr lang="es-ES" smtClean="0"/>
               <a:t>Haga clic para modificar el estilo de texto del patrón</a:t>
             </a:r>
           </a:p>
           <a:p>
             <a:pPr lvl="1"/>
             <a:r>
-              <a:rPr lang="es-ES"/>
+              <a:rPr lang="es-ES" smtClean="0"/>
               <a:t>Segundo nivel</a:t>
             </a:r>
           </a:p>
           <a:p>
             <a:pPr lvl="2"/>
             <a:r>
-              <a:rPr lang="es-ES"/>
+              <a:rPr lang="es-ES" smtClean="0"/>
               <a:t>Tercer nivel</a:t>
             </a:r>
           </a:p>
           <a:p>
             <a:pPr lvl="3"/>
             <a:r>
-              <a:rPr lang="es-ES"/>
+              <a:rPr lang="es-ES" smtClean="0"/>
               <a:t>Cuarto nivel</a:t>
             </a:r>
           </a:p>
           <a:p>
             <a:pPr lvl="4"/>
             <a:r>
-              <a:rPr lang="es-ES"/>
+              <a:rPr lang="es-ES" smtClean="0"/>
               <a:t>Quinto nivel</a:t>
             </a:r>
             <a:endParaRPr lang="es-PA"/>
@@ -8535,35 +8540,35 @@
           <a:p>
             <a:pPr lvl="0"/>
             <a:r>
-              <a:rPr lang="es-ES"/>
+              <a:rPr lang="es-ES" smtClean="0"/>
               <a:t>Haga clic para modificar el estilo de texto del patrón</a:t>
             </a:r>
           </a:p>
           <a:p>
             <a:pPr lvl="1"/>
             <a:r>
-              <a:rPr lang="es-ES"/>
+              <a:rPr lang="es-ES" smtClean="0"/>
               <a:t>Segundo nivel</a:t>
             </a:r>
           </a:p>
           <a:p>
             <a:pPr lvl="2"/>
             <a:r>
-              <a:rPr lang="es-ES"/>
+              <a:rPr lang="es-ES" smtClean="0"/>
               <a:t>Tercer nivel</a:t>
             </a:r>
           </a:p>
           <a:p>
             <a:pPr lvl="3"/>
             <a:r>
-              <a:rPr lang="es-ES"/>
+              <a:rPr lang="es-ES" smtClean="0"/>
               <a:t>Cuarto nivel</a:t>
             </a:r>
           </a:p>
           <a:p>
             <a:pPr lvl="4"/>
             <a:r>
-              <a:rPr lang="es-ES"/>
+              <a:rPr lang="es-ES" smtClean="0"/>
               <a:t>Quinto nivel</a:t>
             </a:r>
             <a:endParaRPr lang="es-PA"/>
@@ -8600,7 +8605,7 @@
                 </a:solidFill>
               </a:rPr>
               <a:pPr/>
-              <a:t>09/30/2025</a:t>
+              <a:t>10/06/2025</a:t>
             </a:fld>
             <a:endParaRPr lang="es-PA">
               <a:solidFill>
@@ -8735,7 +8740,7 @@
           <a:lstStyle/>
           <a:p>
             <a:r>
-              <a:rPr lang="es-ES"/>
+              <a:rPr lang="es-ES" smtClean="0"/>
               <a:t>Haga clic para modificar el estilo de título del patrón</a:t>
             </a:r>
             <a:endParaRPr lang="es-PA"/>
@@ -8804,7 +8809,7 @@
           <a:p>
             <a:pPr lvl="0"/>
             <a:r>
-              <a:rPr lang="es-ES"/>
+              <a:rPr lang="es-ES" smtClean="0"/>
               <a:t>Haga clic para modificar el estilo de texto del patrón</a:t>
             </a:r>
           </a:p>
@@ -8835,35 +8840,35 @@
           <a:p>
             <a:pPr lvl="0"/>
             <a:r>
-              <a:rPr lang="es-ES"/>
+              <a:rPr lang="es-ES" smtClean="0"/>
               <a:t>Haga clic para modificar el estilo de texto del patrón</a:t>
             </a:r>
           </a:p>
           <a:p>
             <a:pPr lvl="1"/>
             <a:r>
-              <a:rPr lang="es-ES"/>
+              <a:rPr lang="es-ES" smtClean="0"/>
               <a:t>Segundo nivel</a:t>
             </a:r>
           </a:p>
           <a:p>
             <a:pPr lvl="2"/>
             <a:r>
-              <a:rPr lang="es-ES"/>
+              <a:rPr lang="es-ES" smtClean="0"/>
               <a:t>Tercer nivel</a:t>
             </a:r>
           </a:p>
           <a:p>
             <a:pPr lvl="3"/>
             <a:r>
-              <a:rPr lang="es-ES"/>
+              <a:rPr lang="es-ES" smtClean="0"/>
               <a:t>Cuarto nivel</a:t>
             </a:r>
           </a:p>
           <a:p>
             <a:pPr lvl="4"/>
             <a:r>
-              <a:rPr lang="es-ES"/>
+              <a:rPr lang="es-ES" smtClean="0"/>
               <a:t>Quinto nivel</a:t>
             </a:r>
             <a:endParaRPr lang="es-PA"/>
@@ -8932,7 +8937,7 @@
           <a:p>
             <a:pPr lvl="0"/>
             <a:r>
-              <a:rPr lang="es-ES"/>
+              <a:rPr lang="es-ES" smtClean="0"/>
               <a:t>Haga clic para modificar el estilo de texto del patrón</a:t>
             </a:r>
           </a:p>
@@ -8963,35 +8968,35 @@
           <a:p>
             <a:pPr lvl="0"/>
             <a:r>
-              <a:rPr lang="es-ES"/>
+              <a:rPr lang="es-ES" smtClean="0"/>
               <a:t>Haga clic para modificar el estilo de texto del patrón</a:t>
             </a:r>
           </a:p>
           <a:p>
             <a:pPr lvl="1"/>
             <a:r>
-              <a:rPr lang="es-ES"/>
+              <a:rPr lang="es-ES" smtClean="0"/>
               <a:t>Segundo nivel</a:t>
             </a:r>
           </a:p>
           <a:p>
             <a:pPr lvl="2"/>
             <a:r>
-              <a:rPr lang="es-ES"/>
+              <a:rPr lang="es-ES" smtClean="0"/>
               <a:t>Tercer nivel</a:t>
             </a:r>
           </a:p>
           <a:p>
             <a:pPr lvl="3"/>
             <a:r>
-              <a:rPr lang="es-ES"/>
+              <a:rPr lang="es-ES" smtClean="0"/>
               <a:t>Cuarto nivel</a:t>
             </a:r>
           </a:p>
           <a:p>
             <a:pPr lvl="4"/>
             <a:r>
-              <a:rPr lang="es-ES"/>
+              <a:rPr lang="es-ES" smtClean="0"/>
               <a:t>Quinto nivel</a:t>
             </a:r>
             <a:endParaRPr lang="es-PA"/>
@@ -9028,7 +9033,7 @@
                 </a:solidFill>
               </a:rPr>
               <a:pPr/>
-              <a:t>09/30/2025</a:t>
+              <a:t>10/06/2025</a:t>
             </a:fld>
             <a:endParaRPr lang="es-PA">
               <a:solidFill>
@@ -9163,7 +9168,7 @@
           <a:lstStyle/>
           <a:p>
             <a:r>
-              <a:rPr lang="es-ES"/>
+              <a:rPr lang="es-ES" smtClean="0"/>
               <a:t>Haga clic para modificar el estilo de título del patrón</a:t>
             </a:r>
             <a:endParaRPr lang="es-PA"/>
@@ -9200,7 +9205,7 @@
                 </a:solidFill>
               </a:rPr>
               <a:pPr/>
-              <a:t>09/30/2025</a:t>
+              <a:t>10/06/2025</a:t>
             </a:fld>
             <a:endParaRPr lang="es-PA">
               <a:solidFill>
@@ -9335,7 +9340,7 @@
           <a:lstStyle/>
           <a:p>
             <a:r>
-              <a:rPr lang="es-ES"/>
+              <a:rPr lang="es-ES" smtClean="0"/>
               <a:t>Haga clic para modificar el estilo de título del patrón</a:t>
             </a:r>
             <a:endParaRPr lang="en-US" dirty="0"/>
@@ -9367,35 +9372,35 @@
           <a:p>
             <a:pPr lvl="0"/>
             <a:r>
-              <a:rPr lang="es-ES"/>
+              <a:rPr lang="es-ES" smtClean="0"/>
               <a:t>Haga clic para modificar el estilo de texto del patrón</a:t>
             </a:r>
           </a:p>
           <a:p>
             <a:pPr lvl="1"/>
             <a:r>
-              <a:rPr lang="es-ES"/>
+              <a:rPr lang="es-ES" smtClean="0"/>
               <a:t>Segundo nivel</a:t>
             </a:r>
           </a:p>
           <a:p>
             <a:pPr lvl="2"/>
             <a:r>
-              <a:rPr lang="es-ES"/>
+              <a:rPr lang="es-ES" smtClean="0"/>
               <a:t>Tercer nivel</a:t>
             </a:r>
           </a:p>
           <a:p>
             <a:pPr lvl="3"/>
             <a:r>
-              <a:rPr lang="es-ES"/>
+              <a:rPr lang="es-ES" smtClean="0"/>
               <a:t>Cuarto nivel</a:t>
             </a:r>
           </a:p>
           <a:p>
             <a:pPr lvl="4"/>
             <a:r>
-              <a:rPr lang="es-ES"/>
+              <a:rPr lang="es-ES" smtClean="0"/>
               <a:t>Quinto nivel</a:t>
             </a:r>
             <a:endParaRPr lang="en-US" dirty="0"/>
@@ -9427,35 +9432,35 @@
           <a:p>
             <a:pPr lvl="0"/>
             <a:r>
-              <a:rPr lang="es-ES"/>
+              <a:rPr lang="es-ES" smtClean="0"/>
               <a:t>Haga clic para modificar el estilo de texto del patrón</a:t>
             </a:r>
           </a:p>
           <a:p>
             <a:pPr lvl="1"/>
             <a:r>
-              <a:rPr lang="es-ES"/>
+              <a:rPr lang="es-ES" smtClean="0"/>
               <a:t>Segundo nivel</a:t>
             </a:r>
           </a:p>
           <a:p>
             <a:pPr lvl="2"/>
             <a:r>
-              <a:rPr lang="es-ES"/>
+              <a:rPr lang="es-ES" smtClean="0"/>
               <a:t>Tercer nivel</a:t>
             </a:r>
           </a:p>
           <a:p>
             <a:pPr lvl="3"/>
             <a:r>
-              <a:rPr lang="es-ES"/>
+              <a:rPr lang="es-ES" smtClean="0"/>
               <a:t>Cuarto nivel</a:t>
             </a:r>
           </a:p>
           <a:p>
             <a:pPr lvl="4"/>
             <a:r>
-              <a:rPr lang="es-ES"/>
+              <a:rPr lang="es-ES" smtClean="0"/>
               <a:t>Quinto nivel</a:t>
             </a:r>
             <a:endParaRPr lang="en-US" dirty="0"/>
@@ -9492,7 +9497,7 @@
                 </a:solidFill>
               </a:rPr>
               <a:pPr/>
-              <a:t>09/30/2025</a:t>
+              <a:t>10/06/2025</a:t>
             </a:fld>
             <a:endParaRPr lang="es-PA">
               <a:solidFill>
@@ -9633,7 +9638,7 @@
                 </a:solidFill>
               </a:rPr>
               <a:pPr/>
-              <a:t>09/30/2025</a:t>
+              <a:t>10/06/2025</a:t>
             </a:fld>
             <a:endParaRPr lang="es-PA">
               <a:solidFill>
@@ -9772,7 +9777,7 @@
           </a:lstStyle>
           <a:p>
             <a:r>
-              <a:rPr lang="es-ES"/>
+              <a:rPr lang="es-ES" smtClean="0"/>
               <a:t>Haga clic para modificar el estilo de título del patrón</a:t>
             </a:r>
             <a:endParaRPr lang="es-PA"/>
@@ -9832,35 +9837,35 @@
           <a:p>
             <a:pPr lvl="0"/>
             <a:r>
-              <a:rPr lang="es-ES"/>
+              <a:rPr lang="es-ES" smtClean="0"/>
               <a:t>Haga clic para modificar el estilo de texto del patrón</a:t>
             </a:r>
           </a:p>
           <a:p>
             <a:pPr lvl="1"/>
             <a:r>
-              <a:rPr lang="es-ES"/>
+              <a:rPr lang="es-ES" smtClean="0"/>
               <a:t>Segundo nivel</a:t>
             </a:r>
           </a:p>
           <a:p>
             <a:pPr lvl="2"/>
             <a:r>
-              <a:rPr lang="es-ES"/>
+              <a:rPr lang="es-ES" smtClean="0"/>
               <a:t>Tercer nivel</a:t>
             </a:r>
           </a:p>
           <a:p>
             <a:pPr lvl="3"/>
             <a:r>
-              <a:rPr lang="es-ES"/>
+              <a:rPr lang="es-ES" smtClean="0"/>
               <a:t>Cuarto nivel</a:t>
             </a:r>
           </a:p>
           <a:p>
             <a:pPr lvl="4"/>
             <a:r>
-              <a:rPr lang="es-ES"/>
+              <a:rPr lang="es-ES" smtClean="0"/>
               <a:t>Quinto nivel</a:t>
             </a:r>
             <a:endParaRPr lang="es-PA"/>
@@ -9929,7 +9934,7 @@
           <a:p>
             <a:pPr lvl="0"/>
             <a:r>
-              <a:rPr lang="es-ES"/>
+              <a:rPr lang="es-ES" smtClean="0"/>
               <a:t>Haga clic para modificar el estilo de texto del patrón</a:t>
             </a:r>
           </a:p>
@@ -9965,7 +9970,7 @@
                 </a:solidFill>
               </a:rPr>
               <a:pPr/>
-              <a:t>09/30/2025</a:t>
+              <a:t>10/06/2025</a:t>
             </a:fld>
             <a:endParaRPr lang="es-PA">
               <a:solidFill>
@@ -10104,7 +10109,7 @@
           </a:lstStyle>
           <a:p>
             <a:r>
-              <a:rPr lang="es-ES"/>
+              <a:rPr lang="es-ES" smtClean="0"/>
               <a:t>Haga clic para modificar el estilo de título del patrón</a:t>
             </a:r>
             <a:endParaRPr lang="es-PA"/>
@@ -10237,7 +10242,7 @@
           <a:p>
             <a:pPr lvl="0"/>
             <a:r>
-              <a:rPr lang="es-ES"/>
+              <a:rPr lang="es-ES" smtClean="0"/>
               <a:t>Haga clic para modificar el estilo de texto del patrón</a:t>
             </a:r>
           </a:p>
@@ -10273,7 +10278,7 @@
                 </a:solidFill>
               </a:rPr>
               <a:pPr/>
-              <a:t>09/30/2025</a:t>
+              <a:t>10/06/2025</a:t>
             </a:fld>
             <a:endParaRPr lang="es-PA">
               <a:solidFill>
@@ -10408,7 +10413,7 @@
           <a:lstStyle/>
           <a:p>
             <a:r>
-              <a:rPr lang="es-ES"/>
+              <a:rPr lang="es-ES" smtClean="0"/>
               <a:t>Haga clic para modificar el estilo de título del patrón</a:t>
             </a:r>
             <a:endParaRPr lang="es-PA"/>
@@ -10440,35 +10445,35 @@
           <a:p>
             <a:pPr lvl="0"/>
             <a:r>
-              <a:rPr lang="es-ES"/>
+              <a:rPr lang="es-ES" smtClean="0"/>
               <a:t>Haga clic para modificar el estilo de texto del patrón</a:t>
             </a:r>
           </a:p>
           <a:p>
             <a:pPr lvl="1"/>
             <a:r>
-              <a:rPr lang="es-ES"/>
+              <a:rPr lang="es-ES" smtClean="0"/>
               <a:t>Segundo nivel</a:t>
             </a:r>
           </a:p>
           <a:p>
             <a:pPr lvl="2"/>
             <a:r>
-              <a:rPr lang="es-ES"/>
+              <a:rPr lang="es-ES" smtClean="0"/>
               <a:t>Tercer nivel</a:t>
             </a:r>
           </a:p>
           <a:p>
             <a:pPr lvl="3"/>
             <a:r>
-              <a:rPr lang="es-ES"/>
+              <a:rPr lang="es-ES" smtClean="0"/>
               <a:t>Cuarto nivel</a:t>
             </a:r>
           </a:p>
           <a:p>
             <a:pPr lvl="4"/>
             <a:r>
-              <a:rPr lang="es-ES"/>
+              <a:rPr lang="es-ES" smtClean="0"/>
               <a:t>Quinto nivel</a:t>
             </a:r>
             <a:endParaRPr lang="es-PA"/>
@@ -10505,7 +10510,7 @@
                 </a:solidFill>
               </a:rPr>
               <a:pPr/>
-              <a:t>09/30/2025</a:t>
+              <a:t>10/06/2025</a:t>
             </a:fld>
             <a:endParaRPr lang="es-PA">
               <a:solidFill>
@@ -10640,7 +10645,7 @@
           <a:lstStyle/>
           <a:p>
             <a:r>
-              <a:rPr lang="es-ES"/>
+              <a:rPr lang="es-ES" smtClean="0"/>
               <a:t>Haga clic para modificar el estilo de título del patrón</a:t>
             </a:r>
             <a:endParaRPr lang="es-PA"/>
@@ -10672,35 +10677,35 @@
           <a:p>
             <a:pPr lvl="0"/>
             <a:r>
-              <a:rPr lang="es-ES"/>
+              <a:rPr lang="es-ES" smtClean="0"/>
               <a:t>Haga clic para modificar el estilo de texto del patrón</a:t>
             </a:r>
           </a:p>
           <a:p>
             <a:pPr lvl="1"/>
             <a:r>
-              <a:rPr lang="es-ES"/>
+              <a:rPr lang="es-ES" smtClean="0"/>
               <a:t>Segundo nivel</a:t>
             </a:r>
           </a:p>
           <a:p>
             <a:pPr lvl="2"/>
             <a:r>
-              <a:rPr lang="es-ES"/>
+              <a:rPr lang="es-ES" smtClean="0"/>
               <a:t>Tercer nivel</a:t>
             </a:r>
           </a:p>
           <a:p>
             <a:pPr lvl="3"/>
             <a:r>
-              <a:rPr lang="es-ES"/>
+              <a:rPr lang="es-ES" smtClean="0"/>
               <a:t>Cuarto nivel</a:t>
             </a:r>
           </a:p>
           <a:p>
             <a:pPr lvl="4"/>
             <a:r>
-              <a:rPr lang="es-ES"/>
+              <a:rPr lang="es-ES" smtClean="0"/>
               <a:t>Quinto nivel</a:t>
             </a:r>
             <a:endParaRPr lang="es-PA"/>
@@ -10737,7 +10742,7 @@
                 </a:solidFill>
               </a:rPr>
               <a:pPr/>
-              <a:t>09/30/2025</a:t>
+              <a:t>10/06/2025</a:t>
             </a:fld>
             <a:endParaRPr lang="es-PA">
               <a:solidFill>
@@ -10873,7 +10878,7 @@
           </a:lstStyle>
           <a:p>
             <a:r>
-              <a:rPr lang="es-ES"/>
+              <a:rPr lang="es-ES" smtClean="0"/>
               <a:t>Haga clic para modificar el estilo de título del patrón</a:t>
             </a:r>
             <a:endParaRPr lang="en-US" dirty="0"/>
@@ -10903,10 +10908,7 @@
               <a:buNone/>
               <a:defRPr cap="all">
                 <a:solidFill>
-                  <a:schemeClr val="bg2">
-                    <a:lumMod val="40000"/>
-                    <a:lumOff val="60000"/>
-                  </a:schemeClr>
+                  <a:schemeClr val="accent1"/>
                 </a:solidFill>
               </a:defRPr>
             </a:lvl1pPr>
@@ -10993,7 +10995,7 @@
           </a:lstStyle>
           <a:p>
             <a:r>
-              <a:rPr lang="es-ES"/>
+              <a:rPr lang="es-ES" smtClean="0"/>
               <a:t>Haga clic para modificar el estilo de subtítulo del patrón</a:t>
             </a:r>
             <a:endParaRPr lang="en-US" dirty="0"/>
@@ -11022,7 +11024,7 @@
                 </a:solidFill>
               </a:rPr>
               <a:pPr/>
-              <a:t>09/30/2025</a:t>
+              <a:t>10/06/2025</a:t>
             </a:fld>
             <a:endParaRPr lang="es-PA">
               <a:solidFill>
@@ -11090,7 +11092,7 @@
     </p:spTree>
     <p:extLst>
       <p:ext uri="{BB962C8B-B14F-4D97-AF65-F5344CB8AC3E}">
-        <p14:creationId xmlns:p14="http://schemas.microsoft.com/office/powerpoint/2010/main" val="2834843599"/>
+        <p14:creationId xmlns:p14="http://schemas.microsoft.com/office/powerpoint/2010/main" val="1977149880"/>
       </p:ext>
     </p:extLst>
   </p:cSld>
@@ -11133,7 +11135,7 @@
           <a:lstStyle/>
           <a:p>
             <a:r>
-              <a:rPr lang="es-ES"/>
+              <a:rPr lang="es-ES" smtClean="0"/>
               <a:t>Haga clic para modificar el estilo de título del patrón</a:t>
             </a:r>
             <a:endParaRPr lang="en-US" dirty="0"/>
@@ -11157,35 +11159,35 @@
           <a:p>
             <a:pPr lvl="0"/>
             <a:r>
-              <a:rPr lang="es-ES"/>
-              <a:t>Haga clic para modificar los estilos de texto del patrón</a:t>
+              <a:rPr lang="es-ES" smtClean="0"/>
+              <a:t>Haga clic para modificar el estilo de texto del patrón</a:t>
             </a:r>
           </a:p>
           <a:p>
             <a:pPr lvl="1"/>
             <a:r>
-              <a:rPr lang="es-ES"/>
+              <a:rPr lang="es-ES" smtClean="0"/>
               <a:t>Segundo nivel</a:t>
             </a:r>
           </a:p>
           <a:p>
             <a:pPr lvl="2"/>
             <a:r>
-              <a:rPr lang="es-ES"/>
+              <a:rPr lang="es-ES" smtClean="0"/>
               <a:t>Tercer nivel</a:t>
             </a:r>
           </a:p>
           <a:p>
             <a:pPr lvl="3"/>
             <a:r>
-              <a:rPr lang="es-ES"/>
+              <a:rPr lang="es-ES" smtClean="0"/>
               <a:t>Cuarto nivel</a:t>
             </a:r>
           </a:p>
           <a:p>
             <a:pPr lvl="4"/>
             <a:r>
-              <a:rPr lang="es-ES"/>
+              <a:rPr lang="es-ES" smtClean="0"/>
               <a:t>Quinto nivel</a:t>
             </a:r>
             <a:endParaRPr lang="en-US" dirty="0"/>
@@ -11194,7 +11196,7 @@
       </p:sp>
       <p:sp>
         <p:nvSpPr>
-          <p:cNvPr id="7" name="Date Placeholder 3"/>
+          <p:cNvPr id="7" name="Date Placeholder 6"/>
           <p:cNvSpPr>
             <a:spLocks noGrp="1"/>
           </p:cNvSpPr>
@@ -11214,7 +11216,7 @@
                 </a:solidFill>
               </a:rPr>
               <a:pPr/>
-              <a:t>09/30/2025</a:t>
+              <a:t>10/06/2025</a:t>
             </a:fld>
             <a:endParaRPr lang="es-PA">
               <a:solidFill>
@@ -11282,7 +11284,7 @@
     </p:spTree>
     <p:extLst>
       <p:ext uri="{BB962C8B-B14F-4D97-AF65-F5344CB8AC3E}">
-        <p14:creationId xmlns:p14="http://schemas.microsoft.com/office/powerpoint/2010/main" val="152224535"/>
+        <p14:creationId xmlns:p14="http://schemas.microsoft.com/office/powerpoint/2010/main" val="2069125885"/>
       </p:ext>
     </p:extLst>
   </p:cSld>
@@ -11334,7 +11336,7 @@
           </a:lstStyle>
           <a:p>
             <a:r>
-              <a:rPr lang="es-ES"/>
+              <a:rPr lang="es-ES" smtClean="0"/>
               <a:t>Haga clic para modificar el estilo de título del patrón</a:t>
             </a:r>
             <a:endParaRPr lang="en-US" dirty="0"/>
@@ -11364,10 +11366,7 @@
               <a:buNone/>
               <a:defRPr sz="2000" cap="all">
                 <a:solidFill>
-                  <a:schemeClr val="bg2">
-                    <a:lumMod val="40000"/>
-                    <a:lumOff val="60000"/>
-                  </a:schemeClr>
+                  <a:schemeClr val="accent1"/>
                 </a:solidFill>
               </a:defRPr>
             </a:lvl1pPr>
@@ -11455,8 +11454,8 @@
           <a:p>
             <a:pPr lvl="0"/>
             <a:r>
-              <a:rPr lang="es-ES"/>
-              <a:t>Haga clic para modificar los estilos de texto del patrón</a:t>
+              <a:rPr lang="es-ES" smtClean="0"/>
+              <a:t>Haga clic para modificar el estilo de texto del patrón</a:t>
             </a:r>
           </a:p>
         </p:txBody>
@@ -11483,7 +11482,7 @@
                 </a:solidFill>
               </a:rPr>
               <a:pPr/>
-              <a:t>09/30/2025</a:t>
+              <a:t>10/06/2025</a:t>
             </a:fld>
             <a:endParaRPr lang="es-PA">
               <a:solidFill>
@@ -11551,7 +11550,7 @@
     </p:spTree>
     <p:extLst>
       <p:ext uri="{BB962C8B-B14F-4D97-AF65-F5344CB8AC3E}">
-        <p14:creationId xmlns:p14="http://schemas.microsoft.com/office/powerpoint/2010/main" val="694901176"/>
+        <p14:creationId xmlns:p14="http://schemas.microsoft.com/office/powerpoint/2010/main" val="4065350611"/>
       </p:ext>
     </p:extLst>
   </p:cSld>
@@ -11594,7 +11593,7 @@
           <a:lstStyle/>
           <a:p>
             <a:r>
-              <a:rPr lang="es-ES"/>
+              <a:rPr lang="es-ES" smtClean="0"/>
               <a:t>Haga clic para modificar el estilo de título del patrón</a:t>
             </a:r>
             <a:endParaRPr lang="en-US" dirty="0"/>
@@ -11653,35 +11652,35 @@
           <a:p>
             <a:pPr lvl="0"/>
             <a:r>
-              <a:rPr lang="es-ES"/>
-              <a:t>Haga clic para modificar los estilos de texto del patrón</a:t>
+              <a:rPr lang="es-ES" smtClean="0"/>
+              <a:t>Haga clic para modificar el estilo de texto del patrón</a:t>
             </a:r>
           </a:p>
           <a:p>
             <a:pPr lvl="1"/>
             <a:r>
-              <a:rPr lang="es-ES"/>
+              <a:rPr lang="es-ES" smtClean="0"/>
               <a:t>Segundo nivel</a:t>
             </a:r>
           </a:p>
           <a:p>
             <a:pPr lvl="2"/>
             <a:r>
-              <a:rPr lang="es-ES"/>
+              <a:rPr lang="es-ES" smtClean="0"/>
               <a:t>Tercer nivel</a:t>
             </a:r>
           </a:p>
           <a:p>
             <a:pPr lvl="3"/>
             <a:r>
-              <a:rPr lang="es-ES"/>
+              <a:rPr lang="es-ES" smtClean="0"/>
               <a:t>Cuarto nivel</a:t>
             </a:r>
           </a:p>
           <a:p>
             <a:pPr lvl="4"/>
             <a:r>
-              <a:rPr lang="es-ES"/>
+              <a:rPr lang="es-ES" smtClean="0"/>
               <a:t>Quinto nivel</a:t>
             </a:r>
             <a:endParaRPr lang="en-US" dirty="0"/>
@@ -11740,35 +11739,35 @@
           <a:p>
             <a:pPr lvl="0"/>
             <a:r>
-              <a:rPr lang="es-ES"/>
-              <a:t>Haga clic para modificar los estilos de texto del patrón</a:t>
+              <a:rPr lang="es-ES" smtClean="0"/>
+              <a:t>Haga clic para modificar el estilo de texto del patrón</a:t>
             </a:r>
           </a:p>
           <a:p>
             <a:pPr lvl="1"/>
             <a:r>
-              <a:rPr lang="es-ES"/>
+              <a:rPr lang="es-ES" smtClean="0"/>
               <a:t>Segundo nivel</a:t>
             </a:r>
           </a:p>
           <a:p>
             <a:pPr lvl="2"/>
             <a:r>
-              <a:rPr lang="es-ES"/>
+              <a:rPr lang="es-ES" smtClean="0"/>
               <a:t>Tercer nivel</a:t>
             </a:r>
           </a:p>
           <a:p>
             <a:pPr lvl="3"/>
             <a:r>
-              <a:rPr lang="es-ES"/>
+              <a:rPr lang="es-ES" smtClean="0"/>
               <a:t>Cuarto nivel</a:t>
             </a:r>
           </a:p>
           <a:p>
             <a:pPr lvl="4"/>
             <a:r>
-              <a:rPr lang="es-ES"/>
+              <a:rPr lang="es-ES" smtClean="0"/>
               <a:t>Quinto nivel</a:t>
             </a:r>
             <a:endParaRPr lang="en-US" dirty="0"/>
@@ -11797,7 +11796,7 @@
                 </a:solidFill>
               </a:rPr>
               <a:pPr/>
-              <a:t>09/30/2025</a:t>
+              <a:t>10/06/2025</a:t>
             </a:fld>
             <a:endParaRPr lang="es-PA">
               <a:solidFill>
@@ -11865,7 +11864,7 @@
     </p:spTree>
     <p:extLst>
       <p:ext uri="{BB962C8B-B14F-4D97-AF65-F5344CB8AC3E}">
-        <p14:creationId xmlns:p14="http://schemas.microsoft.com/office/powerpoint/2010/main" val="1640607979"/>
+        <p14:creationId xmlns:p14="http://schemas.microsoft.com/office/powerpoint/2010/main" val="2903887301"/>
       </p:ext>
     </p:extLst>
   </p:cSld>
@@ -11912,7 +11911,7 @@
           </a:lstStyle>
           <a:p>
             <a:r>
-              <a:rPr lang="es-ES"/>
+              <a:rPr lang="es-ES" smtClean="0"/>
               <a:t>Haga clic para modificar el estilo de título del patrón</a:t>
             </a:r>
             <a:endParaRPr lang="en-US" dirty="0"/>
@@ -11944,10 +11943,7 @@
               <a:buNone/>
               <a:defRPr sz="2400" b="0">
                 <a:solidFill>
-                  <a:schemeClr val="bg2">
-                    <a:lumMod val="40000"/>
-                    <a:lumOff val="60000"/>
-                  </a:schemeClr>
+                  <a:schemeClr val="accent1"/>
                 </a:solidFill>
               </a:defRPr>
             </a:lvl1pPr>
@@ -11987,8 +11983,8 @@
           <a:p>
             <a:pPr lvl="0"/>
             <a:r>
-              <a:rPr lang="es-ES"/>
-              <a:t>Haga clic para modificar los estilos de texto del patrón</a:t>
+              <a:rPr lang="es-ES" smtClean="0"/>
+              <a:t>Haga clic para modificar el estilo de texto del patrón</a:t>
             </a:r>
           </a:p>
         </p:txBody>
@@ -12045,35 +12041,35 @@
           <a:p>
             <a:pPr lvl="0"/>
             <a:r>
-              <a:rPr lang="es-ES"/>
-              <a:t>Haga clic para modificar los estilos de texto del patrón</a:t>
+              <a:rPr lang="es-ES" smtClean="0"/>
+              <a:t>Haga clic para modificar el estilo de texto del patrón</a:t>
             </a:r>
           </a:p>
           <a:p>
             <a:pPr lvl="1"/>
             <a:r>
-              <a:rPr lang="es-ES"/>
+              <a:rPr lang="es-ES" smtClean="0"/>
               <a:t>Segundo nivel</a:t>
             </a:r>
           </a:p>
           <a:p>
             <a:pPr lvl="2"/>
             <a:r>
-              <a:rPr lang="es-ES"/>
+              <a:rPr lang="es-ES" smtClean="0"/>
               <a:t>Tercer nivel</a:t>
             </a:r>
           </a:p>
           <a:p>
             <a:pPr lvl="3"/>
             <a:r>
-              <a:rPr lang="es-ES"/>
+              <a:rPr lang="es-ES" smtClean="0"/>
               <a:t>Cuarto nivel</a:t>
             </a:r>
           </a:p>
           <a:p>
             <a:pPr lvl="4"/>
             <a:r>
-              <a:rPr lang="es-ES"/>
+              <a:rPr lang="es-ES" smtClean="0"/>
               <a:t>Quinto nivel</a:t>
             </a:r>
             <a:endParaRPr lang="en-US" dirty="0"/>
@@ -12105,10 +12101,7 @@
               <a:buNone/>
               <a:defRPr sz="2400" b="0">
                 <a:solidFill>
-                  <a:schemeClr val="bg2">
-                    <a:lumMod val="40000"/>
-                    <a:lumOff val="60000"/>
-                  </a:schemeClr>
+                  <a:schemeClr val="accent1"/>
                 </a:solidFill>
               </a:defRPr>
             </a:lvl1pPr>
@@ -12148,8 +12141,8 @@
           <a:p>
             <a:pPr lvl="0"/>
             <a:r>
-              <a:rPr lang="es-ES"/>
-              <a:t>Haga clic para modificar los estilos de texto del patrón</a:t>
+              <a:rPr lang="es-ES" smtClean="0"/>
+              <a:t>Haga clic para modificar el estilo de texto del patrón</a:t>
             </a:r>
           </a:p>
         </p:txBody>
@@ -12206,35 +12199,35 @@
           <a:p>
             <a:pPr lvl="0"/>
             <a:r>
-              <a:rPr lang="es-ES"/>
-              <a:t>Haga clic para modificar los estilos de texto del patrón</a:t>
+              <a:rPr lang="es-ES" smtClean="0"/>
+              <a:t>Haga clic para modificar el estilo de texto del patrón</a:t>
             </a:r>
           </a:p>
           <a:p>
             <a:pPr lvl="1"/>
             <a:r>
-              <a:rPr lang="es-ES"/>
+              <a:rPr lang="es-ES" smtClean="0"/>
               <a:t>Segundo nivel</a:t>
             </a:r>
           </a:p>
           <a:p>
             <a:pPr lvl="2"/>
             <a:r>
-              <a:rPr lang="es-ES"/>
+              <a:rPr lang="es-ES" smtClean="0"/>
               <a:t>Tercer nivel</a:t>
             </a:r>
           </a:p>
           <a:p>
             <a:pPr lvl="3"/>
             <a:r>
-              <a:rPr lang="es-ES"/>
+              <a:rPr lang="es-ES" smtClean="0"/>
               <a:t>Cuarto nivel</a:t>
             </a:r>
           </a:p>
           <a:p>
             <a:pPr lvl="4"/>
             <a:r>
-              <a:rPr lang="es-ES"/>
+              <a:rPr lang="es-ES" smtClean="0"/>
               <a:t>Quinto nivel</a:t>
             </a:r>
             <a:endParaRPr lang="en-US" dirty="0"/>
@@ -12263,7 +12256,7 @@
                 </a:solidFill>
               </a:rPr>
               <a:pPr/>
-              <a:t>09/30/2025</a:t>
+              <a:t>10/06/2025</a:t>
             </a:fld>
             <a:endParaRPr lang="es-PA">
               <a:solidFill>
@@ -12331,7 +12324,7 @@
     </p:spTree>
     <p:extLst>
       <p:ext uri="{BB962C8B-B14F-4D97-AF65-F5344CB8AC3E}">
-        <p14:creationId xmlns:p14="http://schemas.microsoft.com/office/powerpoint/2010/main" val="591641751"/>
+        <p14:creationId xmlns:p14="http://schemas.microsoft.com/office/powerpoint/2010/main" val="250224189"/>
       </p:ext>
     </p:extLst>
   </p:cSld>
@@ -12382,7 +12375,7 @@
           <a:lstStyle/>
           <a:p>
             <a:r>
-              <a:rPr lang="es-ES"/>
+              <a:rPr lang="es-ES" smtClean="0"/>
               <a:t>Haga clic para modificar el estilo de título del patrón</a:t>
             </a:r>
             <a:endParaRPr lang="en-US" dirty="0"/>
@@ -12451,7 +12444,7 @@
           <a:p>
             <a:pPr lvl="0"/>
             <a:r>
-              <a:rPr lang="es-ES"/>
+              <a:rPr lang="es-ES" smtClean="0"/>
               <a:t>Haga clic para modificar el estilo de texto del patrón</a:t>
             </a:r>
           </a:p>
@@ -12482,35 +12475,35 @@
           <a:p>
             <a:pPr lvl="0"/>
             <a:r>
-              <a:rPr lang="es-ES"/>
+              <a:rPr lang="es-ES" smtClean="0"/>
               <a:t>Haga clic para modificar el estilo de texto del patrón</a:t>
             </a:r>
           </a:p>
           <a:p>
             <a:pPr lvl="1"/>
             <a:r>
-              <a:rPr lang="es-ES"/>
+              <a:rPr lang="es-ES" smtClean="0"/>
               <a:t>Segundo nivel</a:t>
             </a:r>
           </a:p>
           <a:p>
             <a:pPr lvl="2"/>
             <a:r>
-              <a:rPr lang="es-ES"/>
+              <a:rPr lang="es-ES" smtClean="0"/>
               <a:t>Tercer nivel</a:t>
             </a:r>
           </a:p>
           <a:p>
             <a:pPr lvl="3"/>
             <a:r>
-              <a:rPr lang="es-ES"/>
+              <a:rPr lang="es-ES" smtClean="0"/>
               <a:t>Cuarto nivel</a:t>
             </a:r>
           </a:p>
           <a:p>
             <a:pPr lvl="4"/>
             <a:r>
-              <a:rPr lang="es-ES"/>
+              <a:rPr lang="es-ES" smtClean="0"/>
               <a:t>Quinto nivel</a:t>
             </a:r>
             <a:endParaRPr lang="en-US" dirty="0"/>
@@ -12579,7 +12572,7 @@
           <a:p>
             <a:pPr lvl="0"/>
             <a:r>
-              <a:rPr lang="es-ES"/>
+              <a:rPr lang="es-ES" smtClean="0"/>
               <a:t>Haga clic para modificar el estilo de texto del patrón</a:t>
             </a:r>
           </a:p>
@@ -12610,35 +12603,35 @@
           <a:p>
             <a:pPr lvl="0"/>
             <a:r>
-              <a:rPr lang="es-ES"/>
+              <a:rPr lang="es-ES" smtClean="0"/>
               <a:t>Haga clic para modificar el estilo de texto del patrón</a:t>
             </a:r>
           </a:p>
           <a:p>
             <a:pPr lvl="1"/>
             <a:r>
-              <a:rPr lang="es-ES"/>
+              <a:rPr lang="es-ES" smtClean="0"/>
               <a:t>Segundo nivel</a:t>
             </a:r>
           </a:p>
           <a:p>
             <a:pPr lvl="2"/>
             <a:r>
-              <a:rPr lang="es-ES"/>
+              <a:rPr lang="es-ES" smtClean="0"/>
               <a:t>Tercer nivel</a:t>
             </a:r>
           </a:p>
           <a:p>
             <a:pPr lvl="3"/>
             <a:r>
-              <a:rPr lang="es-ES"/>
+              <a:rPr lang="es-ES" smtClean="0"/>
               <a:t>Cuarto nivel</a:t>
             </a:r>
           </a:p>
           <a:p>
             <a:pPr lvl="4"/>
             <a:r>
-              <a:rPr lang="es-ES"/>
+              <a:rPr lang="es-ES" smtClean="0"/>
               <a:t>Quinto nivel</a:t>
             </a:r>
             <a:endParaRPr lang="en-US" dirty="0"/>
@@ -12675,7 +12668,7 @@
                 </a:solidFill>
               </a:rPr>
               <a:pPr/>
-              <a:t>09/30/2025</a:t>
+              <a:t>10/06/2025</a:t>
             </a:fld>
             <a:endParaRPr lang="es-PA">
               <a:solidFill>
@@ -12802,7 +12795,7 @@
           <a:lstStyle/>
           <a:p>
             <a:r>
-              <a:rPr lang="es-ES"/>
+              <a:rPr lang="es-ES" smtClean="0"/>
               <a:t>Haga clic para modificar el estilo de título del patrón</a:t>
             </a:r>
             <a:endParaRPr lang="en-US" dirty="0"/>
@@ -12831,7 +12824,7 @@
                 </a:solidFill>
               </a:rPr>
               <a:pPr/>
-              <a:t>09/30/2025</a:t>
+              <a:t>10/06/2025</a:t>
             </a:fld>
             <a:endParaRPr lang="es-PA">
               <a:solidFill>
@@ -12899,7 +12892,7 @@
     </p:spTree>
     <p:extLst>
       <p:ext uri="{BB962C8B-B14F-4D97-AF65-F5344CB8AC3E}">
-        <p14:creationId xmlns:p14="http://schemas.microsoft.com/office/powerpoint/2010/main" val="2242796136"/>
+        <p14:creationId xmlns:p14="http://schemas.microsoft.com/office/powerpoint/2010/main" val="2487539360"/>
       </p:ext>
     </p:extLst>
   </p:cSld>
@@ -12948,7 +12941,7 @@
                 </a:solidFill>
               </a:rPr>
               <a:pPr/>
-              <a:t>09/30/2025</a:t>
+              <a:t>10/06/2025</a:t>
             </a:fld>
             <a:endParaRPr lang="es-PA">
               <a:solidFill>
@@ -13016,7 +13009,7 @@
     </p:spTree>
     <p:extLst>
       <p:ext uri="{BB962C8B-B14F-4D97-AF65-F5344CB8AC3E}">
-        <p14:creationId xmlns:p14="http://schemas.microsoft.com/office/powerpoint/2010/main" val="4102809921"/>
+        <p14:creationId xmlns:p14="http://schemas.microsoft.com/office/powerpoint/2010/main" val="751033168"/>
       </p:ext>
     </p:extLst>
   </p:cSld>
@@ -13068,7 +13061,7 @@
           </a:lstStyle>
           <a:p>
             <a:r>
-              <a:rPr lang="es-ES"/>
+              <a:rPr lang="es-ES" smtClean="0"/>
               <a:t>Haga clic para modificar el estilo de título del patrón</a:t>
             </a:r>
             <a:endParaRPr lang="en-US" dirty="0"/>
@@ -13127,35 +13120,35 @@
           <a:p>
             <a:pPr lvl="0"/>
             <a:r>
-              <a:rPr lang="es-ES"/>
-              <a:t>Haga clic para modificar los estilos de texto del patrón</a:t>
+              <a:rPr lang="es-ES" smtClean="0"/>
+              <a:t>Haga clic para modificar el estilo de texto del patrón</a:t>
             </a:r>
           </a:p>
           <a:p>
             <a:pPr lvl="1"/>
             <a:r>
-              <a:rPr lang="es-ES"/>
+              <a:rPr lang="es-ES" smtClean="0"/>
               <a:t>Segundo nivel</a:t>
             </a:r>
           </a:p>
           <a:p>
             <a:pPr lvl="2"/>
             <a:r>
-              <a:rPr lang="es-ES"/>
+              <a:rPr lang="es-ES" smtClean="0"/>
               <a:t>Tercer nivel</a:t>
             </a:r>
           </a:p>
           <a:p>
             <a:pPr lvl="3"/>
             <a:r>
-              <a:rPr lang="es-ES"/>
+              <a:rPr lang="es-ES" smtClean="0"/>
               <a:t>Cuarto nivel</a:t>
             </a:r>
           </a:p>
           <a:p>
             <a:pPr lvl="4"/>
             <a:r>
-              <a:rPr lang="es-ES"/>
+              <a:rPr lang="es-ES" smtClean="0"/>
               <a:t>Quinto nivel</a:t>
             </a:r>
             <a:endParaRPr lang="en-US" dirty="0"/>
@@ -13221,8 +13214,8 @@
           <a:p>
             <a:pPr lvl="0"/>
             <a:r>
-              <a:rPr lang="es-ES"/>
-              <a:t>Haga clic para modificar los estilos de texto del patrón</a:t>
+              <a:rPr lang="es-ES" smtClean="0"/>
+              <a:t>Haga clic para modificar el estilo de texto del patrón</a:t>
             </a:r>
           </a:p>
         </p:txBody>
@@ -13249,7 +13242,7 @@
                 </a:solidFill>
               </a:rPr>
               <a:pPr/>
-              <a:t>09/30/2025</a:t>
+              <a:t>10/06/2025</a:t>
             </a:fld>
             <a:endParaRPr lang="es-PA">
               <a:solidFill>
@@ -13317,7 +13310,7 @@
     </p:spTree>
     <p:extLst>
       <p:ext uri="{BB962C8B-B14F-4D97-AF65-F5344CB8AC3E}">
-        <p14:creationId xmlns:p14="http://schemas.microsoft.com/office/powerpoint/2010/main" val="4135873885"/>
+        <p14:creationId xmlns:p14="http://schemas.microsoft.com/office/powerpoint/2010/main" val="4254152847"/>
       </p:ext>
     </p:extLst>
   </p:cSld>
@@ -13371,7 +13364,7 @@
           </a:lstStyle>
           <a:p>
             <a:r>
-              <a:rPr lang="es-ES"/>
+              <a:rPr lang="es-ES" smtClean="0"/>
               <a:t>Haga clic para modificar el estilo de título del patrón</a:t>
             </a:r>
             <a:endParaRPr lang="en-US" dirty="0"/>
@@ -13450,7 +13443,7 @@
           </a:lstStyle>
           <a:p>
             <a:r>
-              <a:rPr lang="es-ES"/>
+              <a:rPr lang="es-ES" smtClean="0"/>
               <a:t>Haga clic en el icono para agregar una imagen</a:t>
             </a:r>
             <a:endParaRPr lang="en-US" dirty="0"/>
@@ -13518,8 +13511,8 @@
           <a:p>
             <a:pPr lvl="0"/>
             <a:r>
-              <a:rPr lang="es-ES"/>
-              <a:t>Haga clic para modificar los estilos de texto del patrón</a:t>
+              <a:rPr lang="es-ES" smtClean="0"/>
+              <a:t>Haga clic para modificar el estilo de texto del patrón</a:t>
             </a:r>
           </a:p>
         </p:txBody>
@@ -13546,7 +13539,7 @@
                 </a:solidFill>
               </a:rPr>
               <a:pPr/>
-              <a:t>09/30/2025</a:t>
+              <a:t>10/06/2025</a:t>
             </a:fld>
             <a:endParaRPr lang="es-PA">
               <a:solidFill>
@@ -13614,7 +13607,7 @@
     </p:spTree>
     <p:extLst>
       <p:ext uri="{BB962C8B-B14F-4D97-AF65-F5344CB8AC3E}">
-        <p14:creationId xmlns:p14="http://schemas.microsoft.com/office/powerpoint/2010/main" val="3720758569"/>
+        <p14:creationId xmlns:p14="http://schemas.microsoft.com/office/powerpoint/2010/main" val="3874418975"/>
       </p:ext>
     </p:extLst>
   </p:cSld>
@@ -13668,7 +13661,7 @@
           </a:lstStyle>
           <a:p>
             <a:r>
-              <a:rPr lang="es-ES"/>
+              <a:rPr lang="es-ES" smtClean="0"/>
               <a:t>Haga clic para modificar el estilo de título del patrón</a:t>
             </a:r>
             <a:endParaRPr lang="en-US" dirty="0"/>
@@ -13747,7 +13740,7 @@
           </a:lstStyle>
           <a:p>
             <a:r>
-              <a:rPr lang="es-ES"/>
+              <a:rPr lang="es-ES" smtClean="0"/>
               <a:t>Haga clic en el icono para agregar una imagen</a:t>
             </a:r>
             <a:endParaRPr lang="en-US" dirty="0"/>
@@ -13815,8 +13808,8 @@
           <a:p>
             <a:pPr lvl="0"/>
             <a:r>
-              <a:rPr lang="es-ES"/>
-              <a:t>Haga clic para modificar los estilos de texto del patrón</a:t>
+              <a:rPr lang="es-ES" smtClean="0"/>
+              <a:t>Haga clic para modificar el estilo de texto del patrón</a:t>
             </a:r>
           </a:p>
         </p:txBody>
@@ -13839,7 +13832,7 @@
             <a:fld id="{96DFF08F-DC6B-4601-B491-B0F83F6DD2DA}" type="datetimeFigureOut">
               <a:rPr lang="en-US" smtClean="0"/>
               <a:pPr/>
-              <a:t>9/30/2025</a:t>
+              <a:t>10/6/2025</a:t>
             </a:fld>
             <a:endParaRPr lang="en-US" dirty="0"/>
           </a:p>
@@ -13891,7 +13884,7 @@
     </p:spTree>
     <p:extLst>
       <p:ext uri="{BB962C8B-B14F-4D97-AF65-F5344CB8AC3E}">
-        <p14:creationId xmlns:p14="http://schemas.microsoft.com/office/powerpoint/2010/main" val="3147666418"/>
+        <p14:creationId xmlns:p14="http://schemas.microsoft.com/office/powerpoint/2010/main" val="2989181435"/>
       </p:ext>
     </p:extLst>
   </p:cSld>
@@ -13943,7 +13936,7 @@
           </a:lstStyle>
           <a:p>
             <a:r>
-              <a:rPr lang="es-ES"/>
+              <a:rPr lang="es-ES" smtClean="0"/>
               <a:t>Haga clic para modificar el estilo de título del patrón</a:t>
             </a:r>
             <a:endParaRPr lang="en-US" dirty="0"/>
@@ -14011,8 +14004,8 @@
           <a:p>
             <a:pPr lvl="0"/>
             <a:r>
-              <a:rPr lang="es-ES"/>
-              <a:t>Haga clic para modificar los estilos de texto del patrón</a:t>
+              <a:rPr lang="es-ES" smtClean="0"/>
+              <a:t>Haga clic para modificar el estilo de texto del patrón</a:t>
             </a:r>
           </a:p>
         </p:txBody>
@@ -14035,7 +14028,7 @@
             <a:fld id="{96DFF08F-DC6B-4601-B491-B0F83F6DD2DA}" type="datetimeFigureOut">
               <a:rPr lang="en-US" smtClean="0"/>
               <a:pPr/>
-              <a:t>9/30/2025</a:t>
+              <a:t>10/6/2025</a:t>
             </a:fld>
             <a:endParaRPr lang="en-US" dirty="0"/>
           </a:p>
@@ -14087,7 +14080,7 @@
     </p:spTree>
     <p:extLst>
       <p:ext uri="{BB962C8B-B14F-4D97-AF65-F5344CB8AC3E}">
-        <p14:creationId xmlns:p14="http://schemas.microsoft.com/office/powerpoint/2010/main" val="734676838"/>
+        <p14:creationId xmlns:p14="http://schemas.microsoft.com/office/powerpoint/2010/main" val="1597040303"/>
       </p:ext>
     </p:extLst>
   </p:cSld>
@@ -14139,7 +14132,7 @@
           </a:lstStyle>
           <a:p>
             <a:r>
-              <a:rPr lang="es-ES"/>
+              <a:rPr lang="es-ES" smtClean="0"/>
               <a:t>Haga clic para modificar el estilo de título del patrón</a:t>
             </a:r>
             <a:endParaRPr lang="en-US" dirty="0"/>
@@ -14148,22 +14141,22 @@
       </p:sp>
       <p:sp>
         <p:nvSpPr>
-          <p:cNvPr id="11" name="Text Placeholder 3"/>
-          <p:cNvSpPr>
-            <a:spLocks noGrp="1"/>
-          </p:cNvSpPr>
-          <p:nvPr>
-            <p:ph type="body" sz="half" idx="14"/>
+          <p:cNvPr id="14" name="Text Placeholder 3"/>
+          <p:cNvSpPr>
+            <a:spLocks noGrp="1"/>
+          </p:cNvSpPr>
+          <p:nvPr>
+            <p:ph type="body" sz="half" idx="13"/>
           </p:nvPr>
         </p:nvSpPr>
         <p:spPr>
           <a:xfrm>
             <a:off x="1448177" y="3771174"/>
-            <a:ext cx="5461159" cy="342174"/>
-          </a:xfrm>
-        </p:spPr>
-        <p:txBody>
-          <a:bodyPr vert="horz" lIns="91440" tIns="45720" rIns="91440" bIns="45720" rtlCol="0" anchor="t">
+            <a:ext cx="5540814" cy="342174"/>
+          </a:xfrm>
+        </p:spPr>
+        <p:txBody>
+          <a:bodyPr anchor="t">
             <a:normAutofit/>
           </a:bodyPr>
           <a:lstStyle>
@@ -14171,10 +14164,7 @@
               <a:buNone/>
               <a:defRPr lang="en-US" sz="1400" b="0" i="0" kern="1200" cap="small" dirty="0">
                 <a:solidFill>
-                  <a:schemeClr val="bg2">
-                    <a:lumMod val="40000"/>
-                    <a:lumOff val="60000"/>
-                  </a:schemeClr>
+                  <a:schemeClr val="accent1"/>
                 </a:solidFill>
                 <a:latin typeface="+mj-lt"/>
                 <a:ea typeface="+mj-ea"/>
@@ -14215,12 +14205,10 @@
             </a:lvl9pPr>
           </a:lstStyle>
           <a:p>
-            <a:pPr marL="0" lvl="0" indent="0">
-              <a:buNone/>
-            </a:pPr>
-            <a:r>
-              <a:rPr lang="es-ES"/>
-              <a:t>Haga clic para modificar los estilos de texto del patrón</a:t>
+            <a:pPr lvl="0"/>
+            <a:r>
+              <a:rPr lang="es-ES" smtClean="0"/>
+              <a:t>Haga clic para modificar el estilo de texto del patrón</a:t>
             </a:r>
           </a:p>
         </p:txBody>
@@ -14286,8 +14274,8 @@
           <a:p>
             <a:pPr lvl="0"/>
             <a:r>
-              <a:rPr lang="es-ES"/>
-              <a:t>Haga clic para modificar los estilos de texto del patrón</a:t>
+              <a:rPr lang="es-ES" smtClean="0"/>
+              <a:t>Haga clic para modificar el estilo de texto del patrón</a:t>
             </a:r>
           </a:p>
         </p:txBody>
@@ -14307,9 +14295,10 @@
           <a:bodyPr/>
           <a:lstStyle/>
           <a:p>
-            <a:fld id="{4AAD347D-5ACD-4C99-B74B-A9C85AD731AF}" type="datetimeFigureOut">
+            <a:fld id="{96DFF08F-DC6B-4601-B491-B0F83F6DD2DA}" type="datetimeFigureOut">
               <a:rPr lang="en-US" smtClean="0"/>
-              <a:t>9/30/2025</a:t>
+              <a:pPr/>
+              <a:t>10/6/2025</a:t>
             </a:fld>
             <a:endParaRPr lang="en-US" dirty="0"/>
           </a:p>
@@ -14349,8 +14338,9 @@
           <a:bodyPr/>
           <a:lstStyle/>
           <a:p>
-            <a:fld id="{D57F1E4F-1CFF-5643-939E-02111984F565}" type="slidenum">
+            <a:fld id="{4FAB73BC-B049-4115-A692-8D63A059BFB8}" type="slidenum">
               <a:rPr lang="en-US" smtClean="0"/>
+              <a:pPr/>
               <a:t>‹Nº›</a:t>
             </a:fld>
             <a:endParaRPr lang="en-US" dirty="0"/>
@@ -14359,7 +14349,7 @@
       </p:sp>
       <p:sp>
         <p:nvSpPr>
-          <p:cNvPr id="12" name="TextBox 11"/>
+          <p:cNvPr id="11" name="TextBox 10"/>
           <p:cNvSpPr txBox="1"/>
           <p:nvPr/>
         </p:nvSpPr>
@@ -14384,10 +14374,7 @@
             <a:lvl1pPr algn="r">
               <a:defRPr sz="12200" b="0" i="0">
                 <a:solidFill>
-                  <a:schemeClr val="bg2">
-                    <a:lumMod val="40000"/>
-                    <a:lumOff val="60000"/>
-                  </a:schemeClr>
+                  <a:schemeClr val="accent1"/>
                 </a:solidFill>
                 <a:latin typeface="Arial"/>
                 <a:ea typeface="+mj-ea"/>
@@ -14406,7 +14393,7 @@
       </p:sp>
       <p:sp>
         <p:nvSpPr>
-          <p:cNvPr id="15" name="TextBox 14"/>
+          <p:cNvPr id="13" name="TextBox 12"/>
           <p:cNvSpPr txBox="1"/>
           <p:nvPr/>
         </p:nvSpPr>
@@ -14431,10 +14418,7 @@
             <a:lvl1pPr algn="r">
               <a:defRPr sz="12200" b="0" i="0">
                 <a:solidFill>
-                  <a:schemeClr val="bg2">
-                    <a:lumMod val="40000"/>
-                    <a:lumOff val="60000"/>
-                  </a:schemeClr>
+                  <a:schemeClr val="accent1"/>
                 </a:solidFill>
                 <a:latin typeface="Arial"/>
                 <a:ea typeface="+mj-ea"/>
@@ -14454,7 +14438,7 @@
     </p:spTree>
     <p:extLst>
       <p:ext uri="{BB962C8B-B14F-4D97-AF65-F5344CB8AC3E}">
-        <p14:creationId xmlns:p14="http://schemas.microsoft.com/office/powerpoint/2010/main" val="594526018"/>
+        <p14:creationId xmlns:p14="http://schemas.microsoft.com/office/powerpoint/2010/main" val="1021562919"/>
       </p:ext>
     </p:extLst>
   </p:cSld>
@@ -14493,8 +14477,8 @@
         </p:nvSpPr>
         <p:spPr>
           <a:xfrm>
-            <a:off x="866441" y="3124201"/>
-            <a:ext cx="6620969" cy="1653180"/>
+            <a:off x="866442" y="3124201"/>
+            <a:ext cx="6620968" cy="1653180"/>
           </a:xfrm>
         </p:spPr>
         <p:txBody>
@@ -14506,7 +14490,7 @@
           </a:lstStyle>
           <a:p>
             <a:r>
-              <a:rPr lang="es-ES"/>
+              <a:rPr lang="es-ES" smtClean="0"/>
               <a:t>Haga clic para modificar el estilo de título del patrón</a:t>
             </a:r>
             <a:endParaRPr lang="en-US" dirty="0"/>
@@ -14536,10 +14520,7 @@
               <a:buNone/>
               <a:defRPr sz="2000" cap="none">
                 <a:solidFill>
-                  <a:schemeClr val="bg2">
-                    <a:lumMod val="40000"/>
-                    <a:lumOff val="60000"/>
-                  </a:schemeClr>
+                  <a:schemeClr val="accent1"/>
                 </a:solidFill>
               </a:defRPr>
             </a:lvl1pPr>
@@ -14627,8 +14608,8 @@
           <a:p>
             <a:pPr lvl="0"/>
             <a:r>
-              <a:rPr lang="es-ES"/>
-              <a:t>Haga clic para modificar los estilos de texto del patrón</a:t>
+              <a:rPr lang="es-ES" smtClean="0"/>
+              <a:t>Haga clic para modificar el estilo de texto del patrón</a:t>
             </a:r>
           </a:p>
         </p:txBody>
@@ -14651,7 +14632,7 @@
             <a:fld id="{96DFF08F-DC6B-4601-B491-B0F83F6DD2DA}" type="datetimeFigureOut">
               <a:rPr lang="en-US" smtClean="0"/>
               <a:pPr/>
-              <a:t>9/30/2025</a:t>
+              <a:t>10/6/2025</a:t>
             </a:fld>
             <a:endParaRPr lang="en-US" dirty="0"/>
           </a:p>
@@ -14703,7 +14684,7 @@
     </p:spTree>
     <p:extLst>
       <p:ext uri="{BB962C8B-B14F-4D97-AF65-F5344CB8AC3E}">
-        <p14:creationId xmlns:p14="http://schemas.microsoft.com/office/powerpoint/2010/main" val="3758503893"/>
+        <p14:creationId xmlns:p14="http://schemas.microsoft.com/office/powerpoint/2010/main" val="4272023879"/>
       </p:ext>
     </p:extLst>
   </p:cSld>
@@ -14750,7 +14731,7 @@
           </a:lstStyle>
           <a:p>
             <a:r>
-              <a:rPr lang="es-ES"/>
+              <a:rPr lang="es-ES" smtClean="0"/>
               <a:t>Haga clic para modificar el estilo de título del patrón</a:t>
             </a:r>
             <a:endParaRPr lang="en-US" dirty="0"/>
@@ -14782,10 +14763,7 @@
               <a:buNone/>
               <a:defRPr sz="2400" b="0">
                 <a:solidFill>
-                  <a:schemeClr val="bg2">
-                    <a:lumMod val="40000"/>
-                    <a:lumOff val="60000"/>
-                  </a:schemeClr>
+                  <a:schemeClr val="accent1"/>
                 </a:solidFill>
               </a:defRPr>
             </a:lvl1pPr>
@@ -14825,8 +14803,8 @@
           <a:p>
             <a:pPr lvl="0"/>
             <a:r>
-              <a:rPr lang="es-ES"/>
-              <a:t>Haga clic para modificar los estilos de texto del patrón</a:t>
+              <a:rPr lang="es-ES" smtClean="0"/>
+              <a:t>Haga clic para modificar el estilo de texto del patrón</a:t>
             </a:r>
           </a:p>
         </p:txBody>
@@ -14892,8 +14870,8 @@
           <a:p>
             <a:pPr lvl="0"/>
             <a:r>
-              <a:rPr lang="es-ES"/>
-              <a:t>Haga clic para modificar los estilos de texto del patrón</a:t>
+              <a:rPr lang="es-ES" smtClean="0"/>
+              <a:t>Haga clic para modificar el estilo de texto del patrón</a:t>
             </a:r>
           </a:p>
         </p:txBody>
@@ -14923,10 +14901,7 @@
               <a:buNone/>
               <a:defRPr sz="2400" b="0">
                 <a:solidFill>
-                  <a:schemeClr val="bg2">
-                    <a:lumMod val="40000"/>
-                    <a:lumOff val="60000"/>
-                  </a:schemeClr>
+                  <a:schemeClr val="accent1"/>
                 </a:solidFill>
               </a:defRPr>
             </a:lvl1pPr>
@@ -14966,8 +14941,8 @@
           <a:p>
             <a:pPr lvl="0"/>
             <a:r>
-              <a:rPr lang="es-ES"/>
-              <a:t>Haga clic para modificar los estilos de texto del patrón</a:t>
+              <a:rPr lang="es-ES" smtClean="0"/>
+              <a:t>Haga clic para modificar el estilo de texto del patrón</a:t>
             </a:r>
           </a:p>
         </p:txBody>
@@ -15033,8 +15008,8 @@
           <a:p>
             <a:pPr lvl="0"/>
             <a:r>
-              <a:rPr lang="es-ES"/>
-              <a:t>Haga clic para modificar los estilos de texto del patrón</a:t>
+              <a:rPr lang="es-ES" smtClean="0"/>
+              <a:t>Haga clic para modificar el estilo de texto del patrón</a:t>
             </a:r>
           </a:p>
         </p:txBody>
@@ -15064,10 +15039,7 @@
               <a:buNone/>
               <a:defRPr sz="2400" b="0">
                 <a:solidFill>
-                  <a:schemeClr val="bg2">
-                    <a:lumMod val="40000"/>
-                    <a:lumOff val="60000"/>
-                  </a:schemeClr>
+                  <a:schemeClr val="accent1"/>
                 </a:solidFill>
               </a:defRPr>
             </a:lvl1pPr>
@@ -15107,8 +15079,8 @@
           <a:p>
             <a:pPr lvl="0"/>
             <a:r>
-              <a:rPr lang="es-ES"/>
-              <a:t>Haga clic para modificar los estilos de texto del patrón</a:t>
+              <a:rPr lang="es-ES" smtClean="0"/>
+              <a:t>Haga clic para modificar el estilo de texto del patrón</a:t>
             </a:r>
           </a:p>
         </p:txBody>
@@ -15174,8 +15146,8 @@
           <a:p>
             <a:pPr lvl="0"/>
             <a:r>
-              <a:rPr lang="es-ES"/>
-              <a:t>Haga clic para modificar los estilos de texto del patrón</a:t>
+              <a:rPr lang="es-ES" smtClean="0"/>
+              <a:t>Haga clic para modificar el estilo de texto del patrón</a:t>
             </a:r>
           </a:p>
         </p:txBody>
@@ -15196,9 +15168,7 @@
           </a:prstGeom>
           <a:ln w="12700" cmpd="sng">
             <a:solidFill>
-              <a:schemeClr val="bg2">
-                <a:lumMod val="40000"/>
-                <a:lumOff val="60000"/>
+              <a:schemeClr val="accent1">
                 <a:alpha val="40000"/>
               </a:schemeClr>
             </a:solidFill>
@@ -15235,9 +15205,7 @@
           </a:prstGeom>
           <a:ln w="12700" cmpd="sng">
             <a:solidFill>
-              <a:schemeClr val="bg2">
-                <a:lumMod val="40000"/>
-                <a:lumOff val="60000"/>
+              <a:schemeClr val="accent1">
                 <a:alpha val="40000"/>
               </a:schemeClr>
             </a:solidFill>
@@ -15276,7 +15244,7 @@
             <a:fld id="{96DFF08F-DC6B-4601-B491-B0F83F6DD2DA}" type="datetimeFigureOut">
               <a:rPr lang="en-US" smtClean="0"/>
               <a:pPr/>
-              <a:t>9/30/2025</a:t>
+              <a:t>10/6/2025</a:t>
             </a:fld>
             <a:endParaRPr lang="en-US" dirty="0"/>
           </a:p>
@@ -15328,7 +15296,7 @@
     </p:spTree>
     <p:extLst>
       <p:ext uri="{BB962C8B-B14F-4D97-AF65-F5344CB8AC3E}">
-        <p14:creationId xmlns:p14="http://schemas.microsoft.com/office/powerpoint/2010/main" val="2516742713"/>
+        <p14:creationId xmlns:p14="http://schemas.microsoft.com/office/powerpoint/2010/main" val="4251974594"/>
       </p:ext>
     </p:extLst>
   </p:cSld>
@@ -15375,7 +15343,7 @@
           </a:lstStyle>
           <a:p>
             <a:r>
-              <a:rPr lang="es-ES"/>
+              <a:rPr lang="es-ES" smtClean="0"/>
               <a:t>Haga clic para modificar el estilo de título del patrón</a:t>
             </a:r>
             <a:endParaRPr lang="en-US" dirty="0"/>
@@ -15407,10 +15375,7 @@
               <a:buNone/>
               <a:defRPr sz="2400" b="0">
                 <a:solidFill>
-                  <a:schemeClr val="bg2">
-                    <a:lumMod val="40000"/>
-                    <a:lumOff val="60000"/>
-                  </a:schemeClr>
+                  <a:schemeClr val="accent1"/>
                 </a:solidFill>
               </a:defRPr>
             </a:lvl1pPr>
@@ -15450,8 +15415,8 @@
           <a:p>
             <a:pPr lvl="0"/>
             <a:r>
-              <a:rPr lang="es-ES"/>
-              <a:t>Haga clic para modificar los estilos de texto del patrón</a:t>
+              <a:rPr lang="es-ES" smtClean="0"/>
+              <a:t>Haga clic para modificar el estilo de texto del patrón</a:t>
             </a:r>
           </a:p>
         </p:txBody>
@@ -15528,7 +15493,7 @@
           </a:lstStyle>
           <a:p>
             <a:r>
-              <a:rPr lang="es-ES"/>
+              <a:rPr lang="es-ES" smtClean="0"/>
               <a:t>Haga clic en el icono para agregar una imagen</a:t>
             </a:r>
             <a:endParaRPr lang="en-US" dirty="0"/>
@@ -15596,8 +15561,8 @@
           <a:p>
             <a:pPr lvl="0"/>
             <a:r>
-              <a:rPr lang="es-ES"/>
-              <a:t>Haga clic para modificar los estilos de texto del patrón</a:t>
+              <a:rPr lang="es-ES" smtClean="0"/>
+              <a:t>Haga clic para modificar el estilo de texto del patrón</a:t>
             </a:r>
           </a:p>
         </p:txBody>
@@ -15627,10 +15592,7 @@
               <a:buNone/>
               <a:defRPr sz="2400" b="0">
                 <a:solidFill>
-                  <a:schemeClr val="bg2">
-                    <a:lumMod val="40000"/>
-                    <a:lumOff val="60000"/>
-                  </a:schemeClr>
+                  <a:schemeClr val="accent1"/>
                 </a:solidFill>
               </a:defRPr>
             </a:lvl1pPr>
@@ -15670,8 +15632,8 @@
           <a:p>
             <a:pPr lvl="0"/>
             <a:r>
-              <a:rPr lang="es-ES"/>
-              <a:t>Haga clic para modificar los estilos de texto del patrón</a:t>
+              <a:rPr lang="es-ES" smtClean="0"/>
+              <a:t>Haga clic para modificar el estilo de texto del patrón</a:t>
             </a:r>
           </a:p>
         </p:txBody>
@@ -15748,7 +15710,7 @@
           </a:lstStyle>
           <a:p>
             <a:r>
-              <a:rPr lang="es-ES"/>
+              <a:rPr lang="es-ES" smtClean="0"/>
               <a:t>Haga clic en el icono para agregar una imagen</a:t>
             </a:r>
             <a:endParaRPr lang="en-US" dirty="0"/>
@@ -15816,8 +15778,8 @@
           <a:p>
             <a:pPr lvl="0"/>
             <a:r>
-              <a:rPr lang="es-ES"/>
-              <a:t>Haga clic para modificar los estilos de texto del patrón</a:t>
+              <a:rPr lang="es-ES" smtClean="0"/>
+              <a:t>Haga clic para modificar el estilo de texto del patrón</a:t>
             </a:r>
           </a:p>
         </p:txBody>
@@ -15847,10 +15809,7 @@
               <a:buNone/>
               <a:defRPr sz="2400" b="0">
                 <a:solidFill>
-                  <a:schemeClr val="bg2">
-                    <a:lumMod val="40000"/>
-                    <a:lumOff val="60000"/>
-                  </a:schemeClr>
+                  <a:schemeClr val="accent1"/>
                 </a:solidFill>
               </a:defRPr>
             </a:lvl1pPr>
@@ -15890,8 +15849,8 @@
           <a:p>
             <a:pPr lvl="0"/>
             <a:r>
-              <a:rPr lang="es-ES"/>
-              <a:t>Haga clic para modificar los estilos de texto del patrón</a:t>
+              <a:rPr lang="es-ES" smtClean="0"/>
+              <a:t>Haga clic para modificar el estilo de texto del patrón</a:t>
             </a:r>
           </a:p>
         </p:txBody>
@@ -15968,7 +15927,7 @@
           </a:lstStyle>
           <a:p>
             <a:r>
-              <a:rPr lang="es-ES"/>
+              <a:rPr lang="es-ES" smtClean="0"/>
               <a:t>Haga clic en el icono para agregar una imagen</a:t>
             </a:r>
             <a:endParaRPr lang="en-US" dirty="0"/>
@@ -16036,15 +15995,15 @@
           <a:p>
             <a:pPr lvl="0"/>
             <a:r>
-              <a:rPr lang="es-ES"/>
-              <a:t>Haga clic para modificar los estilos de texto del patrón</a:t>
+              <a:rPr lang="es-ES" smtClean="0"/>
+              <a:t>Haga clic para modificar el estilo de texto del patrón</a:t>
             </a:r>
           </a:p>
         </p:txBody>
       </p:sp>
       <p:cxnSp>
         <p:nvCxnSpPr>
-          <p:cNvPr id="19" name="Straight Connector 18"/>
+          <p:cNvPr id="17" name="Straight Connector 16"/>
           <p:cNvCxnSpPr/>
           <p:nvPr/>
         </p:nvCxnSpPr>
@@ -16058,9 +16017,7 @@
           </a:prstGeom>
           <a:ln w="12700" cmpd="sng">
             <a:solidFill>
-              <a:schemeClr val="bg2">
-                <a:lumMod val="40000"/>
-                <a:lumOff val="60000"/>
+              <a:schemeClr val="accent1">
                 <a:alpha val="40000"/>
               </a:schemeClr>
             </a:solidFill>
@@ -16083,7 +16040,7 @@
       </p:cxnSp>
       <p:cxnSp>
         <p:nvCxnSpPr>
-          <p:cNvPr id="20" name="Straight Connector 19"/>
+          <p:cNvPr id="18" name="Straight Connector 17"/>
           <p:cNvCxnSpPr/>
           <p:nvPr/>
         </p:nvCxnSpPr>
@@ -16097,9 +16054,7 @@
           </a:prstGeom>
           <a:ln w="12700" cmpd="sng">
             <a:solidFill>
-              <a:schemeClr val="bg2">
-                <a:lumMod val="40000"/>
-                <a:lumOff val="60000"/>
+              <a:schemeClr val="accent1">
                 <a:alpha val="40000"/>
               </a:schemeClr>
             </a:solidFill>
@@ -16138,7 +16093,7 @@
             <a:fld id="{96DFF08F-DC6B-4601-B491-B0F83F6DD2DA}" type="datetimeFigureOut">
               <a:rPr lang="en-US" smtClean="0"/>
               <a:pPr/>
-              <a:t>9/30/2025</a:t>
+              <a:t>10/6/2025</a:t>
             </a:fld>
             <a:endParaRPr lang="en-US" dirty="0"/>
           </a:p>
@@ -16190,7 +16145,7 @@
     </p:spTree>
     <p:extLst>
       <p:ext uri="{BB962C8B-B14F-4D97-AF65-F5344CB8AC3E}">
-        <p14:creationId xmlns:p14="http://schemas.microsoft.com/office/powerpoint/2010/main" val="2081954057"/>
+        <p14:creationId xmlns:p14="http://schemas.microsoft.com/office/powerpoint/2010/main" val="3729566807"/>
       </p:ext>
     </p:extLst>
   </p:cSld>
@@ -16241,7 +16196,7 @@
           <a:lstStyle/>
           <a:p>
             <a:r>
-              <a:rPr lang="es-ES"/>
+              <a:rPr lang="es-ES" smtClean="0"/>
               <a:t>Haga clic para modificar el estilo de título del patrón</a:t>
             </a:r>
             <a:endParaRPr lang="en-US" dirty="0"/>
@@ -16278,7 +16233,7 @@
                 </a:solidFill>
               </a:rPr>
               <a:pPr/>
-              <a:t>09/30/2025</a:t>
+              <a:t>10/06/2025</a:t>
             </a:fld>
             <a:endParaRPr lang="es-PA">
               <a:solidFill>
@@ -16405,7 +16360,7 @@
           <a:lstStyle/>
           <a:p>
             <a:r>
-              <a:rPr lang="es-ES"/>
+              <a:rPr lang="es-ES" smtClean="0"/>
               <a:t>Haga clic para modificar el estilo de título del patrón</a:t>
             </a:r>
             <a:endParaRPr lang="en-US" dirty="0"/>
@@ -16429,35 +16384,35 @@
           <a:p>
             <a:pPr lvl="0"/>
             <a:r>
-              <a:rPr lang="es-ES"/>
-              <a:t>Haga clic para modificar los estilos de texto del patrón</a:t>
+              <a:rPr lang="es-ES" smtClean="0"/>
+              <a:t>Haga clic para modificar el estilo de texto del patrón</a:t>
             </a:r>
           </a:p>
           <a:p>
             <a:pPr lvl="1"/>
             <a:r>
-              <a:rPr lang="es-ES"/>
+              <a:rPr lang="es-ES" smtClean="0"/>
               <a:t>Segundo nivel</a:t>
             </a:r>
           </a:p>
           <a:p>
             <a:pPr lvl="2"/>
             <a:r>
-              <a:rPr lang="es-ES"/>
+              <a:rPr lang="es-ES" smtClean="0"/>
               <a:t>Tercer nivel</a:t>
             </a:r>
           </a:p>
           <a:p>
             <a:pPr lvl="3"/>
             <a:r>
-              <a:rPr lang="es-ES"/>
+              <a:rPr lang="es-ES" smtClean="0"/>
               <a:t>Cuarto nivel</a:t>
             </a:r>
           </a:p>
           <a:p>
             <a:pPr lvl="4"/>
             <a:r>
-              <a:rPr lang="es-ES"/>
+              <a:rPr lang="es-ES" smtClean="0"/>
               <a:t>Quinto nivel</a:t>
             </a:r>
             <a:endParaRPr lang="en-US" dirty="0"/>
@@ -16486,7 +16441,7 @@
                 </a:solidFill>
               </a:rPr>
               <a:pPr/>
-              <a:t>09/30/2025</a:t>
+              <a:t>10/06/2025</a:t>
             </a:fld>
             <a:endParaRPr lang="es-PA">
               <a:solidFill>
@@ -16554,7 +16509,7 @@
     </p:spTree>
     <p:extLst>
       <p:ext uri="{BB962C8B-B14F-4D97-AF65-F5344CB8AC3E}">
-        <p14:creationId xmlns:p14="http://schemas.microsoft.com/office/powerpoint/2010/main" val="1984235860"/>
+        <p14:creationId xmlns:p14="http://schemas.microsoft.com/office/powerpoint/2010/main" val="140534285"/>
       </p:ext>
     </p:extLst>
   </p:cSld>
@@ -16602,7 +16557,7 @@
           <a:lstStyle/>
           <a:p>
             <a:r>
-              <a:rPr lang="es-ES"/>
+              <a:rPr lang="es-ES" smtClean="0"/>
               <a:t>Haga clic para modificar el estilo de título del patrón</a:t>
             </a:r>
             <a:endParaRPr lang="en-US" dirty="0"/>
@@ -16631,35 +16586,35 @@
           <a:p>
             <a:pPr lvl="0"/>
             <a:r>
-              <a:rPr lang="es-ES"/>
-              <a:t>Haga clic para modificar los estilos de texto del patrón</a:t>
+              <a:rPr lang="es-ES" smtClean="0"/>
+              <a:t>Haga clic para modificar el estilo de texto del patrón</a:t>
             </a:r>
           </a:p>
           <a:p>
             <a:pPr lvl="1"/>
             <a:r>
-              <a:rPr lang="es-ES"/>
+              <a:rPr lang="es-ES" smtClean="0"/>
               <a:t>Segundo nivel</a:t>
             </a:r>
           </a:p>
           <a:p>
             <a:pPr lvl="2"/>
             <a:r>
-              <a:rPr lang="es-ES"/>
+              <a:rPr lang="es-ES" smtClean="0"/>
               <a:t>Tercer nivel</a:t>
             </a:r>
           </a:p>
           <a:p>
             <a:pPr lvl="3"/>
             <a:r>
-              <a:rPr lang="es-ES"/>
+              <a:rPr lang="es-ES" smtClean="0"/>
               <a:t>Cuarto nivel</a:t>
             </a:r>
           </a:p>
           <a:p>
             <a:pPr lvl="4"/>
             <a:r>
-              <a:rPr lang="es-ES"/>
+              <a:rPr lang="es-ES" smtClean="0"/>
               <a:t>Quinto nivel</a:t>
             </a:r>
             <a:endParaRPr lang="en-US" dirty="0"/>
@@ -16688,7 +16643,7 @@
                 </a:solidFill>
               </a:rPr>
               <a:pPr/>
-              <a:t>09/30/2025</a:t>
+              <a:t>10/06/2025</a:t>
             </a:fld>
             <a:endParaRPr lang="es-PA">
               <a:solidFill>
@@ -16756,7 +16711,7 @@
     </p:spTree>
     <p:extLst>
       <p:ext uri="{BB962C8B-B14F-4D97-AF65-F5344CB8AC3E}">
-        <p14:creationId xmlns:p14="http://schemas.microsoft.com/office/powerpoint/2010/main" val="1949046814"/>
+        <p14:creationId xmlns:p14="http://schemas.microsoft.com/office/powerpoint/2010/main" val="2781875276"/>
       </p:ext>
     </p:extLst>
   </p:cSld>
@@ -16813,7 +16768,7 @@
                 </a:solidFill>
               </a:rPr>
               <a:pPr/>
-              <a:t>09/30/2025</a:t>
+              <a:t>10/06/2025</a:t>
             </a:fld>
             <a:endParaRPr lang="es-PA">
               <a:solidFill>
@@ -16952,7 +16907,7 @@
           </a:lstStyle>
           <a:p>
             <a:r>
-              <a:rPr lang="es-ES"/>
+              <a:rPr lang="es-ES" smtClean="0"/>
               <a:t>Haga clic para modificar el estilo de título del patrón</a:t>
             </a:r>
             <a:endParaRPr lang="en-US" dirty="0"/>
@@ -17012,35 +16967,35 @@
           <a:p>
             <a:pPr lvl="0"/>
             <a:r>
-              <a:rPr lang="es-ES"/>
+              <a:rPr lang="es-ES" smtClean="0"/>
               <a:t>Haga clic para modificar el estilo de texto del patrón</a:t>
             </a:r>
           </a:p>
           <a:p>
             <a:pPr lvl="1"/>
             <a:r>
-              <a:rPr lang="es-ES"/>
+              <a:rPr lang="es-ES" smtClean="0"/>
               <a:t>Segundo nivel</a:t>
             </a:r>
           </a:p>
           <a:p>
             <a:pPr lvl="2"/>
             <a:r>
-              <a:rPr lang="es-ES"/>
+              <a:rPr lang="es-ES" smtClean="0"/>
               <a:t>Tercer nivel</a:t>
             </a:r>
           </a:p>
           <a:p>
             <a:pPr lvl="3"/>
             <a:r>
-              <a:rPr lang="es-ES"/>
+              <a:rPr lang="es-ES" smtClean="0"/>
               <a:t>Cuarto nivel</a:t>
             </a:r>
           </a:p>
           <a:p>
             <a:pPr lvl="4"/>
             <a:r>
-              <a:rPr lang="es-ES"/>
+              <a:rPr lang="es-ES" smtClean="0"/>
               <a:t>Quinto nivel</a:t>
             </a:r>
             <a:endParaRPr lang="en-US" dirty="0"/>
@@ -17109,7 +17064,7 @@
           <a:p>
             <a:pPr lvl="0"/>
             <a:r>
-              <a:rPr lang="es-ES"/>
+              <a:rPr lang="es-ES" smtClean="0"/>
               <a:t>Haga clic para modificar el estilo de texto del patrón</a:t>
             </a:r>
           </a:p>
@@ -17145,7 +17100,7 @@
                 </a:solidFill>
               </a:rPr>
               <a:pPr/>
-              <a:t>09/30/2025</a:t>
+              <a:t>10/06/2025</a:t>
             </a:fld>
             <a:endParaRPr lang="es-PA">
               <a:solidFill>
@@ -17284,7 +17239,7 @@
           </a:lstStyle>
           <a:p>
             <a:r>
-              <a:rPr lang="es-ES"/>
+              <a:rPr lang="es-ES" smtClean="0"/>
               <a:t>Haga clic para modificar el estilo de título del patrón</a:t>
             </a:r>
             <a:endParaRPr lang="en-US" dirty="0"/>
@@ -17352,7 +17307,7 @@
           </a:lstStyle>
           <a:p>
             <a:r>
-              <a:rPr lang="es-ES"/>
+              <a:rPr lang="es-ES" smtClean="0"/>
               <a:t>Haga clic en el icono para agregar una imagen</a:t>
             </a:r>
             <a:endParaRPr lang="en-US" dirty="0"/>
@@ -17421,7 +17376,7 @@
           <a:p>
             <a:pPr lvl="0"/>
             <a:r>
-              <a:rPr lang="es-ES"/>
+              <a:rPr lang="es-ES" smtClean="0"/>
               <a:t>Haga clic para modificar el estilo de texto del patrón</a:t>
             </a:r>
           </a:p>
@@ -17457,7 +17412,7 @@
                 </a:solidFill>
               </a:rPr>
               <a:pPr/>
-              <a:t>09/30/2025</a:t>
+              <a:t>10/06/2025</a:t>
             </a:fld>
             <a:endParaRPr lang="es-PA">
               <a:solidFill>
@@ -17968,13 +17923,18 @@
           <a:lstStyle/>
           <a:p>
             <a:r>
-              <a:rPr lang="en-US" dirty="0">
+              <a:rPr lang="en-US" dirty="0" smtClean="0">
                 <a:solidFill>
                   <a:schemeClr val="bg1"/>
                 </a:solidFill>
               </a:rPr>
               <a:t>PMO-MON-102</a:t>
             </a:r>
+            <a:endParaRPr lang="en-US" dirty="0">
+              <a:solidFill>
+                <a:schemeClr val="bg1"/>
+              </a:solidFill>
+            </a:endParaRPr>
           </a:p>
         </p:txBody>
       </p:sp>
@@ -18350,13 +18310,18 @@
           <a:lstStyle/>
           <a:p>
             <a:r>
-              <a:rPr lang="en-US" dirty="0">
+              <a:rPr lang="en-US" dirty="0" smtClean="0">
                 <a:solidFill>
                   <a:schemeClr val="tx1"/>
                 </a:solidFill>
               </a:rPr>
               <a:t>PMO-MON-101</a:t>
             </a:r>
+            <a:endParaRPr lang="en-US" dirty="0">
+              <a:solidFill>
+                <a:schemeClr val="tx1"/>
+              </a:solidFill>
+            </a:endParaRPr>
           </a:p>
         </p:txBody>
       </p:sp>
@@ -18731,13 +18696,18 @@
           <a:lstStyle/>
           <a:p>
             <a:r>
-              <a:rPr lang="en-US" dirty="0">
+              <a:rPr lang="en-US" dirty="0" smtClean="0">
                 <a:solidFill>
                   <a:schemeClr val="bg1"/>
                 </a:solidFill>
               </a:rPr>
               <a:t>PMO-MON-101</a:t>
             </a:r>
+            <a:endParaRPr lang="en-US" dirty="0">
+              <a:solidFill>
+                <a:schemeClr val="bg1"/>
+              </a:solidFill>
+            </a:endParaRPr>
           </a:p>
         </p:txBody>
       </p:sp>
@@ -19084,21 +19054,21 @@
           <a:gradFill flip="none" rotWithShape="1">
             <a:gsLst>
               <a:gs pos="0">
-                <a:schemeClr val="bg2">
+                <a:schemeClr val="accent1">
                   <a:lumMod val="60000"/>
                   <a:lumOff val="40000"/>
                   <a:alpha val="7000"/>
                 </a:schemeClr>
               </a:gs>
               <a:gs pos="69000">
-                <a:schemeClr val="bg2">
+                <a:schemeClr val="accent1">
                   <a:lumMod val="60000"/>
                   <a:lumOff val="40000"/>
                   <a:alpha val="0"/>
                 </a:schemeClr>
               </a:gs>
               <a:gs pos="36000">
-                <a:schemeClr val="bg2">
+                <a:schemeClr val="accent1">
                   <a:lumMod val="60000"/>
                   <a:lumOff val="40000"/>
                   <a:alpha val="6000"/>
@@ -19147,21 +19117,21 @@
           <a:gradFill flip="none" rotWithShape="1">
             <a:gsLst>
               <a:gs pos="0">
-                <a:schemeClr val="bg2">
+                <a:schemeClr val="accent1">
                   <a:lumMod val="60000"/>
                   <a:lumOff val="40000"/>
                   <a:alpha val="14000"/>
                 </a:schemeClr>
               </a:gs>
               <a:gs pos="73000">
-                <a:schemeClr val="bg2">
+                <a:schemeClr val="accent1">
                   <a:lumMod val="60000"/>
                   <a:lumOff val="40000"/>
                   <a:alpha val="0"/>
                 </a:schemeClr>
               </a:gs>
               <a:gs pos="36000">
-                <a:schemeClr val="bg2">
+                <a:schemeClr val="accent1">
                   <a:lumMod val="60000"/>
                   <a:lumOff val="40000"/>
                   <a:alpha val="7000"/>
@@ -19210,21 +19180,21 @@
           <a:gradFill flip="none" rotWithShape="1">
             <a:gsLst>
               <a:gs pos="0">
-                <a:schemeClr val="bg2">
+                <a:schemeClr val="accent1">
                   <a:lumMod val="60000"/>
                   <a:lumOff val="40000"/>
-                  <a:alpha val="9000"/>
+                  <a:alpha val="10000"/>
                 </a:schemeClr>
               </a:gs>
               <a:gs pos="66000">
-                <a:schemeClr val="bg2">
+                <a:schemeClr val="accent1">
                   <a:lumMod val="60000"/>
                   <a:lumOff val="40000"/>
                   <a:alpha val="0"/>
                 </a:schemeClr>
               </a:gs>
-              <a:gs pos="36000">
-                <a:schemeClr val="bg2">
+              <a:gs pos="31000">
+                <a:schemeClr val="accent1">
                   <a:lumMod val="60000"/>
                   <a:lumOff val="40000"/>
                   <a:alpha val="5000"/>
@@ -19273,21 +19243,21 @@
           <a:gradFill flip="none" rotWithShape="1">
             <a:gsLst>
               <a:gs pos="0">
-                <a:schemeClr val="bg2">
+                <a:schemeClr val="accent1">
                   <a:lumMod val="60000"/>
                   <a:lumOff val="40000"/>
                   <a:alpha val="11000"/>
                 </a:schemeClr>
               </a:gs>
               <a:gs pos="75000">
-                <a:schemeClr val="bg2">
+                <a:schemeClr val="accent1">
                   <a:lumMod val="60000"/>
                   <a:lumOff val="40000"/>
                   <a:alpha val="0"/>
                 </a:schemeClr>
               </a:gs>
               <a:gs pos="36000">
-                <a:schemeClr val="bg2">
+                <a:schemeClr val="accent1">
                   <a:lumMod val="60000"/>
                   <a:lumOff val="40000"/>
                   <a:alpha val="10000"/>
@@ -19336,21 +19306,21 @@
           <a:gradFill flip="none" rotWithShape="1">
             <a:gsLst>
               <a:gs pos="0">
-                <a:schemeClr val="bg2">
+                <a:schemeClr val="accent1">
                   <a:lumMod val="60000"/>
                   <a:lumOff val="40000"/>
                   <a:alpha val="8000"/>
                 </a:schemeClr>
               </a:gs>
               <a:gs pos="72000">
-                <a:schemeClr val="bg2">
+                <a:schemeClr val="accent1">
                   <a:lumMod val="60000"/>
                   <a:lumOff val="40000"/>
                   <a:alpha val="0"/>
                 </a:schemeClr>
               </a:gs>
               <a:gs pos="36000">
-                <a:schemeClr val="bg2">
+                <a:schemeClr val="accent1">
                   <a:lumMod val="60000"/>
                   <a:lumOff val="40000"/>
                   <a:alpha val="8000"/>
@@ -19444,7 +19414,7 @@
           <a:lstStyle/>
           <a:p>
             <a:r>
-              <a:rPr lang="es-ES"/>
+              <a:rPr lang="es-ES" smtClean="0"/>
               <a:t>Haga clic para modificar el estilo de título del patrón</a:t>
             </a:r>
             <a:endParaRPr lang="en-US" dirty="0"/>
@@ -19478,35 +19448,35 @@
           <a:p>
             <a:pPr lvl="0"/>
             <a:r>
-              <a:rPr lang="es-ES"/>
-              <a:t>Haga clic para modificar los estilos de texto del patrón</a:t>
+              <a:rPr lang="es-ES" smtClean="0"/>
+              <a:t>Haga clic para modificar el estilo de texto del patrón</a:t>
             </a:r>
           </a:p>
           <a:p>
             <a:pPr lvl="1"/>
             <a:r>
-              <a:rPr lang="es-ES"/>
+              <a:rPr lang="es-ES" smtClean="0"/>
               <a:t>Segundo nivel</a:t>
             </a:r>
           </a:p>
           <a:p>
             <a:pPr lvl="2"/>
             <a:r>
-              <a:rPr lang="es-ES"/>
+              <a:rPr lang="es-ES" smtClean="0"/>
               <a:t>Tercer nivel</a:t>
             </a:r>
           </a:p>
           <a:p>
             <a:pPr lvl="3"/>
             <a:r>
-              <a:rPr lang="es-ES"/>
+              <a:rPr lang="es-ES" smtClean="0"/>
               <a:t>Cuarto nivel</a:t>
             </a:r>
           </a:p>
           <a:p>
             <a:pPr lvl="4"/>
             <a:r>
-              <a:rPr lang="es-ES"/>
+              <a:rPr lang="es-ES" smtClean="0"/>
               <a:t>Quinto nivel</a:t>
             </a:r>
             <a:endParaRPr lang="en-US" dirty="0"/>
@@ -19549,7 +19519,7 @@
           <a:p>
             <a:fld id="{4AAD347D-5ACD-4C99-B74B-A9C85AD731AF}" type="datetimeFigureOut">
               <a:rPr lang="en-US" dirty="0"/>
-              <a:t>9/30/2025</a:t>
+              <a:t>10/6/2025</a:t>
             </a:fld>
             <a:endParaRPr lang="en-US" dirty="0"/>
           </a:p>
@@ -19603,7 +19573,7 @@
             <p:ph type="sldNum" sz="quarter" idx="4"/>
           </p:nvPr>
         </p:nvSpPr>
-        <p:spPr bwMode="gray">
+        <p:spPr>
           <a:xfrm>
             <a:off x="7766431" y="295736"/>
             <a:ext cx="628813" cy="767687"/>
@@ -19637,33 +19607,33 @@
     </p:spTree>
     <p:extLst>
       <p:ext uri="{BB962C8B-B14F-4D97-AF65-F5344CB8AC3E}">
-        <p14:creationId xmlns:p14="http://schemas.microsoft.com/office/powerpoint/2010/main" val="1385146431"/>
+        <p14:creationId xmlns:p14="http://schemas.microsoft.com/office/powerpoint/2010/main" val="2513034382"/>
       </p:ext>
     </p:extLst>
   </p:cSld>
   <p:clrMap bg1="dk1" tx1="lt1" bg2="dk2" tx2="lt2" accent1="accent1" accent2="accent2" accent3="accent3" accent4="accent4" accent5="accent5" accent6="accent6" hlink="hlink" folHlink="folHlink"/>
   <p:sldLayoutIdLst>
-    <p:sldLayoutId id="2147483781" r:id="rId1"/>
-    <p:sldLayoutId id="2147483782" r:id="rId2"/>
-    <p:sldLayoutId id="2147483783" r:id="rId3"/>
-    <p:sldLayoutId id="2147483784" r:id="rId4"/>
-    <p:sldLayoutId id="2147483785" r:id="rId5"/>
-    <p:sldLayoutId id="2147483786" r:id="rId6"/>
-    <p:sldLayoutId id="2147483787" r:id="rId7"/>
-    <p:sldLayoutId id="2147483788" r:id="rId8"/>
-    <p:sldLayoutId id="2147483789" r:id="rId9"/>
-    <p:sldLayoutId id="2147483790" r:id="rId10"/>
-    <p:sldLayoutId id="2147483791" r:id="rId11"/>
-    <p:sldLayoutId id="2147483792" r:id="rId12"/>
-    <p:sldLayoutId id="2147483793" r:id="rId13"/>
-    <p:sldLayoutId id="2147483794" r:id="rId14"/>
-    <p:sldLayoutId id="2147483795" r:id="rId15"/>
-    <p:sldLayoutId id="2147483796" r:id="rId16"/>
-    <p:sldLayoutId id="2147483797" r:id="rId17"/>
+    <p:sldLayoutId id="2147483763" r:id="rId1"/>
+    <p:sldLayoutId id="2147483764" r:id="rId2"/>
+    <p:sldLayoutId id="2147483765" r:id="rId3"/>
+    <p:sldLayoutId id="2147483766" r:id="rId4"/>
+    <p:sldLayoutId id="2147483767" r:id="rId5"/>
+    <p:sldLayoutId id="2147483768" r:id="rId6"/>
+    <p:sldLayoutId id="2147483769" r:id="rId7"/>
+    <p:sldLayoutId id="2147483770" r:id="rId8"/>
+    <p:sldLayoutId id="2147483771" r:id="rId9"/>
+    <p:sldLayoutId id="2147483772" r:id="rId10"/>
+    <p:sldLayoutId id="2147483773" r:id="rId11"/>
+    <p:sldLayoutId id="2147483774" r:id="rId12"/>
+    <p:sldLayoutId id="2147483775" r:id="rId13"/>
+    <p:sldLayoutId id="2147483776" r:id="rId14"/>
+    <p:sldLayoutId id="2147483777" r:id="rId15"/>
+    <p:sldLayoutId id="2147483778" r:id="rId16"/>
+    <p:sldLayoutId id="2147483779" r:id="rId17"/>
   </p:sldLayoutIdLst>
   <p:txStyles>
     <p:titleStyle>
-      <a:lvl1pPr algn="l" defTabSz="457207" rtl="0" eaLnBrk="1" latinLnBrk="0" hangingPunct="1">
+      <a:lvl1pPr algn="l" defTabSz="457200" rtl="0" eaLnBrk="1" latinLnBrk="0" hangingPunct="1">
         <a:spcBef>
           <a:spcPct val="0"/>
         </a:spcBef>
@@ -19735,7 +19705,7 @@
       </a:lvl9pPr>
     </p:titleStyle>
     <p:bodyStyle>
-      <a:lvl1pPr marL="342906" indent="-342906" algn="l" defTabSz="457207" rtl="0" eaLnBrk="1" latinLnBrk="0" hangingPunct="1">
+      <a:lvl1pPr marL="342900" indent="-342900" algn="l" defTabSz="457200" rtl="0" eaLnBrk="1" latinLnBrk="0" hangingPunct="1">
         <a:spcBef>
           <a:spcPts val="1000"/>
         </a:spcBef>
@@ -19743,10 +19713,7 @@
           <a:spcPts val="0"/>
         </a:spcAft>
         <a:buClr>
-          <a:schemeClr val="bg2">
-            <a:lumMod val="40000"/>
-            <a:lumOff val="60000"/>
-          </a:schemeClr>
+          <a:schemeClr val="accent1"/>
         </a:buClr>
         <a:buSzPct val="80000"/>
         <a:buFont typeface="Wingdings 3" charset="2"/>
@@ -19760,7 +19727,7 @@
           <a:cs typeface="+mj-cs"/>
         </a:defRPr>
       </a:lvl1pPr>
-      <a:lvl2pPr marL="742962" indent="-285755" algn="l" defTabSz="457207" rtl="0" eaLnBrk="1" latinLnBrk="0" hangingPunct="1">
+      <a:lvl2pPr marL="742950" indent="-285750" algn="l" defTabSz="457200" rtl="0" eaLnBrk="1" latinLnBrk="0" hangingPunct="1">
         <a:spcBef>
           <a:spcPts val="1000"/>
         </a:spcBef>
@@ -19768,10 +19735,7 @@
           <a:spcPts val="0"/>
         </a:spcAft>
         <a:buClr>
-          <a:schemeClr val="bg2">
-            <a:lumMod val="40000"/>
-            <a:lumOff val="60000"/>
-          </a:schemeClr>
+          <a:schemeClr val="accent1"/>
         </a:buClr>
         <a:buSzPct val="80000"/>
         <a:buFont typeface="Wingdings 3" charset="2"/>
@@ -19785,7 +19749,7 @@
           <a:cs typeface="+mj-cs"/>
         </a:defRPr>
       </a:lvl2pPr>
-      <a:lvl3pPr marL="1143020" indent="-228604" algn="l" defTabSz="457207" rtl="0" eaLnBrk="1" latinLnBrk="0" hangingPunct="1">
+      <a:lvl3pPr marL="1143000" indent="-228600" algn="l" defTabSz="457200" rtl="0" eaLnBrk="1" latinLnBrk="0" hangingPunct="1">
         <a:spcBef>
           <a:spcPts val="1000"/>
         </a:spcBef>
@@ -19793,10 +19757,7 @@
           <a:spcPts val="0"/>
         </a:spcAft>
         <a:buClr>
-          <a:schemeClr val="bg2">
-            <a:lumMod val="40000"/>
-            <a:lumOff val="60000"/>
-          </a:schemeClr>
+          <a:schemeClr val="accent1"/>
         </a:buClr>
         <a:buSzPct val="80000"/>
         <a:buFont typeface="Wingdings 3" charset="2"/>
@@ -19810,7 +19771,7 @@
           <a:cs typeface="+mj-cs"/>
         </a:defRPr>
       </a:lvl3pPr>
-      <a:lvl4pPr marL="1600227" indent="-228604" algn="l" defTabSz="457207" rtl="0" eaLnBrk="1" latinLnBrk="0" hangingPunct="1">
+      <a:lvl4pPr marL="1600200" indent="-228600" algn="l" defTabSz="457200" rtl="0" eaLnBrk="1" latinLnBrk="0" hangingPunct="1">
         <a:spcBef>
           <a:spcPts val="1000"/>
         </a:spcBef>
@@ -19818,10 +19779,7 @@
           <a:spcPts val="0"/>
         </a:spcAft>
         <a:buClr>
-          <a:schemeClr val="bg2">
-            <a:lumMod val="40000"/>
-            <a:lumOff val="60000"/>
-          </a:schemeClr>
+          <a:schemeClr val="accent1"/>
         </a:buClr>
         <a:buSzPct val="80000"/>
         <a:buFont typeface="Wingdings 3" charset="2"/>
@@ -19835,7 +19793,7 @@
           <a:cs typeface="+mj-cs"/>
         </a:defRPr>
       </a:lvl4pPr>
-      <a:lvl5pPr marL="2057434" indent="-228604" algn="l" defTabSz="457207" rtl="0" eaLnBrk="1" latinLnBrk="0" hangingPunct="1">
+      <a:lvl5pPr marL="2057400" indent="-228600" algn="l" defTabSz="457200" rtl="0" eaLnBrk="1" latinLnBrk="0" hangingPunct="1">
         <a:spcBef>
           <a:spcPts val="1000"/>
         </a:spcBef>
@@ -19843,10 +19801,7 @@
           <a:spcPts val="0"/>
         </a:spcAft>
         <a:buClr>
-          <a:schemeClr val="bg2">
-            <a:lumMod val="40000"/>
-            <a:lumOff val="60000"/>
-          </a:schemeClr>
+          <a:schemeClr val="accent1"/>
         </a:buClr>
         <a:buSzPct val="80000"/>
         <a:buFont typeface="Wingdings 3" charset="2"/>
@@ -19860,7 +19815,7 @@
           <a:cs typeface="+mj-cs"/>
         </a:defRPr>
       </a:lvl5pPr>
-      <a:lvl6pPr marL="2514642" indent="-228604" algn="l" defTabSz="457207" rtl="0" eaLnBrk="1" latinLnBrk="0" hangingPunct="1">
+      <a:lvl6pPr marL="2514600" indent="-228600" algn="l" defTabSz="457200" rtl="0" eaLnBrk="1" latinLnBrk="0" hangingPunct="1">
         <a:spcBef>
           <a:spcPts val="1000"/>
         </a:spcBef>
@@ -19868,10 +19823,7 @@
           <a:spcPts val="0"/>
         </a:spcAft>
         <a:buClr>
-          <a:schemeClr val="bg2">
-            <a:lumMod val="40000"/>
-            <a:lumOff val="60000"/>
-          </a:schemeClr>
+          <a:schemeClr val="accent1"/>
         </a:buClr>
         <a:buSzPct val="80000"/>
         <a:buFont typeface="Wingdings 3" charset="2"/>
@@ -19885,7 +19837,7 @@
           <a:cs typeface="+mj-cs"/>
         </a:defRPr>
       </a:lvl6pPr>
-      <a:lvl7pPr marL="2971849" indent="-228604" algn="l" defTabSz="457207" rtl="0" eaLnBrk="1" latinLnBrk="0" hangingPunct="1">
+      <a:lvl7pPr marL="2971800" indent="-228600" algn="l" defTabSz="457200" rtl="0" eaLnBrk="1" latinLnBrk="0" hangingPunct="1">
         <a:spcBef>
           <a:spcPts val="1000"/>
         </a:spcBef>
@@ -19893,10 +19845,7 @@
           <a:spcPts val="0"/>
         </a:spcAft>
         <a:buClr>
-          <a:schemeClr val="bg2">
-            <a:lumMod val="40000"/>
-            <a:lumOff val="60000"/>
-          </a:schemeClr>
+          <a:schemeClr val="accent1"/>
         </a:buClr>
         <a:buSzPct val="80000"/>
         <a:buFont typeface="Wingdings 3" charset="2"/>
@@ -19910,7 +19859,7 @@
           <a:cs typeface="+mj-cs"/>
         </a:defRPr>
       </a:lvl7pPr>
-      <a:lvl8pPr marL="3429057" indent="-228604" algn="l" defTabSz="457207" rtl="0" eaLnBrk="1" latinLnBrk="0" hangingPunct="1">
+      <a:lvl8pPr marL="3429000" indent="-228600" algn="l" defTabSz="457200" rtl="0" eaLnBrk="1" latinLnBrk="0" hangingPunct="1">
         <a:spcBef>
           <a:spcPts val="1000"/>
         </a:spcBef>
@@ -19918,10 +19867,7 @@
           <a:spcPts val="0"/>
         </a:spcAft>
         <a:buClr>
-          <a:schemeClr val="bg2">
-            <a:lumMod val="40000"/>
-            <a:lumOff val="60000"/>
-          </a:schemeClr>
+          <a:schemeClr val="accent1"/>
         </a:buClr>
         <a:buSzPct val="80000"/>
         <a:buFont typeface="Wingdings 3" charset="2"/>
@@ -19935,7 +19881,7 @@
           <a:cs typeface="+mj-cs"/>
         </a:defRPr>
       </a:lvl8pPr>
-      <a:lvl9pPr marL="3886264" indent="-228604" algn="l" defTabSz="457207" rtl="0" eaLnBrk="1" latinLnBrk="0" hangingPunct="1">
+      <a:lvl9pPr marL="3886200" indent="-228600" algn="l" defTabSz="457200" rtl="0" eaLnBrk="1" latinLnBrk="0" hangingPunct="1">
         <a:spcBef>
           <a:spcPts val="1000"/>
         </a:spcBef>
@@ -19943,10 +19889,7 @@
           <a:spcPts val="0"/>
         </a:spcAft>
         <a:buClr>
-          <a:schemeClr val="bg2">
-            <a:lumMod val="40000"/>
-            <a:lumOff val="60000"/>
-          </a:schemeClr>
+          <a:schemeClr val="accent1"/>
         </a:buClr>
         <a:buSzPct val="80000"/>
         <a:buFont typeface="Wingdings 3" charset="2"/>
@@ -19965,7 +19908,7 @@
       <a:defPPr>
         <a:defRPr lang="en-US"/>
       </a:defPPr>
-      <a:lvl1pPr marL="0" algn="l" defTabSz="457207" rtl="0" eaLnBrk="1" latinLnBrk="0" hangingPunct="1">
+      <a:lvl1pPr marL="0" algn="l" defTabSz="457200" rtl="0" eaLnBrk="1" latinLnBrk="0" hangingPunct="1">
         <a:defRPr sz="1800" kern="1200">
           <a:solidFill>
             <a:schemeClr val="tx1"/>
@@ -19975,7 +19918,7 @@
           <a:cs typeface="+mn-cs"/>
         </a:defRPr>
       </a:lvl1pPr>
-      <a:lvl2pPr marL="457207" algn="l" defTabSz="457207" rtl="0" eaLnBrk="1" latinLnBrk="0" hangingPunct="1">
+      <a:lvl2pPr marL="457200" algn="l" defTabSz="457200" rtl="0" eaLnBrk="1" latinLnBrk="0" hangingPunct="1">
         <a:defRPr sz="1800" kern="1200">
           <a:solidFill>
             <a:schemeClr val="tx1"/>
@@ -19985,7 +19928,7 @@
           <a:cs typeface="+mn-cs"/>
         </a:defRPr>
       </a:lvl2pPr>
-      <a:lvl3pPr marL="914415" algn="l" defTabSz="457207" rtl="0" eaLnBrk="1" latinLnBrk="0" hangingPunct="1">
+      <a:lvl3pPr marL="914400" algn="l" defTabSz="457200" rtl="0" eaLnBrk="1" latinLnBrk="0" hangingPunct="1">
         <a:defRPr sz="1800" kern="1200">
           <a:solidFill>
             <a:schemeClr val="tx1"/>
@@ -19995,7 +19938,7 @@
           <a:cs typeface="+mn-cs"/>
         </a:defRPr>
       </a:lvl3pPr>
-      <a:lvl4pPr marL="1371622" algn="l" defTabSz="457207" rtl="0" eaLnBrk="1" latinLnBrk="0" hangingPunct="1">
+      <a:lvl4pPr marL="1371600" algn="l" defTabSz="457200" rtl="0" eaLnBrk="1" latinLnBrk="0" hangingPunct="1">
         <a:defRPr sz="1800" kern="1200">
           <a:solidFill>
             <a:schemeClr val="tx1"/>
@@ -20005,7 +19948,7 @@
           <a:cs typeface="+mn-cs"/>
         </a:defRPr>
       </a:lvl4pPr>
-      <a:lvl5pPr marL="1828831" algn="l" defTabSz="457207" rtl="0" eaLnBrk="1" latinLnBrk="0" hangingPunct="1">
+      <a:lvl5pPr marL="1828800" algn="l" defTabSz="457200" rtl="0" eaLnBrk="1" latinLnBrk="0" hangingPunct="1">
         <a:defRPr sz="1800" kern="1200">
           <a:solidFill>
             <a:schemeClr val="tx1"/>
@@ -20015,7 +19958,7 @@
           <a:cs typeface="+mn-cs"/>
         </a:defRPr>
       </a:lvl5pPr>
-      <a:lvl6pPr marL="2286038" algn="l" defTabSz="457207" rtl="0" eaLnBrk="1" latinLnBrk="0" hangingPunct="1">
+      <a:lvl6pPr marL="2286000" algn="l" defTabSz="457200" rtl="0" eaLnBrk="1" latinLnBrk="0" hangingPunct="1">
         <a:defRPr sz="1800" kern="1200">
           <a:solidFill>
             <a:schemeClr val="tx1"/>
@@ -20025,7 +19968,7 @@
           <a:cs typeface="+mn-cs"/>
         </a:defRPr>
       </a:lvl6pPr>
-      <a:lvl7pPr marL="2743246" algn="l" defTabSz="457207" rtl="0" eaLnBrk="1" latinLnBrk="0" hangingPunct="1">
+      <a:lvl7pPr marL="2743200" algn="l" defTabSz="457200" rtl="0" eaLnBrk="1" latinLnBrk="0" hangingPunct="1">
         <a:defRPr sz="1800" kern="1200">
           <a:solidFill>
             <a:schemeClr val="tx1"/>
@@ -20035,7 +19978,7 @@
           <a:cs typeface="+mn-cs"/>
         </a:defRPr>
       </a:lvl7pPr>
-      <a:lvl8pPr marL="3200453" algn="l" defTabSz="457207" rtl="0" eaLnBrk="1" latinLnBrk="0" hangingPunct="1">
+      <a:lvl8pPr marL="3200400" algn="l" defTabSz="457200" rtl="0" eaLnBrk="1" latinLnBrk="0" hangingPunct="1">
         <a:defRPr sz="1800" kern="1200">
           <a:solidFill>
             <a:schemeClr val="tx1"/>
@@ -20045,7 +19988,7 @@
           <a:cs typeface="+mn-cs"/>
         </a:defRPr>
       </a:lvl8pPr>
-      <a:lvl9pPr marL="3657661" algn="l" defTabSz="457207" rtl="0" eaLnBrk="1" latinLnBrk="0" hangingPunct="1">
+      <a:lvl9pPr marL="3657600" algn="l" defTabSz="457200" rtl="0" eaLnBrk="1" latinLnBrk="0" hangingPunct="1">
         <a:defRPr sz="1800" kern="1200">
           <a:solidFill>
             <a:schemeClr val="tx1"/>
@@ -20079,14 +20022,61 @@
       </p:grpSpPr>
       <p:sp>
         <p:nvSpPr>
+          <p:cNvPr id="2" name="CuadroTexto 1"/>
+          <p:cNvSpPr txBox="1"/>
+          <p:nvPr/>
+        </p:nvSpPr>
+        <p:spPr>
+          <a:xfrm>
+            <a:off x="1691680" y="620688"/>
+            <a:ext cx="6020396" cy="523220"/>
+          </a:xfrm>
+          <a:prstGeom prst="rect">
+            <a:avLst/>
+          </a:prstGeom>
+          <a:noFill/>
+        </p:spPr>
+        <p:txBody>
+          <a:bodyPr wrap="square" rtlCol="0">
+            <a:spAutoFit/>
+          </a:bodyPr>
+          <a:lstStyle/>
+          <a:p>
+            <a:pPr algn="ctr"/>
+            <a:r>
+              <a:rPr lang="es-PA" sz="2800" b="1" dirty="0" smtClean="0">
+                <a:solidFill>
+                  <a:prstClr val="white"/>
+                </a:solidFill>
+              </a:rPr>
+              <a:t>RETROSPECTIVA DEL SPRINT </a:t>
+            </a:r>
+            <a:r>
+              <a:rPr lang="es-PA" sz="2800" b="1" dirty="0" smtClean="0">
+                <a:solidFill>
+                  <a:prstClr val="white"/>
+                </a:solidFill>
+              </a:rPr>
+              <a:t>1</a:t>
+            </a:r>
+            <a:endParaRPr lang="en-US" sz="2800" b="1" dirty="0">
+              <a:solidFill>
+                <a:prstClr val="white"/>
+              </a:solidFill>
+            </a:endParaRPr>
+          </a:p>
+        </p:txBody>
+      </p:sp>
+      <p:sp>
+        <p:nvSpPr>
           <p:cNvPr id="3" name="CuadroTexto 1"/>
           <p:cNvSpPr txBox="1"/>
           <p:nvPr/>
         </p:nvSpPr>
         <p:spPr>
           <a:xfrm>
-            <a:off x="1691680" y="2060848"/>
-            <a:ext cx="6020396" cy="954107"/>
+            <a:off x="1403648" y="4293096"/>
+            <a:ext cx="6020396" cy="1384995"/>
           </a:xfrm>
           <a:prstGeom prst="rect">
             <a:avLst/>
@@ -20106,160 +20096,23 @@
                   <a:prstClr val="white"/>
                 </a:solidFill>
               </a:rPr>
-              <a:t>Tutor virtual de lectura critica</a:t>
+              <a:t>TUTOR VIRTUAL DE LECTURA CRITICA</a:t>
             </a:r>
           </a:p>
           <a:p>
             <a:pPr algn="ctr"/>
             <a:r>
-              <a:rPr lang="es-PA" sz="2800" b="1" dirty="0">
+              <a:rPr lang="es-PA" sz="2800" b="1" dirty="0" smtClean="0">
                 <a:solidFill>
                   <a:prstClr val="white"/>
                 </a:solidFill>
               </a:rPr>
-              <a:t>30/09/2025</a:t>
-            </a:r>
-          </a:p>
-        </p:txBody>
-      </p:sp>
-      <p:sp>
-        <p:nvSpPr>
-          <p:cNvPr id="4" name="Rectángulo 3">
-            <a:extLst>
-              <a:ext uri="{FF2B5EF4-FFF2-40B4-BE49-F238E27FC236}">
-                <a16:creationId xmlns:a16="http://schemas.microsoft.com/office/drawing/2014/main" id="{8DA7E6B0-BFF1-4805-B0BB-81BE3E00C3E5}"/>
-              </a:ext>
-            </a:extLst>
-          </p:cNvPr>
-          <p:cNvSpPr/>
-          <p:nvPr/>
-        </p:nvSpPr>
-        <p:spPr>
-          <a:xfrm>
-            <a:off x="1547664" y="3429000"/>
-            <a:ext cx="6480720" cy="2592288"/>
-          </a:xfrm>
-          <a:prstGeom prst="rect">
-            <a:avLst/>
-          </a:prstGeom>
-        </p:spPr>
-        <p:style>
-          <a:lnRef idx="2">
-            <a:schemeClr val="accent1">
-              <a:shade val="50000"/>
-            </a:schemeClr>
-          </a:lnRef>
-          <a:fillRef idx="1">
-            <a:schemeClr val="accent1"/>
-          </a:fillRef>
-          <a:effectRef idx="0">
-            <a:schemeClr val="accent1"/>
-          </a:effectRef>
-          <a:fontRef idx="minor">
-            <a:schemeClr val="lt1"/>
-          </a:fontRef>
-        </p:style>
-        <p:txBody>
-          <a:bodyPr rtlCol="0" anchor="ctr"/>
-          <a:lstStyle/>
-          <a:p>
-            <a:pPr algn="ctr"/>
-            <a:r>
-              <a:rPr lang="es-MX" dirty="0"/>
-              <a:t>NARVAEZ OJEDA, Carlos Andres</a:t>
-            </a:r>
-          </a:p>
-          <a:p>
-            <a:pPr algn="ctr"/>
-            <a:r>
-              <a:rPr lang="es-MX" dirty="0"/>
-              <a:t>TOVAR PAYANO, Diego Marc</a:t>
-            </a:r>
-          </a:p>
-          <a:p>
-            <a:pPr algn="ctr"/>
-            <a:r>
-              <a:rPr lang="es-MX" dirty="0"/>
-              <a:t>TORRES SANABRIA, Britney</a:t>
-            </a:r>
-          </a:p>
-          <a:p>
-            <a:pPr algn="ctr"/>
-            <a:r>
-              <a:rPr lang="es-MX" dirty="0"/>
-              <a:t>HERMOZA VILLAVICENCIO, Nicolas Fisher</a:t>
-            </a:r>
-          </a:p>
-          <a:p>
-            <a:pPr algn="ctr"/>
-            <a:r>
-              <a:rPr lang="es-MX" dirty="0"/>
-              <a:t>ALEJANDRO PAUCARCHUCO, Carlos Enrique</a:t>
-            </a:r>
-          </a:p>
-          <a:p>
-            <a:pPr algn="ctr"/>
-            <a:endParaRPr lang="es-PE" dirty="0"/>
-          </a:p>
-        </p:txBody>
-      </p:sp>
-      <p:sp>
-        <p:nvSpPr>
-          <p:cNvPr id="5" name="Rectángulo 4">
-            <a:extLst>
-              <a:ext uri="{FF2B5EF4-FFF2-40B4-BE49-F238E27FC236}">
-                <a16:creationId xmlns:a16="http://schemas.microsoft.com/office/drawing/2014/main" id="{86155FD0-F035-4306-8F9E-3B7F56C90033}"/>
-              </a:ext>
-            </a:extLst>
-          </p:cNvPr>
-          <p:cNvSpPr/>
-          <p:nvPr/>
-        </p:nvSpPr>
-        <p:spPr>
-          <a:xfrm>
-            <a:off x="274990" y="332656"/>
-            <a:ext cx="8594019" cy="769441"/>
-          </a:xfrm>
-          <a:prstGeom prst="rect">
-            <a:avLst/>
-          </a:prstGeom>
-          <a:noFill/>
-        </p:spPr>
-        <p:txBody>
-          <a:bodyPr wrap="none" lIns="91440" tIns="45720" rIns="91440" bIns="45720">
-            <a:spAutoFit/>
-          </a:bodyPr>
-          <a:lstStyle/>
-          <a:p>
-            <a:pPr algn="ctr"/>
-            <a:r>
-              <a:rPr lang="es-PA" sz="4400" b="1" cap="none" spc="50" dirty="0">
-                <a:ln w="0"/>
-                <a:solidFill>
-                  <a:srgbClr val="FFFF00"/>
-                </a:solidFill>
-                <a:effectLst>
-                  <a:innerShdw blurRad="63500" dist="50800" dir="13500000">
-                    <a:srgbClr val="000000">
-                      <a:alpha val="50000"/>
-                    </a:srgbClr>
-                  </a:innerShdw>
-                </a:effectLst>
-              </a:rPr>
-              <a:t>RETROSPECTIVA DEL SPRINT 1-2</a:t>
-            </a:r>
-            <a:endParaRPr lang="es-PE" sz="4400" b="1" cap="none" spc="50" dirty="0">
-              <a:ln w="0"/>
+              <a:t>06/10/2025</a:t>
+            </a:r>
+            <a:endParaRPr lang="es-PA" sz="2800" b="1" dirty="0">
               <a:solidFill>
-                <a:srgbClr val="FFFF00"/>
+                <a:prstClr val="white"/>
               </a:solidFill>
-              <a:effectLst>
-                <a:innerShdw blurRad="63500" dist="50800" dir="13500000">
-                  <a:srgbClr val="000000">
-                    <a:alpha val="50000"/>
-                  </a:srgbClr>
-                </a:innerShdw>
-              </a:effectLst>
             </a:endParaRPr>
           </a:p>
         </p:txBody>
@@ -20268,6 +20121,161 @@
     <p:extLst>
       <p:ext uri="{BB962C8B-B14F-4D97-AF65-F5344CB8AC3E}">
         <p14:creationId xmlns:p14="http://schemas.microsoft.com/office/powerpoint/2010/main" val="2558260114"/>
+      </p:ext>
+    </p:extLst>
+  </p:cSld>
+  <p:clrMapOvr>
+    <a:masterClrMapping/>
+  </p:clrMapOvr>
+  <p:timing>
+    <p:tnLst>
+      <p:par>
+        <p:cTn id="1" dur="indefinite" restart="never" nodeType="tmRoot"/>
+      </p:par>
+    </p:tnLst>
+  </p:timing>
+</p:sld>
+</file>
+
+<file path=ppt/slides/slide10.xml><?xml version="1.0" encoding="utf-8"?>
+<p:sld xmlns:a="http://schemas.openxmlformats.org/drawingml/2006/main" xmlns:r="http://schemas.openxmlformats.org/officeDocument/2006/relationships" xmlns:p="http://schemas.openxmlformats.org/presentationml/2006/main">
+  <p:cSld>
+    <p:spTree>
+      <p:nvGrpSpPr>
+        <p:cNvPr id="1" name=""/>
+        <p:cNvGrpSpPr/>
+        <p:nvPr/>
+      </p:nvGrpSpPr>
+      <p:grpSpPr>
+        <a:xfrm>
+          <a:off x="0" y="0"/>
+          <a:ext cx="0" cy="0"/>
+          <a:chOff x="0" y="0"/>
+          <a:chExt cx="0" cy="0"/>
+        </a:xfrm>
+      </p:grpSpPr>
+      <p:sp>
+        <p:nvSpPr>
+          <p:cNvPr id="2" name="Título 1"/>
+          <p:cNvSpPr>
+            <a:spLocks noGrp="1"/>
+          </p:cNvSpPr>
+          <p:nvPr>
+            <p:ph type="title"/>
+          </p:nvPr>
+        </p:nvSpPr>
+        <p:spPr/>
+        <p:txBody>
+          <a:bodyPr/>
+          <a:lstStyle/>
+          <a:p>
+            <a:r>
+              <a:rPr lang="en-US" dirty="0" err="1"/>
+              <a:t>Acciones</a:t>
+            </a:r>
+            <a:r>
+              <a:rPr lang="en-US" dirty="0"/>
+              <a:t> a </a:t>
+            </a:r>
+            <a:r>
+              <a:rPr lang="en-US" dirty="0" err="1"/>
+              <a:t>realizar</a:t>
+            </a:r>
+            <a:endParaRPr lang="en-US" dirty="0"/>
+          </a:p>
+        </p:txBody>
+      </p:sp>
+      <p:sp>
+        <p:nvSpPr>
+          <p:cNvPr id="3" name="Marcador de contenido 2"/>
+          <p:cNvSpPr>
+            <a:spLocks noGrp="1"/>
+          </p:cNvSpPr>
+          <p:nvPr>
+            <p:ph idx="1"/>
+          </p:nvPr>
+        </p:nvSpPr>
+        <p:spPr/>
+        <p:txBody>
+          <a:bodyPr/>
+          <a:lstStyle/>
+          <a:p>
+            <a:r>
+              <a:rPr lang="es-MX" dirty="0"/>
+              <a:t>Implementar revisión cruzada de código (peer </a:t>
+            </a:r>
+            <a:r>
+              <a:rPr lang="es-MX" dirty="0" err="1"/>
+              <a:t>review</a:t>
+            </a:r>
+            <a:r>
+              <a:rPr lang="es-MX" dirty="0" smtClean="0"/>
+              <a:t>).</a:t>
+            </a:r>
+          </a:p>
+          <a:p>
+            <a:r>
+              <a:rPr lang="es-MX" dirty="0" smtClean="0"/>
+              <a:t>Definir </a:t>
+            </a:r>
+            <a:r>
+              <a:rPr lang="es-MX" dirty="0"/>
+              <a:t>métricas de avance para cada </a:t>
+            </a:r>
+            <a:r>
+              <a:rPr lang="es-MX" dirty="0" err="1"/>
+              <a:t>Epic</a:t>
+            </a:r>
+            <a:r>
+              <a:rPr lang="es-MX" dirty="0" smtClean="0"/>
+              <a:t>.</a:t>
+            </a:r>
+          </a:p>
+          <a:p>
+            <a:r>
+              <a:rPr lang="es-MX" dirty="0" smtClean="0"/>
+              <a:t>Planificar </a:t>
+            </a:r>
+            <a:r>
+              <a:rPr lang="es-MX" dirty="0"/>
+              <a:t>demos más cortas y enfocadas</a:t>
+            </a:r>
+            <a:r>
+              <a:rPr lang="es-MX" dirty="0" smtClean="0"/>
+              <a:t>.</a:t>
+            </a:r>
+          </a:p>
+          <a:p>
+            <a:r>
+              <a:rPr lang="es-MX" dirty="0" smtClean="0"/>
+              <a:t>Capacitar </a:t>
+            </a:r>
+            <a:r>
+              <a:rPr lang="es-MX" dirty="0"/>
+              <a:t>al equipo en pruebas automatizadas</a:t>
+            </a:r>
+            <a:r>
+              <a:rPr lang="es-MX" dirty="0" smtClean="0"/>
+              <a:t>.</a:t>
+            </a:r>
+          </a:p>
+          <a:p>
+            <a:r>
+              <a:rPr lang="es-MX" dirty="0" smtClean="0"/>
+              <a:t>Evaluar </a:t>
+            </a:r>
+            <a:r>
+              <a:rPr lang="es-MX" dirty="0"/>
+              <a:t>mejoras en la UX del módulo de estudiante.</a:t>
+            </a:r>
+            <a:endParaRPr lang="en-US" dirty="0"/>
+          </a:p>
+        </p:txBody>
+      </p:sp>
+    </p:spTree>
+    <p:extLst>
+      <p:ext uri="{BB962C8B-B14F-4D97-AF65-F5344CB8AC3E}">
+        <p14:creationId xmlns:p14="http://schemas.microsoft.com/office/powerpoint/2010/main" val="3185372345"/>
       </p:ext>
     </p:extLst>
   </p:cSld>
@@ -20296,100 +20304,14 @@
       </p:grpSpPr>
       <p:sp>
         <p:nvSpPr>
-          <p:cNvPr id="2" name="Rectángulo: esquinas superiores redondeadas 1">
-            <a:extLst>
-              <a:ext uri="{FF2B5EF4-FFF2-40B4-BE49-F238E27FC236}">
-                <a16:creationId xmlns:a16="http://schemas.microsoft.com/office/drawing/2014/main" id="{78109768-5060-44EF-977C-4E7F4F835128}"/>
-              </a:ext>
-            </a:extLst>
-          </p:cNvPr>
-          <p:cNvSpPr/>
+          <p:cNvPr id="2" name="TextBox 1"/>
+          <p:cNvSpPr txBox="1"/>
           <p:nvPr/>
         </p:nvSpPr>
         <p:spPr>
           <a:xfrm>
-            <a:off x="611560" y="1052736"/>
-            <a:ext cx="7920880" cy="4968552"/>
-          </a:xfrm>
-          <a:prstGeom prst="round2SameRect">
-            <a:avLst/>
-          </a:prstGeom>
-        </p:spPr>
-        <p:style>
-          <a:lnRef idx="2">
-            <a:schemeClr val="accent1">
-              <a:shade val="50000"/>
-            </a:schemeClr>
-          </a:lnRef>
-          <a:fillRef idx="1">
-            <a:schemeClr val="accent1"/>
-          </a:fillRef>
-          <a:effectRef idx="0">
-            <a:schemeClr val="accent1"/>
-          </a:effectRef>
-          <a:fontRef idx="minor">
-            <a:schemeClr val="lt1"/>
-          </a:fontRef>
-        </p:style>
-        <p:txBody>
-          <a:bodyPr rtlCol="0" anchor="ctr"/>
-          <a:lstStyle/>
-          <a:p>
-            <a:pPr algn="just"/>
-            <a:endParaRPr lang="es-PA" sz="1800" dirty="0"/>
-          </a:p>
-          <a:p>
-            <a:pPr algn="just"/>
-            <a:r>
-              <a:rPr lang="es-MX" sz="1800" dirty="0"/>
-              <a:t>Identificación de las principales dificultades de los estudiantes en la lectura crítica.</a:t>
-            </a:r>
-          </a:p>
-          <a:p>
-            <a:pPr algn="just"/>
-            <a:endParaRPr lang="es-MX" sz="1800" dirty="0"/>
-          </a:p>
-          <a:p>
-            <a:pPr algn="just"/>
-            <a:r>
-              <a:rPr lang="es-MX" sz="1800" dirty="0"/>
-              <a:t>Importancia de la retroalimentación inmediata en la comprensión de textos.</a:t>
-            </a:r>
-          </a:p>
-          <a:p>
-            <a:pPr algn="just"/>
-            <a:endParaRPr lang="es-MX" sz="1800" dirty="0"/>
-          </a:p>
-          <a:p>
-            <a:pPr algn="just"/>
-            <a:r>
-              <a:rPr lang="es-MX" sz="1800" dirty="0"/>
-              <a:t>Valor de la tecnología como apoyo al aprendizaje autónomo.</a:t>
-            </a:r>
-            <a:endParaRPr lang="es-PA" sz="1800" dirty="0"/>
-          </a:p>
-          <a:p>
-            <a:pPr algn="ctr"/>
-            <a:endParaRPr lang="es-PE" dirty="0"/>
-          </a:p>
-        </p:txBody>
-      </p:sp>
-      <p:sp>
-        <p:nvSpPr>
-          <p:cNvPr id="5" name="Rectángulo 4">
-            <a:extLst>
-              <a:ext uri="{FF2B5EF4-FFF2-40B4-BE49-F238E27FC236}">
-                <a16:creationId xmlns:a16="http://schemas.microsoft.com/office/drawing/2014/main" id="{618DE562-353A-4C14-9B59-8D0C3B25B912}"/>
-              </a:ext>
-            </a:extLst>
-          </p:cNvPr>
-          <p:cNvSpPr/>
-          <p:nvPr/>
-        </p:nvSpPr>
-        <p:spPr>
-          <a:xfrm>
-            <a:off x="1411519" y="1268760"/>
-            <a:ext cx="6320961" cy="923330"/>
+            <a:off x="467544" y="1412776"/>
+            <a:ext cx="4395755" cy="3262432"/>
           </a:xfrm>
           <a:prstGeom prst="rect">
             <a:avLst/>
@@ -20397,54 +20319,135 @@
           <a:noFill/>
         </p:spPr>
         <p:txBody>
-          <a:bodyPr wrap="none" lIns="91440" tIns="45720" rIns="91440" bIns="45720">
+          <a:bodyPr wrap="none" rtlCol="0">
             <a:spAutoFit/>
           </a:bodyPr>
           <a:lstStyle/>
           <a:p>
-            <a:pPr algn="ctr"/>
-            <a:r>
-              <a:rPr lang="es-PA" sz="5400" b="1" cap="none" spc="50" dirty="0">
-                <a:ln w="0"/>
-                <a:solidFill>
-                  <a:srgbClr val="FFFF00"/>
-                </a:solidFill>
-                <a:effectLst>
-                  <a:innerShdw blurRad="63500" dist="50800" dir="13500000">
-                    <a:srgbClr val="000000">
-                      <a:alpha val="50000"/>
-                    </a:srgbClr>
-                  </a:innerShdw>
-                </a:effectLst>
-              </a:rPr>
-              <a:t>Qué aprendimos?</a:t>
-            </a:r>
-            <a:endParaRPr lang="es-PE" sz="5400" b="1" cap="none" spc="50" dirty="0">
-              <a:ln w="0"/>
-              <a:solidFill>
-                <a:srgbClr val="FFFF00"/>
-              </a:solidFill>
-              <a:effectLst>
-                <a:innerShdw blurRad="63500" dist="50800" dir="13500000">
-                  <a:srgbClr val="000000">
-                    <a:alpha val="50000"/>
-                  </a:srgbClr>
-                </a:innerShdw>
-              </a:effectLst>
-            </a:endParaRPr>
+            <a:r>
+              <a:rPr lang="es-PA" sz="2800" b="1" dirty="0" smtClean="0"/>
+              <a:t>AGENDA</a:t>
+            </a:r>
+          </a:p>
+          <a:p>
+            <a:endParaRPr lang="es-PA" dirty="0"/>
+          </a:p>
+          <a:p>
+            <a:pPr marL="342900" indent="-342900">
+              <a:buFont typeface="Arial" panose="020B0604020202020204" pitchFamily="34" charset="0"/>
+              <a:buChar char="•"/>
+            </a:pPr>
+            <a:r>
+              <a:rPr lang="es-PA" sz="2000" dirty="0" smtClean="0"/>
+              <a:t>¿Qué </a:t>
+            </a:r>
+            <a:r>
+              <a:rPr lang="es-PA" sz="2000" dirty="0"/>
+              <a:t>aprendimos?</a:t>
+            </a:r>
+          </a:p>
+          <a:p>
+            <a:pPr marL="342900" indent="-342900">
+              <a:buFont typeface="Arial" panose="020B0604020202020204" pitchFamily="34" charset="0"/>
+              <a:buChar char="•"/>
+            </a:pPr>
+            <a:r>
+              <a:rPr lang="es-PA" sz="2000" dirty="0" smtClean="0"/>
+              <a:t>¿Qué </a:t>
+            </a:r>
+            <a:r>
+              <a:rPr lang="es-PA" sz="2000" dirty="0"/>
+              <a:t>estamos haciendo bien?</a:t>
+            </a:r>
+          </a:p>
+          <a:p>
+            <a:pPr marL="342900" indent="-342900">
+              <a:buFont typeface="Arial" panose="020B0604020202020204" pitchFamily="34" charset="0"/>
+              <a:buChar char="•"/>
+            </a:pPr>
+            <a:r>
+              <a:rPr lang="es-PA" sz="2000" dirty="0" smtClean="0"/>
+              <a:t>¿Qué </a:t>
+            </a:r>
+            <a:r>
+              <a:rPr lang="es-PA" sz="2000" dirty="0"/>
+              <a:t>podemos hacer mejor?</a:t>
+            </a:r>
+          </a:p>
+          <a:p>
+            <a:pPr marL="800100" lvl="1" indent="-342900">
+              <a:buFont typeface="Arial" panose="020B0604020202020204" pitchFamily="34" charset="0"/>
+              <a:buChar char="•"/>
+            </a:pPr>
+            <a:r>
+              <a:rPr lang="es-PA" sz="2000" dirty="0"/>
+              <a:t>Personas</a:t>
+            </a:r>
+          </a:p>
+          <a:p>
+            <a:pPr marL="800100" lvl="1" indent="-342900">
+              <a:buFont typeface="Arial" panose="020B0604020202020204" pitchFamily="34" charset="0"/>
+              <a:buChar char="•"/>
+            </a:pPr>
+            <a:r>
+              <a:rPr lang="es-PA" sz="2000" dirty="0"/>
+              <a:t>Relaciones</a:t>
+            </a:r>
+          </a:p>
+          <a:p>
+            <a:pPr marL="800100" lvl="1" indent="-342900">
+              <a:buFont typeface="Arial" panose="020B0604020202020204" pitchFamily="34" charset="0"/>
+              <a:buChar char="•"/>
+            </a:pPr>
+            <a:r>
+              <a:rPr lang="es-PA" sz="2000" dirty="0"/>
+              <a:t>Procesos</a:t>
+            </a:r>
+          </a:p>
+          <a:p>
+            <a:pPr marL="800100" lvl="1" indent="-342900">
+              <a:buFont typeface="Arial" panose="020B0604020202020204" pitchFamily="34" charset="0"/>
+              <a:buChar char="•"/>
+            </a:pPr>
+            <a:r>
+              <a:rPr lang="es-PA" sz="2000" dirty="0"/>
+              <a:t>Herramientas</a:t>
+            </a:r>
+          </a:p>
+          <a:p>
+            <a:pPr marL="342900" indent="-342900">
+              <a:buFont typeface="Arial" panose="020B0604020202020204" pitchFamily="34" charset="0"/>
+              <a:buChar char="•"/>
+            </a:pPr>
+            <a:r>
+              <a:rPr lang="es-PA" sz="2000" dirty="0" smtClean="0"/>
+              <a:t>Acciones </a:t>
+            </a:r>
+            <a:r>
+              <a:rPr lang="es-PA" sz="2000" dirty="0"/>
+              <a:t>a realizar</a:t>
+            </a:r>
+            <a:endParaRPr lang="en-US" dirty="0"/>
           </a:p>
         </p:txBody>
       </p:sp>
     </p:spTree>
     <p:extLst>
       <p:ext uri="{BB962C8B-B14F-4D97-AF65-F5344CB8AC3E}">
-        <p14:creationId xmlns:p14="http://schemas.microsoft.com/office/powerpoint/2010/main" val="4054140450"/>
+        <p14:creationId xmlns:p14="http://schemas.microsoft.com/office/powerpoint/2010/main" val="2723424320"/>
       </p:ext>
     </p:extLst>
   </p:cSld>
   <p:clrMapOvr>
     <a:masterClrMapping/>
   </p:clrMapOvr>
+  <p:timing>
+    <p:tnLst>
+      <p:par>
+        <p:cTn id="1" dur="indefinite" restart="never" nodeType="tmRoot"/>
+      </p:par>
+    </p:tnLst>
+  </p:timing>
 </p:sld>
 </file>
 
@@ -20467,179 +20470,134 @@
       </p:grpSpPr>
       <p:sp>
         <p:nvSpPr>
-          <p:cNvPr id="2" name="Rectángulo: esquinas superiores redondeadas 1">
-            <a:extLst>
-              <a:ext uri="{FF2B5EF4-FFF2-40B4-BE49-F238E27FC236}">
-                <a16:creationId xmlns:a16="http://schemas.microsoft.com/office/drawing/2014/main" id="{18307EE6-9BF3-4888-9AE9-83BFE2982F3E}"/>
-              </a:ext>
-            </a:extLst>
-          </p:cNvPr>
-          <p:cNvSpPr/>
-          <p:nvPr/>
-        </p:nvSpPr>
-        <p:spPr>
-          <a:xfrm>
-            <a:off x="611560" y="1052736"/>
-            <a:ext cx="7920880" cy="4968552"/>
-          </a:xfrm>
-          <a:prstGeom prst="round2SameRect">
-            <a:avLst/>
-          </a:prstGeom>
-        </p:spPr>
-        <p:style>
-          <a:lnRef idx="2">
-            <a:schemeClr val="accent1">
-              <a:shade val="50000"/>
-            </a:schemeClr>
-          </a:lnRef>
-          <a:fillRef idx="1">
-            <a:schemeClr val="accent1"/>
-          </a:fillRef>
-          <a:effectRef idx="0">
-            <a:schemeClr val="accent1"/>
-          </a:effectRef>
-          <a:fontRef idx="minor">
-            <a:schemeClr val="lt1"/>
-          </a:fontRef>
-        </p:style>
-        <p:txBody>
-          <a:bodyPr rtlCol="0" anchor="ctr"/>
-          <a:lstStyle/>
-          <a:p>
-            <a:pPr algn="ctr"/>
-            <a:endParaRPr lang="es-PA" sz="1800" dirty="0"/>
-          </a:p>
-          <a:p>
-            <a:pPr algn="ctr"/>
-            <a:r>
-              <a:rPr lang="es-MX" sz="1800" dirty="0"/>
-              <a:t>Diseño de una plataforma interactiva que motiva a los estudiantes.</a:t>
-            </a:r>
-          </a:p>
-          <a:p>
-            <a:pPr algn="ctr"/>
-            <a:endParaRPr lang="es-MX" sz="1800" dirty="0"/>
-          </a:p>
-          <a:p>
-            <a:pPr algn="ctr"/>
-            <a:r>
-              <a:rPr lang="es-MX" sz="1800" dirty="0"/>
-              <a:t>Integración de ejercicios prácticos con diferentes niveles de dificultad.</a:t>
-            </a:r>
-          </a:p>
-          <a:p>
-            <a:pPr algn="ctr"/>
-            <a:endParaRPr lang="es-MX" sz="1800" dirty="0"/>
-          </a:p>
-          <a:p>
-            <a:pPr algn="ctr"/>
-            <a:r>
-              <a:rPr lang="es-MX" sz="1800" dirty="0"/>
-              <a:t>Uso de métricas para evaluar el progreso de los usuarios.</a:t>
-            </a:r>
-            <a:endParaRPr lang="es-PA" sz="1800" dirty="0"/>
-          </a:p>
-          <a:p>
-            <a:pPr algn="ctr"/>
-            <a:endParaRPr lang="es-PE" dirty="0"/>
-          </a:p>
-        </p:txBody>
-      </p:sp>
-      <p:sp>
-        <p:nvSpPr>
-          <p:cNvPr id="4" name="Rectángulo 3">
-            <a:extLst>
-              <a:ext uri="{FF2B5EF4-FFF2-40B4-BE49-F238E27FC236}">
-                <a16:creationId xmlns:a16="http://schemas.microsoft.com/office/drawing/2014/main" id="{3CA9D3EA-8447-4721-8809-C4808E59DF99}"/>
-              </a:ext>
-            </a:extLst>
-          </p:cNvPr>
-          <p:cNvSpPr/>
-          <p:nvPr/>
-        </p:nvSpPr>
-        <p:spPr>
-          <a:xfrm>
-            <a:off x="922649" y="878333"/>
-            <a:ext cx="7587533" cy="1754326"/>
+          <p:cNvPr id="2" name="Título 1"/>
+          <p:cNvSpPr>
+            <a:spLocks noGrp="1"/>
+          </p:cNvSpPr>
+          <p:nvPr>
+            <p:ph type="title"/>
+          </p:nvPr>
+        </p:nvSpPr>
+        <p:spPr/>
+        <p:txBody>
+          <a:bodyPr/>
+          <a:lstStyle/>
+          <a:p>
+            <a:pPr marL="342900" indent="-342900"/>
+            <a:r>
+              <a:rPr lang="es-PA" sz="4400" dirty="0" smtClean="0"/>
+              <a:t>¿Qué </a:t>
+            </a:r>
+            <a:r>
+              <a:rPr lang="es-PA" sz="4400" dirty="0"/>
+              <a:t>aprendimos?</a:t>
+            </a:r>
+          </a:p>
+        </p:txBody>
+      </p:sp>
+      <p:sp>
+        <p:nvSpPr>
+          <p:cNvPr id="4" name="Rectangle 1"/>
+          <p:cNvSpPr>
+            <a:spLocks noGrp="1" noChangeArrowheads="1"/>
+          </p:cNvSpPr>
+          <p:nvPr>
+            <p:ph idx="1"/>
+          </p:nvPr>
+        </p:nvSpPr>
+        <p:spPr bwMode="auto">
+          <a:xfrm>
+            <a:off x="683568" y="1484784"/>
+            <a:ext cx="7560840" cy="2631490"/>
           </a:xfrm>
           <a:prstGeom prst="rect">
             <a:avLst/>
           </a:prstGeom>
           <a:noFill/>
-        </p:spPr>
-        <p:txBody>
-          <a:bodyPr wrap="square" lIns="91440" tIns="45720" rIns="91440" bIns="45720">
+          <a:ln>
+            <a:noFill/>
+          </a:ln>
+          <a:effectLst/>
+          <a:extLst>
+            <a:ext uri="{909E8E84-426E-40DD-AFC4-6F175D3DCCD1}">
+              <a14:hiddenFill xmlns:a14="http://schemas.microsoft.com/office/drawing/2010/main">
+                <a:solidFill>
+                  <a:schemeClr val="accent1"/>
+                </a:solidFill>
+              </a14:hiddenFill>
+            </a:ext>
+            <a:ext uri="{91240B29-F687-4F45-9708-019B960494DF}">
+              <a14:hiddenLine xmlns:a14="http://schemas.microsoft.com/office/drawing/2010/main" w="9525">
+                <a:solidFill>
+                  <a:schemeClr val="tx1"/>
+                </a:solidFill>
+                <a:miter lim="800000"/>
+                <a:headEnd/>
+                <a:tailEnd/>
+              </a14:hiddenLine>
+            </a:ext>
+            <a:ext uri="{AF507438-7753-43E0-B8FC-AC1667EBCBE1}">
+              <a14:hiddenEffects xmlns:a14="http://schemas.microsoft.com/office/drawing/2010/main">
+                <a:effectLst>
+                  <a:outerShdw dist="35921" dir="2700000" algn="ctr" rotWithShape="0">
+                    <a:schemeClr val="bg2"/>
+                  </a:outerShdw>
+                </a:effectLst>
+              </a14:hiddenEffects>
+            </a:ext>
+          </a:extLst>
+        </p:spPr>
+        <p:txBody>
+          <a:bodyPr vert="horz" wrap="square" lIns="91440" tIns="45720" rIns="91440" bIns="45720" numCol="1" anchor="ctr" anchorCtr="0" compatLnSpc="1">
+            <a:prstTxWarp prst="textNoShape">
+              <a:avLst/>
+            </a:prstTxWarp>
             <a:spAutoFit/>
           </a:bodyPr>
           <a:lstStyle/>
           <a:p>
-            <a:pPr algn="ctr"/>
-            <a:r>
-              <a:rPr lang="es-PA" sz="5400" b="1" cap="none" spc="0" dirty="0">
-                <a:ln w="12700">
-                  <a:solidFill>
-                    <a:schemeClr val="accent3">
-                      <a:lumMod val="50000"/>
-                    </a:schemeClr>
-                  </a:solidFill>
-                  <a:prstDash val="solid"/>
-                </a:ln>
-                <a:pattFill prst="narHorz">
-                  <a:fgClr>
-                    <a:schemeClr val="accent3"/>
-                  </a:fgClr>
-                  <a:bgClr>
-                    <a:schemeClr val="accent3">
-                      <a:lumMod val="40000"/>
-                      <a:lumOff val="60000"/>
-                    </a:schemeClr>
-                  </a:bgClr>
-                </a:pattFill>
-                <a:effectLst>
-                  <a:innerShdw blurRad="177800">
-                    <a:schemeClr val="accent3">
-                      <a:lumMod val="50000"/>
-                    </a:schemeClr>
-                  </a:innerShdw>
-                </a:effectLst>
-              </a:rPr>
-              <a:t>Qué estamos haciendo bien?</a:t>
-            </a:r>
-            <a:endParaRPr lang="es-PE" sz="5400" b="1" cap="none" spc="0" dirty="0">
-              <a:ln w="12700">
-                <a:solidFill>
-                  <a:schemeClr val="accent3">
-                    <a:lumMod val="50000"/>
-                  </a:schemeClr>
-                </a:solidFill>
-                <a:prstDash val="solid"/>
-              </a:ln>
-              <a:pattFill prst="narHorz">
-                <a:fgClr>
-                  <a:schemeClr val="accent3"/>
-                </a:fgClr>
-                <a:bgClr>
-                  <a:schemeClr val="accent3">
-                    <a:lumMod val="40000"/>
-                    <a:lumOff val="60000"/>
-                  </a:schemeClr>
-                </a:bgClr>
-              </a:pattFill>
-              <a:effectLst>
-                <a:innerShdw blurRad="177800">
-                  <a:schemeClr val="accent3">
-                    <a:lumMod val="50000"/>
-                  </a:schemeClr>
-                </a:innerShdw>
-              </a:effectLst>
-            </a:endParaRPr>
+            <a:pPr fontAlgn="base"/>
+            <a:r>
+              <a:rPr lang="es-MX" altLang="en-US" dirty="0"/>
+              <a:t>Comprensión más clara de los roles (Estudiante, Docente, Administrador).</a:t>
+            </a:r>
+          </a:p>
+          <a:p>
+            <a:pPr fontAlgn="base"/>
+            <a:r>
+              <a:rPr lang="es-MX" altLang="en-US" dirty="0"/>
+              <a:t>Identificación de dependencias entre historias (por ejemplo, STU01 ↔ DOC01 ↔ ADM01).</a:t>
+            </a:r>
+          </a:p>
+          <a:p>
+            <a:pPr fontAlgn="base"/>
+            <a:r>
+              <a:rPr lang="es-MX" altLang="en-US" dirty="0"/>
+              <a:t>Priorización de historias según impacto y esfuerzo.</a:t>
+            </a:r>
+          </a:p>
+          <a:p>
+            <a:pPr fontAlgn="base"/>
+            <a:r>
+              <a:rPr lang="es-MX" altLang="en-US" dirty="0"/>
+              <a:t>Mejor gestión del </a:t>
+            </a:r>
+            <a:r>
+              <a:rPr lang="es-MX" altLang="en-US" dirty="0" err="1"/>
+              <a:t>backlog</a:t>
+            </a:r>
+            <a:r>
+              <a:rPr lang="es-MX" altLang="en-US" dirty="0"/>
+              <a:t> y definición de criterios de aceptación.</a:t>
+            </a:r>
+            <a:endParaRPr lang="en-US" altLang="en-US" dirty="0"/>
           </a:p>
         </p:txBody>
       </p:sp>
     </p:spTree>
     <p:extLst>
       <p:ext uri="{BB962C8B-B14F-4D97-AF65-F5344CB8AC3E}">
-        <p14:creationId xmlns:p14="http://schemas.microsoft.com/office/powerpoint/2010/main" val="1243100162"/>
+        <p14:creationId xmlns:p14="http://schemas.microsoft.com/office/powerpoint/2010/main" val="3416761775"/>
       </p:ext>
     </p:extLst>
   </p:cSld>
@@ -20668,139 +20626,104 @@
       </p:grpSpPr>
       <p:sp>
         <p:nvSpPr>
-          <p:cNvPr id="2" name="Rectángulo: esquinas superiores redondeadas 1">
-            <a:extLst>
-              <a:ext uri="{FF2B5EF4-FFF2-40B4-BE49-F238E27FC236}">
-                <a16:creationId xmlns:a16="http://schemas.microsoft.com/office/drawing/2014/main" id="{001CB2B7-50B8-4FE3-BF3E-917DF9792A7C}"/>
-              </a:ext>
-            </a:extLst>
-          </p:cNvPr>
-          <p:cNvSpPr/>
-          <p:nvPr/>
-        </p:nvSpPr>
-        <p:spPr>
-          <a:xfrm>
-            <a:off x="611560" y="1052736"/>
-            <a:ext cx="7920880" cy="4968552"/>
-          </a:xfrm>
-          <a:prstGeom prst="round2SameRect">
-            <a:avLst/>
-          </a:prstGeom>
-        </p:spPr>
-        <p:style>
-          <a:lnRef idx="2">
-            <a:schemeClr val="accent1">
-              <a:shade val="50000"/>
-            </a:schemeClr>
-          </a:lnRef>
-          <a:fillRef idx="1">
-            <a:schemeClr val="accent1"/>
-          </a:fillRef>
-          <a:effectRef idx="0">
-            <a:schemeClr val="accent1"/>
-          </a:effectRef>
-          <a:fontRef idx="minor">
-            <a:schemeClr val="lt1"/>
-          </a:fontRef>
-        </p:style>
-        <p:txBody>
-          <a:bodyPr rtlCol="0" anchor="ctr"/>
-          <a:lstStyle/>
-          <a:p>
-            <a:pPr marL="800100" lvl="1" indent="-342900">
-              <a:buFont typeface="Arial" panose="020B0604020202020204" pitchFamily="34" charset="0"/>
-              <a:buChar char="•"/>
-            </a:pPr>
-            <a:r>
-              <a:rPr lang="es-PA" sz="1800" dirty="0">
-                <a:solidFill>
-                  <a:srgbClr val="FFFF00"/>
-                </a:solidFill>
-              </a:rPr>
-              <a:t>Personas: </a:t>
-            </a:r>
+          <p:cNvPr id="2" name="Título 1"/>
+          <p:cNvSpPr>
+            <a:spLocks noGrp="1"/>
+          </p:cNvSpPr>
+          <p:nvPr>
+            <p:ph type="title"/>
+          </p:nvPr>
+        </p:nvSpPr>
+        <p:spPr/>
+        <p:txBody>
+          <a:bodyPr/>
+          <a:lstStyle/>
+          <a:p>
+            <a:pPr marL="342900" indent="-342900"/>
+            <a:r>
+              <a:rPr lang="es-PA" sz="4400" dirty="0"/>
+              <a:t>¿Qué estamos haciendo bien?</a:t>
+            </a:r>
+          </a:p>
+        </p:txBody>
+      </p:sp>
+      <p:sp>
+        <p:nvSpPr>
+          <p:cNvPr id="3" name="Marcador de contenido 2"/>
+          <p:cNvSpPr>
+            <a:spLocks noGrp="1"/>
+          </p:cNvSpPr>
+          <p:nvPr>
+            <p:ph idx="1"/>
+          </p:nvPr>
+        </p:nvSpPr>
+        <p:spPr/>
+        <p:txBody>
+          <a:bodyPr/>
+          <a:lstStyle/>
+          <a:p>
             <a:r>
               <a:rPr lang="es-MX" dirty="0"/>
-              <a:t>Capacitación continua para tutores y docentes en el uso del sistema.</a:t>
-            </a:r>
-          </a:p>
-          <a:p>
-            <a:pPr lvl="1"/>
-            <a:endParaRPr lang="es-PA" sz="1800" dirty="0">
-              <a:solidFill>
-                <a:srgbClr val="FFFF00"/>
-              </a:solidFill>
-            </a:endParaRPr>
-          </a:p>
-          <a:p>
-            <a:pPr marL="800100" lvl="1" indent="-342900">
-              <a:buFont typeface="Arial" panose="020B0604020202020204" pitchFamily="34" charset="0"/>
-              <a:buChar char="•"/>
-            </a:pPr>
-            <a:r>
-              <a:rPr lang="es-PA" sz="1800" dirty="0">
-                <a:solidFill>
-                  <a:srgbClr val="FFFF00"/>
-                </a:solidFill>
-              </a:rPr>
-              <a:t>Relaciones: </a:t>
+              <a:t>Comunicación fluida entre desarrolladores y analistas</a:t>
+            </a:r>
+            <a:r>
+              <a:rPr lang="es-MX" dirty="0" smtClean="0"/>
+              <a:t>.</a:t>
+            </a:r>
+          </a:p>
+          <a:p>
+            <a:r>
+              <a:rPr lang="es-MX" dirty="0" smtClean="0"/>
+              <a:t>Historias </a:t>
             </a:r>
             <a:r>
               <a:rPr lang="es-MX" dirty="0"/>
-              <a:t>Mayor interacción entre estudiantes, docentes y el tutor virtual. </a:t>
-            </a:r>
-          </a:p>
-          <a:p>
-            <a:pPr lvl="1"/>
-            <a:endParaRPr lang="es-PA" sz="1800" dirty="0"/>
-          </a:p>
-          <a:p>
-            <a:pPr marL="800100" lvl="1" indent="-342900">
-              <a:buFont typeface="Arial" panose="020B0604020202020204" pitchFamily="34" charset="0"/>
-              <a:buChar char="•"/>
-            </a:pPr>
-            <a:r>
-              <a:rPr lang="es-PA" sz="1800" dirty="0">
-                <a:solidFill>
-                  <a:srgbClr val="FFFF00"/>
-                </a:solidFill>
-              </a:rPr>
-              <a:t>Procesos: </a:t>
+              <a:t>de usuario bien redactadas y completas (con criterios de aceptación claros</a:t>
+            </a:r>
+            <a:r>
+              <a:rPr lang="es-MX" dirty="0" smtClean="0"/>
+              <a:t>).</a:t>
+            </a:r>
+          </a:p>
+          <a:p>
+            <a:r>
+              <a:rPr lang="es-MX" dirty="0" smtClean="0"/>
+              <a:t>Entregas </a:t>
             </a:r>
             <a:r>
               <a:rPr lang="es-MX" dirty="0"/>
-              <a:t>Optimizar la metodología de evaluación y personalización del aprendizaje.</a:t>
-            </a:r>
-          </a:p>
-          <a:p>
-            <a:pPr lvl="1"/>
-            <a:endParaRPr lang="es-PA" sz="1800" dirty="0"/>
-          </a:p>
-          <a:p>
-            <a:pPr marL="800100" lvl="1" indent="-342900">
-              <a:buFont typeface="Arial" panose="020B0604020202020204" pitchFamily="34" charset="0"/>
-              <a:buChar char="•"/>
-            </a:pPr>
-            <a:r>
-              <a:rPr lang="es-PA" sz="1800" dirty="0"/>
-              <a:t>Herramientas: </a:t>
+              <a:t>incrementales estables al final de cada sprint</a:t>
+            </a:r>
+            <a:r>
+              <a:rPr lang="es-MX" dirty="0" smtClean="0"/>
+              <a:t>.</a:t>
+            </a:r>
+          </a:p>
+          <a:p>
+            <a:r>
+              <a:rPr lang="es-MX" dirty="0" smtClean="0"/>
+              <a:t>Validación </a:t>
             </a:r>
             <a:r>
               <a:rPr lang="es-MX" dirty="0"/>
-              <a:t>Incorporar más recursos digitales (videos, infografías, simulaciones interactivas).</a:t>
-            </a:r>
-            <a:endParaRPr lang="es-PA" sz="1800" dirty="0"/>
-          </a:p>
-          <a:p>
-            <a:pPr algn="ctr"/>
-            <a:endParaRPr lang="es-PE" dirty="0"/>
+              <a:t>temprana con usuarios simulados (</a:t>
+            </a:r>
+            <a:r>
+              <a:rPr lang="es-MX" dirty="0" err="1"/>
+              <a:t>tests</a:t>
+            </a:r>
+            <a:r>
+              <a:rPr lang="es-MX" dirty="0"/>
+              <a:t> funcionales).</a:t>
+            </a:r>
+            <a:endParaRPr lang="en-US" dirty="0"/>
           </a:p>
         </p:txBody>
       </p:sp>
     </p:spTree>
     <p:extLst>
       <p:ext uri="{BB962C8B-B14F-4D97-AF65-F5344CB8AC3E}">
-        <p14:creationId xmlns:p14="http://schemas.microsoft.com/office/powerpoint/2010/main" val="3702318491"/>
+        <p14:creationId xmlns:p14="http://schemas.microsoft.com/office/powerpoint/2010/main" val="4185944103"/>
       </p:ext>
     </p:extLst>
   </p:cSld>
@@ -20829,159 +20752,631 @@
       </p:grpSpPr>
       <p:sp>
         <p:nvSpPr>
-          <p:cNvPr id="4" name="Rectángulo: esquinas superiores redondeadas 3">
-            <a:extLst>
-              <a:ext uri="{FF2B5EF4-FFF2-40B4-BE49-F238E27FC236}">
-                <a16:creationId xmlns:a16="http://schemas.microsoft.com/office/drawing/2014/main" id="{1440226F-6F66-4B48-8055-115D3FDD9CA3}"/>
-              </a:ext>
-            </a:extLst>
-          </p:cNvPr>
-          <p:cNvSpPr/>
-          <p:nvPr/>
-        </p:nvSpPr>
-        <p:spPr>
-          <a:xfrm>
-            <a:off x="611560" y="1052736"/>
-            <a:ext cx="7920880" cy="4968552"/>
-          </a:xfrm>
-          <a:prstGeom prst="round2SameRect">
-            <a:avLst/>
-          </a:prstGeom>
-        </p:spPr>
-        <p:style>
-          <a:lnRef idx="2">
-            <a:schemeClr val="accent1">
-              <a:shade val="50000"/>
-            </a:schemeClr>
-          </a:lnRef>
-          <a:fillRef idx="1">
-            <a:schemeClr val="accent1"/>
-          </a:fillRef>
-          <a:effectRef idx="0">
-            <a:schemeClr val="accent1"/>
-          </a:effectRef>
-          <a:fontRef idx="minor">
-            <a:schemeClr val="lt1"/>
-          </a:fontRef>
-        </p:style>
-        <p:txBody>
-          <a:bodyPr rtlCol="0" anchor="ctr"/>
-          <a:lstStyle/>
-          <a:p>
-            <a:pPr>
-              <a:buFont typeface="Arial" panose="020B0604020202020204" pitchFamily="34" charset="0"/>
-              <a:buChar char="•"/>
-            </a:pPr>
+          <p:cNvPr id="2" name="Título 1"/>
+          <p:cNvSpPr>
+            <a:spLocks noGrp="1"/>
+          </p:cNvSpPr>
+          <p:nvPr>
+            <p:ph type="title"/>
+          </p:nvPr>
+        </p:nvSpPr>
+        <p:spPr/>
+        <p:txBody>
+          <a:bodyPr/>
+          <a:lstStyle/>
+          <a:p>
+            <a:r>
+              <a:rPr lang="es-PA" sz="4400" dirty="0"/>
+              <a:t>¿Qué podemos hacer mejor?</a:t>
+            </a:r>
+            <a:br>
+              <a:rPr lang="es-PA" sz="4400" dirty="0"/>
+            </a:br>
+            <a:endParaRPr lang="en-US" dirty="0"/>
+          </a:p>
+        </p:txBody>
+      </p:sp>
+      <p:sp>
+        <p:nvSpPr>
+          <p:cNvPr id="3" name="Marcador de contenido 2"/>
+          <p:cNvSpPr>
+            <a:spLocks noGrp="1"/>
+          </p:cNvSpPr>
+          <p:nvPr>
+            <p:ph idx="1"/>
+          </p:nvPr>
+        </p:nvSpPr>
+        <p:spPr/>
+        <p:txBody>
+          <a:bodyPr/>
+          <a:lstStyle/>
+          <a:p>
             <a:r>
               <a:rPr lang="es-MX" dirty="0"/>
-              <a:t>Realizar pruebas piloto con grupos de estudiantes.</a:t>
-            </a:r>
-          </a:p>
-          <a:p>
-            <a:pPr>
-              <a:buFont typeface="Arial" panose="020B0604020202020204" pitchFamily="34" charset="0"/>
-              <a:buChar char="•"/>
-            </a:pPr>
-            <a:endParaRPr lang="es-MX" dirty="0"/>
-          </a:p>
-          <a:p>
-            <a:pPr>
-              <a:buFont typeface="Arial" panose="020B0604020202020204" pitchFamily="34" charset="0"/>
-              <a:buChar char="•"/>
-            </a:pPr>
+              <a:t>Reducir tiempos en pruebas de integración</a:t>
+            </a:r>
+            <a:r>
+              <a:rPr lang="es-MX" dirty="0" smtClean="0"/>
+              <a:t>.</a:t>
+            </a:r>
+          </a:p>
+          <a:p>
+            <a:r>
+              <a:rPr lang="es-MX" dirty="0" smtClean="0"/>
+              <a:t>Mejorar </a:t>
+            </a:r>
             <a:r>
               <a:rPr lang="es-MX" dirty="0"/>
-              <a:t>Recoger </a:t>
+              <a:t>documentación técnica y conexión entre módulos (STU ↔ DOC ↔ ADM</a:t>
+            </a:r>
+            <a:r>
+              <a:rPr lang="es-MX" dirty="0" smtClean="0"/>
+              <a:t>).</a:t>
+            </a:r>
+          </a:p>
+          <a:p>
+            <a:r>
+              <a:rPr lang="es-MX" dirty="0" smtClean="0"/>
+              <a:t>Priorizar </a:t>
+            </a:r>
+            <a:r>
+              <a:rPr lang="es-MX" dirty="0"/>
+              <a:t>historias críticas antes de mejoras visuales</a:t>
+            </a:r>
+            <a:r>
+              <a:rPr lang="es-MX" dirty="0" smtClean="0"/>
+              <a:t>.</a:t>
+            </a:r>
+          </a:p>
+          <a:p>
+            <a:r>
+              <a:rPr lang="es-MX" dirty="0" smtClean="0"/>
+              <a:t>Automatizar </a:t>
+            </a:r>
+            <a:r>
+              <a:rPr lang="es-MX" dirty="0"/>
+              <a:t>parte del </a:t>
             </a:r>
             <a:r>
               <a:rPr lang="es-MX" dirty="0" err="1"/>
-              <a:t>feedback</a:t>
+              <a:t>testing</a:t>
             </a:r>
             <a:r>
               <a:rPr lang="es-MX" dirty="0"/>
-              <a:t> y ajustar funcionalidades del sistema.</a:t>
-            </a:r>
-          </a:p>
-          <a:p>
-            <a:endParaRPr lang="es-MX" dirty="0"/>
-          </a:p>
-          <a:p>
-            <a:pPr>
-              <a:buFont typeface="Arial" panose="020B0604020202020204" pitchFamily="34" charset="0"/>
-              <a:buChar char="•"/>
-            </a:pPr>
-            <a:r>
-              <a:rPr lang="es-MX" dirty="0"/>
-              <a:t>Diseñar un plan de mejora continua basado en resultados medibles.</a:t>
-            </a:r>
-          </a:p>
-        </p:txBody>
-      </p:sp>
-      <p:sp>
-        <p:nvSpPr>
-          <p:cNvPr id="6" name="Rectángulo 5">
-            <a:extLst>
-              <a:ext uri="{FF2B5EF4-FFF2-40B4-BE49-F238E27FC236}">
-                <a16:creationId xmlns:a16="http://schemas.microsoft.com/office/drawing/2014/main" id="{600A4076-4565-4A41-AF82-6CBC15A146AE}"/>
-              </a:ext>
-            </a:extLst>
-          </p:cNvPr>
-          <p:cNvSpPr/>
-          <p:nvPr/>
-        </p:nvSpPr>
-        <p:spPr>
-          <a:xfrm>
-            <a:off x="1403648" y="1268760"/>
-            <a:ext cx="6813084" cy="646331"/>
-          </a:xfrm>
-          <a:prstGeom prst="rect">
-            <a:avLst/>
-          </a:prstGeom>
-          <a:noFill/>
-        </p:spPr>
-        <p:txBody>
-          <a:bodyPr wrap="none" lIns="91440" tIns="45720" rIns="91440" bIns="45720">
-            <a:spAutoFit/>
-            <a:scene3d>
-              <a:camera prst="orthographicFront"/>
-              <a:lightRig rig="harsh" dir="t"/>
-            </a:scene3d>
-            <a:sp3d extrusionH="57150" prstMaterial="matte">
-              <a:bevelT w="63500" h="12700" prst="angle"/>
-              <a:contourClr>
-                <a:schemeClr val="bg1">
-                  <a:lumMod val="65000"/>
-                </a:schemeClr>
-              </a:contourClr>
-            </a:sp3d>
-          </a:bodyPr>
-          <a:lstStyle/>
-          <a:p>
-            <a:pPr algn="ctr"/>
-            <a:r>
-              <a:rPr lang="es-PA" sz="3600" b="1" cap="none" spc="0" dirty="0">
-                <a:ln/>
-                <a:solidFill>
-                  <a:schemeClr val="accent3"/>
-                </a:solidFill>
-                <a:effectLst/>
-              </a:rPr>
-              <a:t>Qué estamos haciendo bien?</a:t>
-            </a:r>
-            <a:endParaRPr lang="es-PE" sz="3600" b="1" cap="none" spc="0" dirty="0">
-              <a:ln/>
-              <a:solidFill>
-                <a:schemeClr val="accent3"/>
-              </a:solidFill>
-              <a:effectLst/>
-            </a:endParaRPr>
+              <a:t> de regresión.</a:t>
+            </a:r>
+            <a:endParaRPr lang="en-US" dirty="0"/>
           </a:p>
         </p:txBody>
       </p:sp>
     </p:spTree>
     <p:extLst>
       <p:ext uri="{BB962C8B-B14F-4D97-AF65-F5344CB8AC3E}">
-        <p14:creationId xmlns:p14="http://schemas.microsoft.com/office/powerpoint/2010/main" val="197236051"/>
+        <p14:creationId xmlns:p14="http://schemas.microsoft.com/office/powerpoint/2010/main" val="693516196"/>
+      </p:ext>
+    </p:extLst>
+  </p:cSld>
+  <p:clrMapOvr>
+    <a:masterClrMapping/>
+  </p:clrMapOvr>
+</p:sld>
+</file>
+
+<file path=ppt/slides/slide6.xml><?xml version="1.0" encoding="utf-8"?>
+<p:sld xmlns:a="http://schemas.openxmlformats.org/drawingml/2006/main" xmlns:r="http://schemas.openxmlformats.org/officeDocument/2006/relationships" xmlns:p="http://schemas.openxmlformats.org/presentationml/2006/main">
+  <p:cSld>
+    <p:spTree>
+      <p:nvGrpSpPr>
+        <p:cNvPr id="1" name=""/>
+        <p:cNvGrpSpPr/>
+        <p:nvPr/>
+      </p:nvGrpSpPr>
+      <p:grpSpPr>
+        <a:xfrm>
+          <a:off x="0" y="0"/>
+          <a:ext cx="0" cy="0"/>
+          <a:chOff x="0" y="0"/>
+          <a:chExt cx="0" cy="0"/>
+        </a:xfrm>
+      </p:grpSpPr>
+      <p:sp>
+        <p:nvSpPr>
+          <p:cNvPr id="2" name="Título 1"/>
+          <p:cNvSpPr>
+            <a:spLocks noGrp="1"/>
+          </p:cNvSpPr>
+          <p:nvPr>
+            <p:ph type="title"/>
+          </p:nvPr>
+        </p:nvSpPr>
+        <p:spPr/>
+        <p:txBody>
+          <a:bodyPr/>
+          <a:lstStyle/>
+          <a:p>
+            <a:r>
+              <a:rPr lang="en-US" dirty="0"/>
+              <a:t>Personas</a:t>
+            </a:r>
+          </a:p>
+        </p:txBody>
+      </p:sp>
+      <p:sp>
+        <p:nvSpPr>
+          <p:cNvPr id="3" name="Marcador de contenido 2"/>
+          <p:cNvSpPr>
+            <a:spLocks noGrp="1"/>
+          </p:cNvSpPr>
+          <p:nvPr>
+            <p:ph idx="1"/>
+          </p:nvPr>
+        </p:nvSpPr>
+        <p:spPr/>
+        <p:txBody>
+          <a:bodyPr/>
+          <a:lstStyle/>
+          <a:p>
+            <a:r>
+              <a:rPr lang="es-MX" dirty="0"/>
+              <a:t>Mayor colaboración entre roles (PO, QA, </a:t>
+            </a:r>
+            <a:r>
+              <a:rPr lang="es-MX" dirty="0" err="1"/>
+              <a:t>Dev</a:t>
+            </a:r>
+            <a:r>
+              <a:rPr lang="es-MX" dirty="0" smtClean="0"/>
+              <a:t>).</a:t>
+            </a:r>
+          </a:p>
+          <a:p>
+            <a:r>
+              <a:rPr lang="es-MX" dirty="0" smtClean="0"/>
+              <a:t>Reforzar </a:t>
+            </a:r>
+            <a:r>
+              <a:rPr lang="es-MX" dirty="0"/>
+              <a:t>participación de docentes y estudiantes en pruebas de usuario</a:t>
+            </a:r>
+            <a:r>
+              <a:rPr lang="es-MX" dirty="0" smtClean="0"/>
+              <a:t>.</a:t>
+            </a:r>
+          </a:p>
+          <a:p>
+            <a:r>
+              <a:rPr lang="es-MX" dirty="0" smtClean="0"/>
+              <a:t>Reconocer </a:t>
+            </a:r>
+            <a:r>
+              <a:rPr lang="es-MX" dirty="0"/>
+              <a:t>el esfuerzo de quienes resolvieron bloqueos complejos.</a:t>
+            </a:r>
+            <a:endParaRPr lang="en-US" dirty="0"/>
+          </a:p>
+        </p:txBody>
+      </p:sp>
+    </p:spTree>
+    <p:extLst>
+      <p:ext uri="{BB962C8B-B14F-4D97-AF65-F5344CB8AC3E}">
+        <p14:creationId xmlns:p14="http://schemas.microsoft.com/office/powerpoint/2010/main" val="2574455269"/>
+      </p:ext>
+    </p:extLst>
+  </p:cSld>
+  <p:clrMapOvr>
+    <a:masterClrMapping/>
+  </p:clrMapOvr>
+</p:sld>
+</file>
+
+<file path=ppt/slides/slide7.xml><?xml version="1.0" encoding="utf-8"?>
+<p:sld xmlns:a="http://schemas.openxmlformats.org/drawingml/2006/main" xmlns:r="http://schemas.openxmlformats.org/officeDocument/2006/relationships" xmlns:p="http://schemas.openxmlformats.org/presentationml/2006/main">
+  <p:cSld>
+    <p:spTree>
+      <p:nvGrpSpPr>
+        <p:cNvPr id="1" name=""/>
+        <p:cNvGrpSpPr/>
+        <p:nvPr/>
+      </p:nvGrpSpPr>
+      <p:grpSpPr>
+        <a:xfrm>
+          <a:off x="0" y="0"/>
+          <a:ext cx="0" cy="0"/>
+          <a:chOff x="0" y="0"/>
+          <a:chExt cx="0" cy="0"/>
+        </a:xfrm>
+      </p:grpSpPr>
+      <p:sp>
+        <p:nvSpPr>
+          <p:cNvPr id="2" name="Título 1"/>
+          <p:cNvSpPr>
+            <a:spLocks noGrp="1"/>
+          </p:cNvSpPr>
+          <p:nvPr>
+            <p:ph type="title"/>
+          </p:nvPr>
+        </p:nvSpPr>
+        <p:spPr/>
+        <p:txBody>
+          <a:bodyPr/>
+          <a:lstStyle/>
+          <a:p>
+            <a:r>
+              <a:rPr lang="en-US" dirty="0" err="1"/>
+              <a:t>Relaciones</a:t>
+            </a:r>
+            <a:endParaRPr lang="en-US" dirty="0"/>
+          </a:p>
+        </p:txBody>
+      </p:sp>
+      <p:sp>
+        <p:nvSpPr>
+          <p:cNvPr id="3" name="Marcador de contenido 2"/>
+          <p:cNvSpPr>
+            <a:spLocks noGrp="1"/>
+          </p:cNvSpPr>
+          <p:nvPr>
+            <p:ph idx="1"/>
+          </p:nvPr>
+        </p:nvSpPr>
+        <p:spPr/>
+        <p:txBody>
+          <a:bodyPr/>
+          <a:lstStyle/>
+          <a:p>
+            <a:r>
+              <a:rPr lang="es-MX" dirty="0"/>
+              <a:t>Comunicación constante por canales definidos (</a:t>
+            </a:r>
+            <a:r>
+              <a:rPr lang="es-MX" dirty="0" err="1"/>
+              <a:t>Teams</a:t>
+            </a:r>
+            <a:r>
+              <a:rPr lang="es-MX" dirty="0"/>
+              <a:t>/</a:t>
+            </a:r>
+            <a:r>
+              <a:rPr lang="es-MX" dirty="0" err="1"/>
+              <a:t>Slack</a:t>
+            </a:r>
+            <a:r>
+              <a:rPr lang="es-MX" dirty="0" smtClean="0"/>
+              <a:t>).</a:t>
+            </a:r>
+          </a:p>
+          <a:p>
+            <a:r>
+              <a:rPr lang="es-MX" dirty="0" smtClean="0"/>
+              <a:t>Fomentar </a:t>
+            </a:r>
+            <a:r>
+              <a:rPr lang="es-MX" dirty="0" err="1"/>
+              <a:t>feedback</a:t>
+            </a:r>
+            <a:r>
+              <a:rPr lang="es-MX" dirty="0"/>
+              <a:t> constructivo en reuniones diarias</a:t>
+            </a:r>
+            <a:r>
+              <a:rPr lang="es-MX" dirty="0" smtClean="0"/>
+              <a:t>.</a:t>
+            </a:r>
+          </a:p>
+          <a:p>
+            <a:r>
+              <a:rPr lang="es-MX" dirty="0" smtClean="0"/>
+              <a:t>Mantener </a:t>
+            </a:r>
+            <a:r>
+              <a:rPr lang="es-MX" dirty="0"/>
+              <a:t>el espíritu colaborativo del equipo.</a:t>
+            </a:r>
+            <a:endParaRPr lang="en-US" dirty="0"/>
+          </a:p>
+        </p:txBody>
+      </p:sp>
+    </p:spTree>
+    <p:extLst>
+      <p:ext uri="{BB962C8B-B14F-4D97-AF65-F5344CB8AC3E}">
+        <p14:creationId xmlns:p14="http://schemas.microsoft.com/office/powerpoint/2010/main" val="1319230218"/>
+      </p:ext>
+    </p:extLst>
+  </p:cSld>
+  <p:clrMapOvr>
+    <a:masterClrMapping/>
+  </p:clrMapOvr>
+</p:sld>
+</file>
+
+<file path=ppt/slides/slide8.xml><?xml version="1.0" encoding="utf-8"?>
+<p:sld xmlns:a="http://schemas.openxmlformats.org/drawingml/2006/main" xmlns:r="http://schemas.openxmlformats.org/officeDocument/2006/relationships" xmlns:p="http://schemas.openxmlformats.org/presentationml/2006/main">
+  <p:cSld>
+    <p:spTree>
+      <p:nvGrpSpPr>
+        <p:cNvPr id="1" name=""/>
+        <p:cNvGrpSpPr/>
+        <p:nvPr/>
+      </p:nvGrpSpPr>
+      <p:grpSpPr>
+        <a:xfrm>
+          <a:off x="0" y="0"/>
+          <a:ext cx="0" cy="0"/>
+          <a:chOff x="0" y="0"/>
+          <a:chExt cx="0" cy="0"/>
+        </a:xfrm>
+      </p:grpSpPr>
+      <p:sp>
+        <p:nvSpPr>
+          <p:cNvPr id="2" name="Título 1"/>
+          <p:cNvSpPr>
+            <a:spLocks noGrp="1"/>
+          </p:cNvSpPr>
+          <p:nvPr>
+            <p:ph type="title"/>
+          </p:nvPr>
+        </p:nvSpPr>
+        <p:spPr/>
+        <p:txBody>
+          <a:bodyPr/>
+          <a:lstStyle/>
+          <a:p>
+            <a:r>
+              <a:rPr lang="en-US" dirty="0" err="1"/>
+              <a:t>Procesos</a:t>
+            </a:r>
+            <a:endParaRPr lang="en-US" dirty="0"/>
+          </a:p>
+        </p:txBody>
+      </p:sp>
+      <p:sp>
+        <p:nvSpPr>
+          <p:cNvPr id="3" name="Marcador de contenido 2"/>
+          <p:cNvSpPr>
+            <a:spLocks noGrp="1"/>
+          </p:cNvSpPr>
+          <p:nvPr>
+            <p:ph idx="1"/>
+          </p:nvPr>
+        </p:nvSpPr>
+        <p:spPr/>
+        <p:txBody>
+          <a:bodyPr/>
+          <a:lstStyle/>
+          <a:p>
+            <a:r>
+              <a:rPr lang="es-MX" dirty="0"/>
+              <a:t>Refinar </a:t>
+            </a:r>
+            <a:r>
+              <a:rPr lang="es-MX" dirty="0" err="1"/>
+              <a:t>backlog</a:t>
+            </a:r>
+            <a:r>
+              <a:rPr lang="es-MX" dirty="0"/>
+              <a:t> con criterios más medibles</a:t>
+            </a:r>
+            <a:r>
+              <a:rPr lang="es-MX" dirty="0" smtClean="0"/>
+              <a:t>.</a:t>
+            </a:r>
+          </a:p>
+          <a:p>
+            <a:r>
+              <a:rPr lang="es-MX" dirty="0" smtClean="0"/>
+              <a:t>Mantener </a:t>
+            </a:r>
+            <a:r>
+              <a:rPr lang="es-MX" dirty="0"/>
+              <a:t>definición de “Hecho” (</a:t>
+            </a:r>
+            <a:r>
+              <a:rPr lang="es-MX" dirty="0" err="1"/>
+              <a:t>DoD</a:t>
+            </a:r>
+            <a:r>
+              <a:rPr lang="es-MX" dirty="0"/>
+              <a:t>) clara para todos los roles</a:t>
+            </a:r>
+            <a:r>
+              <a:rPr lang="es-MX" dirty="0" smtClean="0"/>
+              <a:t>.</a:t>
+            </a:r>
+          </a:p>
+          <a:p>
+            <a:r>
+              <a:rPr lang="es-MX" dirty="0" smtClean="0"/>
+              <a:t>Ajustar </a:t>
+            </a:r>
+            <a:r>
+              <a:rPr lang="es-MX" dirty="0"/>
+              <a:t>duración de los </a:t>
+            </a:r>
+            <a:r>
+              <a:rPr lang="es-MX" dirty="0" err="1"/>
+              <a:t>sprints</a:t>
+            </a:r>
+            <a:r>
+              <a:rPr lang="es-MX" dirty="0"/>
+              <a:t> si las tareas se acumulan.</a:t>
+            </a:r>
+            <a:endParaRPr lang="en-US" dirty="0"/>
+          </a:p>
+        </p:txBody>
+      </p:sp>
+    </p:spTree>
+    <p:extLst>
+      <p:ext uri="{BB962C8B-B14F-4D97-AF65-F5344CB8AC3E}">
+        <p14:creationId xmlns:p14="http://schemas.microsoft.com/office/powerpoint/2010/main" val="2419515077"/>
+      </p:ext>
+    </p:extLst>
+  </p:cSld>
+  <p:clrMapOvr>
+    <a:masterClrMapping/>
+  </p:clrMapOvr>
+</p:sld>
+</file>
+
+<file path=ppt/slides/slide9.xml><?xml version="1.0" encoding="utf-8"?>
+<p:sld xmlns:a="http://schemas.openxmlformats.org/drawingml/2006/main" xmlns:r="http://schemas.openxmlformats.org/officeDocument/2006/relationships" xmlns:p="http://schemas.openxmlformats.org/presentationml/2006/main">
+  <p:cSld>
+    <p:spTree>
+      <p:nvGrpSpPr>
+        <p:cNvPr id="1" name=""/>
+        <p:cNvGrpSpPr/>
+        <p:nvPr/>
+      </p:nvGrpSpPr>
+      <p:grpSpPr>
+        <a:xfrm>
+          <a:off x="0" y="0"/>
+          <a:ext cx="0" cy="0"/>
+          <a:chOff x="0" y="0"/>
+          <a:chExt cx="0" cy="0"/>
+        </a:xfrm>
+      </p:grpSpPr>
+      <p:sp>
+        <p:nvSpPr>
+          <p:cNvPr id="2" name="Título 1"/>
+          <p:cNvSpPr>
+            <a:spLocks noGrp="1"/>
+          </p:cNvSpPr>
+          <p:nvPr>
+            <p:ph type="title"/>
+          </p:nvPr>
+        </p:nvSpPr>
+        <p:spPr/>
+        <p:txBody>
+          <a:bodyPr/>
+          <a:lstStyle/>
+          <a:p>
+            <a:r>
+              <a:rPr lang="en-US" dirty="0" err="1"/>
+              <a:t>Herramientas</a:t>
+            </a:r>
+            <a:endParaRPr lang="en-US" dirty="0"/>
+          </a:p>
+        </p:txBody>
+      </p:sp>
+      <p:sp>
+        <p:nvSpPr>
+          <p:cNvPr id="3" name="Marcador de contenido 2"/>
+          <p:cNvSpPr>
+            <a:spLocks noGrp="1"/>
+          </p:cNvSpPr>
+          <p:nvPr>
+            <p:ph idx="1"/>
+          </p:nvPr>
+        </p:nvSpPr>
+        <p:spPr/>
+        <p:txBody>
+          <a:bodyPr/>
+          <a:lstStyle/>
+          <a:p>
+            <a:r>
+              <a:rPr lang="en-US" dirty="0" err="1"/>
+              <a:t>Uso</a:t>
+            </a:r>
+            <a:r>
+              <a:rPr lang="en-US" dirty="0"/>
+              <a:t> </a:t>
+            </a:r>
+            <a:r>
+              <a:rPr lang="en-US" dirty="0" err="1"/>
+              <a:t>efectivo</a:t>
+            </a:r>
+            <a:r>
+              <a:rPr lang="en-US" dirty="0"/>
+              <a:t> de Jira/Trello para </a:t>
+            </a:r>
+            <a:r>
+              <a:rPr lang="en-US" dirty="0" err="1"/>
+              <a:t>seguimiento</a:t>
+            </a:r>
+            <a:r>
+              <a:rPr lang="en-US" dirty="0"/>
+              <a:t> de </a:t>
+            </a:r>
+            <a:r>
+              <a:rPr lang="en-US" dirty="0" err="1"/>
+              <a:t>historias</a:t>
+            </a:r>
+            <a:r>
+              <a:rPr lang="en-US" dirty="0"/>
+              <a:t>.</a:t>
+            </a:r>
+          </a:p>
+          <a:p>
+            <a:r>
+              <a:rPr lang="en-US" dirty="0" err="1"/>
+              <a:t>Git</a:t>
+            </a:r>
+            <a:r>
+              <a:rPr lang="en-US" dirty="0"/>
+              <a:t> </a:t>
+            </a:r>
+            <a:r>
+              <a:rPr lang="en-US" dirty="0" err="1"/>
+              <a:t>funcionando</a:t>
+            </a:r>
+            <a:r>
+              <a:rPr lang="en-US" dirty="0"/>
+              <a:t> </a:t>
+            </a:r>
+            <a:r>
+              <a:rPr lang="en-US" dirty="0" err="1"/>
+              <a:t>correctamente</a:t>
+            </a:r>
+            <a:r>
+              <a:rPr lang="en-US" dirty="0"/>
+              <a:t>.</a:t>
+            </a:r>
+          </a:p>
+          <a:p>
+            <a:r>
+              <a:rPr lang="en-US" dirty="0" err="1"/>
+              <a:t>Mejorar</a:t>
+            </a:r>
+            <a:r>
+              <a:rPr lang="en-US" dirty="0"/>
+              <a:t> dashboards de </a:t>
+            </a:r>
+            <a:r>
+              <a:rPr lang="en-US" dirty="0" err="1"/>
+              <a:t>métricas</a:t>
+            </a:r>
+            <a:r>
+              <a:rPr lang="en-US" dirty="0"/>
+              <a:t> y </a:t>
+            </a:r>
+            <a:r>
+              <a:rPr lang="en-US" dirty="0" err="1"/>
+              <a:t>reportes</a:t>
+            </a:r>
+            <a:r>
+              <a:rPr lang="en-US" dirty="0"/>
+              <a:t> </a:t>
+            </a:r>
+            <a:r>
+              <a:rPr lang="en-US" dirty="0" err="1"/>
+              <a:t>automáticos</a:t>
+            </a:r>
+            <a:r>
+              <a:rPr lang="en-US" dirty="0"/>
+              <a:t>.</a:t>
+            </a:r>
+          </a:p>
+          <a:p>
+            <a:pPr marL="0" indent="0">
+              <a:buNone/>
+            </a:pPr>
+            <a:endParaRPr lang="en-US" dirty="0"/>
+          </a:p>
+        </p:txBody>
+      </p:sp>
+    </p:spTree>
+    <p:extLst>
+      <p:ext uri="{BB962C8B-B14F-4D97-AF65-F5344CB8AC3E}">
+        <p14:creationId xmlns:p14="http://schemas.microsoft.com/office/powerpoint/2010/main" val="3260376986"/>
       </p:ext>
     </p:extLst>
   </p:cSld>
@@ -22046,34 +22441,34 @@
         <a:sysClr val="window" lastClr="FFFFFF"/>
       </a:lt1>
       <a:dk2>
-        <a:srgbClr val="1E5155"/>
+        <a:srgbClr val="EE5818"/>
       </a:dk2>
       <a:lt2>
         <a:srgbClr val="EBEBEB"/>
       </a:lt2>
       <a:accent1>
-        <a:srgbClr val="B01513"/>
+        <a:srgbClr val="F5A408"/>
       </a:accent1>
       <a:accent2>
-        <a:srgbClr val="EA6312"/>
+        <a:srgbClr val="FA731A"/>
       </a:accent2>
       <a:accent3>
-        <a:srgbClr val="E6B729"/>
+        <a:srgbClr val="AB9281"/>
       </a:accent3>
       <a:accent4>
-        <a:srgbClr val="6AAC90"/>
+        <a:srgbClr val="A18CD0"/>
       </a:accent4>
       <a:accent5>
-        <a:srgbClr val="5F9C9D"/>
+        <a:srgbClr val="8EBBD2"/>
       </a:accent5>
       <a:accent6>
-        <a:srgbClr val="9E5E9B"/>
+        <a:srgbClr val="ACC995"/>
       </a:accent6>
       <a:hlink>
-        <a:srgbClr val="58C1BA"/>
+        <a:srgbClr val="FAC96A"/>
       </a:hlink>
       <a:folHlink>
-        <a:srgbClr val="9DD0CB"/>
+        <a:srgbClr val="FCDB9B"/>
       </a:folHlink>
     </a:clrScheme>
     <a:fontScheme name="Ion">
@@ -22249,19 +22644,19 @@
           <a:gsLst>
             <a:gs pos="0">
               <a:schemeClr val="phClr">
-                <a:tint val="97000"/>
-                <a:hueMod val="88000"/>
-                <a:satMod val="130000"/>
-                <a:lumMod val="124000"/>
+                <a:tint val="98000"/>
+                <a:hueMod val="104000"/>
+                <a:satMod val="128000"/>
+                <a:lumMod val="104000"/>
               </a:schemeClr>
             </a:gs>
             <a:gs pos="100000">
               <a:schemeClr val="phClr">
-                <a:tint val="96000"/>
-                <a:shade val="88000"/>
-                <a:hueMod val="108000"/>
+                <a:tint val="100000"/>
+                <a:shade val="76000"/>
+                <a:hueMod val="89000"/>
                 <a:satMod val="164000"/>
-                <a:lumMod val="76000"/>
+                <a:lumMod val="68000"/>
               </a:schemeClr>
             </a:gs>
           </a:gsLst>
@@ -22273,16 +22668,14 @@
           <a:blip xmlns:r="http://schemas.openxmlformats.org/officeDocument/2006/relationships" r:embed="rId1">
             <a:duotone>
               <a:schemeClr val="phClr">
-                <a:shade val="69000"/>
-                <a:hueMod val="108000"/>
-                <a:satMod val="164000"/>
-                <a:lumMod val="74000"/>
+                <a:shade val="42000"/>
+                <a:hueMod val="42000"/>
+                <a:satMod val="124000"/>
+                <a:lumMod val="62000"/>
               </a:schemeClr>
               <a:schemeClr val="phClr">
                 <a:tint val="96000"/>
-                <a:hueMod val="88000"/>
-                <a:satMod val="140000"/>
-                <a:lumMod val="132000"/>
+                <a:satMod val="130000"/>
               </a:schemeClr>
             </a:duotone>
           </a:blip>
@@ -22295,7 +22688,7 @@
   <a:extraClrSchemeLst/>
   <a:extLst>
     <a:ext uri="{05A4C25C-085E-4340-85A3-A5531E510DB2}">
-      <thm15:themeFamily xmlns:thm15="http://schemas.microsoft.com/office/thememl/2012/main" name="Ion" id="{B8441ADB-2E43-4AF7-B97A-BD870242C6A8}" vid="{292E63A9-BB86-4E3D-B92A-7223C6510D2E}"/>
+      <thm15:themeFamily xmlns:thm15="http://schemas.microsoft.com/office/thememl/2012/main" name="Ion" id="{B8441ADB-2E43-4AF7-B97A-BD870242C6A8}" vid="{5A2F9111-B2DB-470C-BA56-608F9B658826}"/>
     </a:ext>
   </a:extLst>
 </a:theme>
